--- a/体验与规划.pptx
+++ b/体验与规划.pptx
@@ -109,12 +109,12 @@
   <p:extLst>
     <p:ext uri="{521415D9-36F7-43E2-AB2F-B90AF26B5E84}">
       <p14:sectionLst xmlns:p14="http://schemas.microsoft.com/office/powerpoint/2010/main">
-        <p14:section name="体验专项" id="{3b038762-f160-b9fa-6821-39212b46319b}">
+        <p14:section name="体验专项" id="{df6a49d4-1657-6825-12fc-6dc8e49087c8}">
           <p14:sldIdLst>
             <p14:sldId id="256"/>
           </p14:sldIdLst>
         </p14:section>
-        <p14:section name="思考与规划" id="{8fac2a18-4cfc-3e14-1533-9a6205b37f04}">
+        <p14:section name="思考与规划" id="{e64e7376-967b-6323-5cd8-f2cc9d4159b4}">
           <p14:sldIdLst>
             <p14:sldId id="257"/>
             <p14:sldId id="258"/>
@@ -2699,11 +2699,11 @@
         <p:spPr>
           <a:xfrm>
             <a:off x="457200" y="1600200"/>
-            <a:ext cx="3429000" cy="4526280"/>
+            <a:ext cx="4892040" cy="4526280"/>
           </a:xfrm>
           <a:prstGeom prst="roundRect">
             <a:avLst>
-              <a:gd name="adj" fmla="val 2133"/>
+              <a:gd name="adj" fmla="val 1616"/>
             </a:avLst>
           </a:prstGeom>
           <a:solidFill>
@@ -2725,12 +2725,12 @@
         </p:nvSpPr>
         <p:spPr>
           <a:xfrm>
-            <a:off x="4379976" y="1600200"/>
-            <a:ext cx="3429000" cy="4526280"/>
+            <a:off x="5660136" y="1600200"/>
+            <a:ext cx="2880360" cy="4526280"/>
           </a:xfrm>
           <a:prstGeom prst="roundRect">
             <a:avLst>
-              <a:gd name="adj" fmla="val 2133"/>
+              <a:gd name="adj" fmla="val 2540"/>
             </a:avLst>
           </a:prstGeom>
           <a:solidFill>
@@ -2752,12 +2752,12 @@
         </p:nvSpPr>
         <p:spPr>
           <a:xfrm>
-            <a:off x="8302752" y="1600200"/>
-            <a:ext cx="3429000" cy="4526280"/>
+            <a:off x="8851392" y="1600200"/>
+            <a:ext cx="2880360" cy="4526280"/>
           </a:xfrm>
           <a:prstGeom prst="roundRect">
             <a:avLst>
-              <a:gd name="adj" fmla="val 2133"/>
+              <a:gd name="adj" fmla="val 2540"/>
             </a:avLst>
           </a:prstGeom>
           <a:solidFill>
@@ -2779,8 +2779,8 @@
         </p:nvSpPr>
         <p:spPr>
           <a:xfrm>
-            <a:off x="3959352" y="3680460"/>
-            <a:ext cx="347472" cy="365760"/>
+            <a:off x="5394960" y="3680460"/>
+            <a:ext cx="219456" cy="365760"/>
           </a:xfrm>
           <a:prstGeom prst="rightArrow">
             <a:avLst/>
@@ -2804,8 +2804,8 @@
         </p:nvSpPr>
         <p:spPr>
           <a:xfrm>
-            <a:off x="7882128" y="3680460"/>
-            <a:ext cx="347472" cy="365760"/>
+            <a:off x="8586216" y="3680460"/>
+            <a:ext cx="219456" cy="365760"/>
           </a:xfrm>
           <a:prstGeom prst="rightArrow">
             <a:avLst/>
@@ -2829,7 +2829,7 @@
         </p:nvSpPr>
         <p:spPr>
           <a:xfrm>
-            <a:off x="685800" y="1828800"/>
+            <a:off x="640080" y="1828800"/>
             <a:ext cx="713232" cy="329184"/>
           </a:xfrm>
           <a:prstGeom prst="roundRect">
@@ -2856,7 +2856,7 @@
         </p:nvSpPr>
         <p:spPr>
           <a:xfrm>
-            <a:off x="685800" y="1828800"/>
+            <a:off x="640080" y="1828800"/>
             <a:ext cx="713232" cy="329184"/>
           </a:xfrm>
           <a:prstGeom prst="rect">
@@ -2892,8 +2892,8 @@
         </p:nvSpPr>
         <p:spPr>
           <a:xfrm>
-            <a:off x="685800" y="2286000"/>
-            <a:ext cx="2971800" cy="320040"/>
+            <a:off x="640080" y="2286000"/>
+            <a:ext cx="4526280" cy="320040"/>
           </a:xfrm>
           <a:prstGeom prst="rect">
             <a:avLst/>
@@ -2914,49 +2914,2638 @@
                   <a:srgbClr val="15315E"/>
                 </a:solidFill>
               </a:rPr>
-              <a:t>以支付挽回为例：按场景拆分</a:t>
+              <a:t>以支付挽回为例：什么情况下要走直付</a:t>
             </a:r>
             <a:endParaRPr lang="en-US" sz="1500" dirty="0"/>
           </a:p>
         </p:txBody>
       </p:sp>
-      <p:sp>
-        <p:nvSpPr>
-          <p:cNvPr id="12" name="th-a-root"/>
-          <p:cNvSpPr/>
-          <p:nvPr/>
-        </p:nvSpPr>
-        <p:spPr>
-          <a:xfrm>
-            <a:off x="685800" y="2743200"/>
-            <a:ext cx="2971800" cy="566928"/>
-          </a:xfrm>
-          <a:prstGeom prst="roundRect">
-            <a:avLst>
-              <a:gd name="adj" fmla="val 9677"/>
-            </a:avLst>
-          </a:prstGeom>
-          <a:solidFill>
-            <a:srgbClr val="15315E"/>
-          </a:solidFill>
-          <a:ln w="12700">
-            <a:solidFill>
-              <a:srgbClr val="15315E"/>
-            </a:solidFill>
-            <a:prstDash val="solid"/>
-          </a:ln>
-        </p:spPr>
-      </p:sp>
-      <p:sp>
-        <p:nvSpPr>
-          <p:cNvPr id="13" name="th-a-root-t"/>
+      <p:graphicFrame>
+        <p:nvGraphicFramePr>
+          <p:cNvPr id="3" name="th-a-table"/>
+          <p:cNvGraphicFramePr>
+            <a:graphicFrameLocks noGrp="1"/>
+          </p:cNvGraphicFramePr>
+          <p:nvPr>
+            <p:extLst>
+              <p:ext uri="{D42A27DB-BD31-4B8C-83A1-F6EECF244321}">
+                <p14:modId xmlns:p14="http://schemas.microsoft.com/office/powerpoint/2010/main" val="1579011935"/>
+              </p:ext>
+            </p:extLst>
+          </p:nvPr>
+        </p:nvGraphicFramePr>
+        <p:xfrm>
+          <a:off x="640080" y="2743200"/>
+          <a:ext cx="4526280" cy="914400"/>
+        </p:xfrm>
+        <a:graphic>
+          <a:graphicData uri="http://schemas.openxmlformats.org/drawingml/2006/table">
+            <a:tbl>
+              <a:tblPr/>
+              <a:tblGrid>
+                <a:gridCol w="548640"/>
+                <a:gridCol w="1463040"/>
+                <a:gridCol w="502920"/>
+                <a:gridCol w="502920"/>
+                <a:gridCol w="502920"/>
+                <a:gridCol w="502920"/>
+                <a:gridCol w="502920"/>
+              </a:tblGrid>
+              <a:tr h="457200">
+                <a:tc>
+                  <a:txBody>
+                    <a:bodyPr/>
+                    <a:lstStyle/>
+                    <a:p>
+                      <a:pPr algn="ctr" indent="0" marL="0">
+                        <a:buNone/>
+                      </a:pPr>
+                      <a:r>
+                        <a:rPr lang="en-US" sz="950" b="1" dirty="0">
+                          <a:solidFill>
+                            <a:srgbClr val="FFFFFF"/>
+                          </a:solidFill>
+                        </a:rPr>
+                        <a:t>端</a:t>
+                      </a:r>
+                      <a:endParaRPr lang="en-US" sz="950" dirty="0"/>
+                    </a:p>
+                  </a:txBody>
+                  <a:tcPr marL="27432" marR="27432" marT="27432" marB="27432" anchor="ctr">
+                    <a:lnL w="9525" cap="flat" cmpd="sng" algn="ctr">
+                      <a:solidFill>
+                        <a:srgbClr val="D9DEE7"/>
+                      </a:solidFill>
+                      <a:prstDash val="solid"/>
+                      <a:round/>
+                      <a:headEnd type="none" w="med" len="med"/>
+                      <a:tailEnd type="none" w="med" len="med"/>
+                    </a:lnL>
+                    <a:lnR w="9525" cap="flat" cmpd="sng" algn="ctr">
+                      <a:solidFill>
+                        <a:srgbClr val="D9DEE7"/>
+                      </a:solidFill>
+                      <a:prstDash val="solid"/>
+                      <a:round/>
+                      <a:headEnd type="none" w="med" len="med"/>
+                      <a:tailEnd type="none" w="med" len="med"/>
+                    </a:lnR>
+                    <a:lnT w="9525" cap="flat" cmpd="sng" algn="ctr">
+                      <a:solidFill>
+                        <a:srgbClr val="D9DEE7"/>
+                      </a:solidFill>
+                      <a:prstDash val="solid"/>
+                      <a:round/>
+                      <a:headEnd type="none" w="med" len="med"/>
+                      <a:tailEnd type="none" w="med" len="med"/>
+                    </a:lnT>
+                    <a:lnB w="9525" cap="flat" cmpd="sng" algn="ctr">
+                      <a:solidFill>
+                        <a:srgbClr val="D9DEE7"/>
+                      </a:solidFill>
+                      <a:prstDash val="solid"/>
+                      <a:round/>
+                      <a:headEnd type="none" w="med" len="med"/>
+                      <a:tailEnd type="none" w="med" len="med"/>
+                    </a:lnB>
+                    <a:solidFill>
+                      <a:srgbClr val="15315E"/>
+                    </a:solidFill>
+                  </a:tcPr>
+                </a:tc>
+                <a:tc>
+                  <a:txBody>
+                    <a:bodyPr/>
+                    <a:lstStyle/>
+                    <a:p>
+                      <a:pPr algn="ctr" indent="0" marL="0">
+                        <a:buNone/>
+                      </a:pPr>
+                      <a:r>
+                        <a:rPr lang="en-US" sz="950" b="1" dirty="0">
+                          <a:solidFill>
+                            <a:srgbClr val="FFFFFF"/>
+                          </a:solidFill>
+                        </a:rPr>
+                        <a:t>支付方式</a:t>
+                      </a:r>
+                      <a:endParaRPr lang="en-US" sz="950" dirty="0"/>
+                    </a:p>
+                  </a:txBody>
+                  <a:tcPr marL="27432" marR="27432" marT="27432" marB="27432" anchor="ctr">
+                    <a:lnL w="9525" cap="flat" cmpd="sng" algn="ctr">
+                      <a:solidFill>
+                        <a:srgbClr val="D9DEE7"/>
+                      </a:solidFill>
+                      <a:prstDash val="solid"/>
+                      <a:round/>
+                      <a:headEnd type="none" w="med" len="med"/>
+                      <a:tailEnd type="none" w="med" len="med"/>
+                    </a:lnL>
+                    <a:lnR w="9525" cap="flat" cmpd="sng" algn="ctr">
+                      <a:solidFill>
+                        <a:srgbClr val="D9DEE7"/>
+                      </a:solidFill>
+                      <a:prstDash val="solid"/>
+                      <a:round/>
+                      <a:headEnd type="none" w="med" len="med"/>
+                      <a:tailEnd type="none" w="med" len="med"/>
+                    </a:lnR>
+                    <a:lnT w="9525" cap="flat" cmpd="sng" algn="ctr">
+                      <a:solidFill>
+                        <a:srgbClr val="D9DEE7"/>
+                      </a:solidFill>
+                      <a:prstDash val="solid"/>
+                      <a:round/>
+                      <a:headEnd type="none" w="med" len="med"/>
+                      <a:tailEnd type="none" w="med" len="med"/>
+                    </a:lnT>
+                    <a:lnB w="9525" cap="flat" cmpd="sng" algn="ctr">
+                      <a:solidFill>
+                        <a:srgbClr val="D9DEE7"/>
+                      </a:solidFill>
+                      <a:prstDash val="solid"/>
+                      <a:round/>
+                      <a:headEnd type="none" w="med" len="med"/>
+                      <a:tailEnd type="none" w="med" len="med"/>
+                    </a:lnB>
+                    <a:solidFill>
+                      <a:srgbClr val="15315E"/>
+                    </a:solidFill>
+                  </a:tcPr>
+                </a:tc>
+                <a:tc>
+                  <a:txBody>
+                    <a:bodyPr/>
+                    <a:lstStyle/>
+                    <a:p>
+                      <a:pPr algn="ctr" indent="0" marL="0">
+                        <a:buNone/>
+                      </a:pPr>
+                      <a:r>
+                        <a:rPr lang="en-US" sz="950" b="1" dirty="0">
+                          <a:solidFill>
+                            <a:srgbClr val="FFFFFF"/>
+                          </a:solidFill>
+                        </a:rPr>
+                        <a:t>候补</a:t>
+                      </a:r>
+                      <a:endParaRPr lang="en-US" sz="950" dirty="0"/>
+                    </a:p>
+                  </a:txBody>
+                  <a:tcPr marL="27432" marR="27432" marT="27432" marB="27432" anchor="ctr">
+                    <a:lnL w="9525" cap="flat" cmpd="sng" algn="ctr">
+                      <a:solidFill>
+                        <a:srgbClr val="D9DEE7"/>
+                      </a:solidFill>
+                      <a:prstDash val="solid"/>
+                      <a:round/>
+                      <a:headEnd type="none" w="med" len="med"/>
+                      <a:tailEnd type="none" w="med" len="med"/>
+                    </a:lnL>
+                    <a:lnR w="9525" cap="flat" cmpd="sng" algn="ctr">
+                      <a:solidFill>
+                        <a:srgbClr val="D9DEE7"/>
+                      </a:solidFill>
+                      <a:prstDash val="solid"/>
+                      <a:round/>
+                      <a:headEnd type="none" w="med" len="med"/>
+                      <a:tailEnd type="none" w="med" len="med"/>
+                    </a:lnR>
+                    <a:lnT w="9525" cap="flat" cmpd="sng" algn="ctr">
+                      <a:solidFill>
+                        <a:srgbClr val="D9DEE7"/>
+                      </a:solidFill>
+                      <a:prstDash val="solid"/>
+                      <a:round/>
+                      <a:headEnd type="none" w="med" len="med"/>
+                      <a:tailEnd type="none" w="med" len="med"/>
+                    </a:lnT>
+                    <a:lnB w="9525" cap="flat" cmpd="sng" algn="ctr">
+                      <a:solidFill>
+                        <a:srgbClr val="D9DEE7"/>
+                      </a:solidFill>
+                      <a:prstDash val="solid"/>
+                      <a:round/>
+                      <a:headEnd type="none" w="med" len="med"/>
+                      <a:tailEnd type="none" w="med" len="med"/>
+                    </a:lnB>
+                    <a:solidFill>
+                      <a:srgbClr val="15315E"/>
+                    </a:solidFill>
+                  </a:tcPr>
+                </a:tc>
+                <a:tc>
+                  <a:txBody>
+                    <a:bodyPr/>
+                    <a:lstStyle/>
+                    <a:p>
+                      <a:pPr algn="ctr" indent="0" marL="0">
+                        <a:buNone/>
+                      </a:pPr>
+                      <a:r>
+                        <a:rPr lang="en-US" sz="950" b="1" dirty="0">
+                          <a:solidFill>
+                            <a:srgbClr val="FFFFFF"/>
+                          </a:solidFill>
+                        </a:rPr>
+                        <a:t>秒杀/</a:t>
+                      </a:r>
+                      <a:endParaRPr lang="en-US" sz="950" dirty="0"/>
+                    </a:p>
+                    <a:p>
+                      <a:pPr algn="ctr" indent="0" marL="0">
+                        <a:buNone/>
+                      </a:pPr>
+                      <a:r>
+                        <a:rPr lang="en-US" sz="950" b="1" dirty="0">
+                          <a:solidFill>
+                            <a:srgbClr val="FFFFFF"/>
+                          </a:solidFill>
+                        </a:rPr>
+                        <a:t>捡漏</a:t>
+                      </a:r>
+                      <a:endParaRPr lang="en-US" sz="950" dirty="0"/>
+                    </a:p>
+                  </a:txBody>
+                  <a:tcPr marL="27432" marR="27432" marT="27432" marB="27432" anchor="ctr">
+                    <a:lnL w="9525" cap="flat" cmpd="sng" algn="ctr">
+                      <a:solidFill>
+                        <a:srgbClr val="D9DEE7"/>
+                      </a:solidFill>
+                      <a:prstDash val="solid"/>
+                      <a:round/>
+                      <a:headEnd type="none" w="med" len="med"/>
+                      <a:tailEnd type="none" w="med" len="med"/>
+                    </a:lnL>
+                    <a:lnR w="9525" cap="flat" cmpd="sng" algn="ctr">
+                      <a:solidFill>
+                        <a:srgbClr val="D9DEE7"/>
+                      </a:solidFill>
+                      <a:prstDash val="solid"/>
+                      <a:round/>
+                      <a:headEnd type="none" w="med" len="med"/>
+                      <a:tailEnd type="none" w="med" len="med"/>
+                    </a:lnR>
+                    <a:lnT w="9525" cap="flat" cmpd="sng" algn="ctr">
+                      <a:solidFill>
+                        <a:srgbClr val="D9DEE7"/>
+                      </a:solidFill>
+                      <a:prstDash val="solid"/>
+                      <a:round/>
+                      <a:headEnd type="none" w="med" len="med"/>
+                      <a:tailEnd type="none" w="med" len="med"/>
+                    </a:lnT>
+                    <a:lnB w="9525" cap="flat" cmpd="sng" algn="ctr">
+                      <a:solidFill>
+                        <a:srgbClr val="D9DEE7"/>
+                      </a:solidFill>
+                      <a:prstDash val="solid"/>
+                      <a:round/>
+                      <a:headEnd type="none" w="med" len="med"/>
+                      <a:tailEnd type="none" w="med" len="med"/>
+                    </a:lnB>
+                    <a:solidFill>
+                      <a:srgbClr val="15315E"/>
+                    </a:solidFill>
+                  </a:tcPr>
+                </a:tc>
+                <a:tc>
+                  <a:txBody>
+                    <a:bodyPr/>
+                    <a:lstStyle/>
+                    <a:p>
+                      <a:pPr algn="ctr" indent="0" marL="0">
+                        <a:buNone/>
+                      </a:pPr>
+                      <a:r>
+                        <a:rPr lang="en-US" sz="950" b="1" dirty="0">
+                          <a:solidFill>
+                            <a:srgbClr val="FFFFFF"/>
+                          </a:solidFill>
+                        </a:rPr>
+                        <a:t>智能</a:t>
+                      </a:r>
+                      <a:endParaRPr lang="en-US" sz="950" dirty="0"/>
+                    </a:p>
+                  </a:txBody>
+                  <a:tcPr marL="27432" marR="27432" marT="27432" marB="27432" anchor="ctr">
+                    <a:lnL w="9525" cap="flat" cmpd="sng" algn="ctr">
+                      <a:solidFill>
+                        <a:srgbClr val="D9DEE7"/>
+                      </a:solidFill>
+                      <a:prstDash val="solid"/>
+                      <a:round/>
+                      <a:headEnd type="none" w="med" len="med"/>
+                      <a:tailEnd type="none" w="med" len="med"/>
+                    </a:lnL>
+                    <a:lnR w="9525" cap="flat" cmpd="sng" algn="ctr">
+                      <a:solidFill>
+                        <a:srgbClr val="D9DEE7"/>
+                      </a:solidFill>
+                      <a:prstDash val="solid"/>
+                      <a:round/>
+                      <a:headEnd type="none" w="med" len="med"/>
+                      <a:tailEnd type="none" w="med" len="med"/>
+                    </a:lnR>
+                    <a:lnT w="9525" cap="flat" cmpd="sng" algn="ctr">
+                      <a:solidFill>
+                        <a:srgbClr val="D9DEE7"/>
+                      </a:solidFill>
+                      <a:prstDash val="solid"/>
+                      <a:round/>
+                      <a:headEnd type="none" w="med" len="med"/>
+                      <a:tailEnd type="none" w="med" len="med"/>
+                    </a:lnT>
+                    <a:lnB w="9525" cap="flat" cmpd="sng" algn="ctr">
+                      <a:solidFill>
+                        <a:srgbClr val="D9DEE7"/>
+                      </a:solidFill>
+                      <a:prstDash val="solid"/>
+                      <a:round/>
+                      <a:headEnd type="none" w="med" len="med"/>
+                      <a:tailEnd type="none" w="med" len="med"/>
+                    </a:lnB>
+                    <a:solidFill>
+                      <a:srgbClr val="15315E"/>
+                    </a:solidFill>
+                  </a:tcPr>
+                </a:tc>
+                <a:tc>
+                  <a:txBody>
+                    <a:bodyPr/>
+                    <a:lstStyle/>
+                    <a:p>
+                      <a:pPr algn="ctr" indent="0" marL="0">
+                        <a:buNone/>
+                      </a:pPr>
+                      <a:r>
+                        <a:rPr lang="en-US" sz="950" b="1" dirty="0">
+                          <a:solidFill>
+                            <a:srgbClr val="FFFFFF"/>
+                          </a:solidFill>
+                        </a:rPr>
+                        <a:t>行程</a:t>
+                      </a:r>
+                      <a:endParaRPr lang="en-US" sz="950" dirty="0"/>
+                    </a:p>
+                    <a:p>
+                      <a:pPr algn="ctr" indent="0" marL="0">
+                        <a:buNone/>
+                      </a:pPr>
+                      <a:r>
+                        <a:rPr lang="en-US" sz="950" b="1" dirty="0">
+                          <a:solidFill>
+                            <a:srgbClr val="FFFFFF"/>
+                          </a:solidFill>
+                        </a:rPr>
+                        <a:t>冲突</a:t>
+                      </a:r>
+                      <a:endParaRPr lang="en-US" sz="950" dirty="0"/>
+                    </a:p>
+                  </a:txBody>
+                  <a:tcPr marL="27432" marR="27432" marT="27432" marB="27432" anchor="ctr">
+                    <a:lnL w="9525" cap="flat" cmpd="sng" algn="ctr">
+                      <a:solidFill>
+                        <a:srgbClr val="D9DEE7"/>
+                      </a:solidFill>
+                      <a:prstDash val="solid"/>
+                      <a:round/>
+                      <a:headEnd type="none" w="med" len="med"/>
+                      <a:tailEnd type="none" w="med" len="med"/>
+                    </a:lnL>
+                    <a:lnR w="9525" cap="flat" cmpd="sng" algn="ctr">
+                      <a:solidFill>
+                        <a:srgbClr val="D9DEE7"/>
+                      </a:solidFill>
+                      <a:prstDash val="solid"/>
+                      <a:round/>
+                      <a:headEnd type="none" w="med" len="med"/>
+                      <a:tailEnd type="none" w="med" len="med"/>
+                    </a:lnR>
+                    <a:lnT w="9525" cap="flat" cmpd="sng" algn="ctr">
+                      <a:solidFill>
+                        <a:srgbClr val="D9DEE7"/>
+                      </a:solidFill>
+                      <a:prstDash val="solid"/>
+                      <a:round/>
+                      <a:headEnd type="none" w="med" len="med"/>
+                      <a:tailEnd type="none" w="med" len="med"/>
+                    </a:lnT>
+                    <a:lnB w="9525" cap="flat" cmpd="sng" algn="ctr">
+                      <a:solidFill>
+                        <a:srgbClr val="D9DEE7"/>
+                      </a:solidFill>
+                      <a:prstDash val="solid"/>
+                      <a:round/>
+                      <a:headEnd type="none" w="med" len="med"/>
+                      <a:tailEnd type="none" w="med" len="med"/>
+                    </a:lnB>
+                    <a:solidFill>
+                      <a:srgbClr val="15315E"/>
+                    </a:solidFill>
+                  </a:tcPr>
+                </a:tc>
+                <a:tc>
+                  <a:txBody>
+                    <a:bodyPr/>
+                    <a:lstStyle/>
+                    <a:p>
+                      <a:pPr algn="ctr" indent="0" marL="0">
+                        <a:buNone/>
+                      </a:pPr>
+                      <a:r>
+                        <a:rPr lang="en-US" sz="950" b="1" dirty="0">
+                          <a:solidFill>
+                            <a:srgbClr val="FFFFFF"/>
+                          </a:solidFill>
+                        </a:rPr>
+                        <a:t>票款不</a:t>
+                      </a:r>
+                      <a:endParaRPr lang="en-US" sz="950" dirty="0"/>
+                    </a:p>
+                    <a:p>
+                      <a:pPr algn="ctr" indent="0" marL="0">
+                        <a:buNone/>
+                      </a:pPr>
+                      <a:r>
+                        <a:rPr lang="en-US" sz="950" b="1" dirty="0">
+                          <a:solidFill>
+                            <a:srgbClr val="FFFFFF"/>
+                          </a:solidFill>
+                        </a:rPr>
+                        <a:t>足补款</a:t>
+                      </a:r>
+                      <a:endParaRPr lang="en-US" sz="950" dirty="0"/>
+                    </a:p>
+                  </a:txBody>
+                  <a:tcPr marL="27432" marR="27432" marT="27432" marB="27432" anchor="ctr">
+                    <a:lnL w="9525" cap="flat" cmpd="sng" algn="ctr">
+                      <a:solidFill>
+                        <a:srgbClr val="D9DEE7"/>
+                      </a:solidFill>
+                      <a:prstDash val="solid"/>
+                      <a:round/>
+                      <a:headEnd type="none" w="med" len="med"/>
+                      <a:tailEnd type="none" w="med" len="med"/>
+                    </a:lnL>
+                    <a:lnR w="9525" cap="flat" cmpd="sng" algn="ctr">
+                      <a:solidFill>
+                        <a:srgbClr val="D9DEE7"/>
+                      </a:solidFill>
+                      <a:prstDash val="solid"/>
+                      <a:round/>
+                      <a:headEnd type="none" w="med" len="med"/>
+                      <a:tailEnd type="none" w="med" len="med"/>
+                    </a:lnR>
+                    <a:lnT w="9525" cap="flat" cmpd="sng" algn="ctr">
+                      <a:solidFill>
+                        <a:srgbClr val="D9DEE7"/>
+                      </a:solidFill>
+                      <a:prstDash val="solid"/>
+                      <a:round/>
+                      <a:headEnd type="none" w="med" len="med"/>
+                      <a:tailEnd type="none" w="med" len="med"/>
+                    </a:lnT>
+                    <a:lnB w="9525" cap="flat" cmpd="sng" algn="ctr">
+                      <a:solidFill>
+                        <a:srgbClr val="D9DEE7"/>
+                      </a:solidFill>
+                      <a:prstDash val="solid"/>
+                      <a:round/>
+                      <a:headEnd type="none" w="med" len="med"/>
+                      <a:tailEnd type="none" w="med" len="med"/>
+                    </a:lnB>
+                    <a:solidFill>
+                      <a:srgbClr val="15315E"/>
+                    </a:solidFill>
+                  </a:tcPr>
+                </a:tc>
+              </a:tr>
+              <a:tr h="384048">
+                <a:tc rowSpan="3">
+                  <a:txBody>
+                    <a:bodyPr/>
+                    <a:lstStyle/>
+                    <a:p>
+                      <a:pPr algn="ctr" indent="0" marL="0">
+                        <a:buNone/>
+                      </a:pPr>
+                      <a:r>
+                        <a:rPr lang="en-US" sz="1050" b="1" dirty="0">
+                          <a:solidFill>
+                            <a:srgbClr val="15315E"/>
+                          </a:solidFill>
+                        </a:rPr>
+                        <a:t>APP</a:t>
+                      </a:r>
+                      <a:endParaRPr lang="en-US" sz="1050" dirty="0"/>
+                    </a:p>
+                  </a:txBody>
+                  <a:tcPr marL="27432" marR="27432" marT="27432" marB="27432" anchor="ctr">
+                    <a:lnL w="9525" cap="flat" cmpd="sng" algn="ctr">
+                      <a:solidFill>
+                        <a:srgbClr val="D9DEE7"/>
+                      </a:solidFill>
+                      <a:prstDash val="solid"/>
+                      <a:round/>
+                      <a:headEnd type="none" w="med" len="med"/>
+                      <a:tailEnd type="none" w="med" len="med"/>
+                    </a:lnL>
+                    <a:lnR w="9525" cap="flat" cmpd="sng" algn="ctr">
+                      <a:solidFill>
+                        <a:srgbClr val="D9DEE7"/>
+                      </a:solidFill>
+                      <a:prstDash val="solid"/>
+                      <a:round/>
+                      <a:headEnd type="none" w="med" len="med"/>
+                      <a:tailEnd type="none" w="med" len="med"/>
+                    </a:lnR>
+                    <a:lnT w="9525" cap="flat" cmpd="sng" algn="ctr">
+                      <a:solidFill>
+                        <a:srgbClr val="D9DEE7"/>
+                      </a:solidFill>
+                      <a:prstDash val="solid"/>
+                      <a:round/>
+                      <a:headEnd type="none" w="med" len="med"/>
+                      <a:tailEnd type="none" w="med" len="med"/>
+                    </a:lnT>
+                    <a:lnB w="9525" cap="flat" cmpd="sng" algn="ctr">
+                      <a:solidFill>
+                        <a:srgbClr val="D9DEE7"/>
+                      </a:solidFill>
+                      <a:prstDash val="solid"/>
+                      <a:round/>
+                      <a:headEnd type="none" w="med" len="med"/>
+                      <a:tailEnd type="none" w="med" len="med"/>
+                    </a:lnB>
+                    <a:solidFill>
+                      <a:srgbClr val="FFFFFF"/>
+                    </a:solidFill>
+                  </a:tcPr>
+                </a:tc>
+                <a:tc>
+                  <a:txBody>
+                    <a:bodyPr/>
+                    <a:lstStyle/>
+                    <a:p>
+                      <a:pPr algn="l" indent="0" marL="0">
+                        <a:buNone/>
+                      </a:pPr>
+                      <a:r>
+                        <a:rPr lang="en-US" sz="1000" dirty="0">
+                          <a:solidFill>
+                            <a:srgbClr val="3D4757"/>
+                          </a:solidFill>
+                        </a:rPr>
+                        <a:t>支付宝信用付</a:t>
+                      </a:r>
+                      <a:endParaRPr lang="en-US" sz="1000" dirty="0"/>
+                    </a:p>
+                  </a:txBody>
+                  <a:tcPr marL="27432" marR="27432" marT="27432" marB="27432" anchor="ctr">
+                    <a:lnL w="9525" cap="flat" cmpd="sng" algn="ctr">
+                      <a:solidFill>
+                        <a:srgbClr val="D9DEE7"/>
+                      </a:solidFill>
+                      <a:prstDash val="solid"/>
+                      <a:round/>
+                      <a:headEnd type="none" w="med" len="med"/>
+                      <a:tailEnd type="none" w="med" len="med"/>
+                    </a:lnL>
+                    <a:lnR w="9525" cap="flat" cmpd="sng" algn="ctr">
+                      <a:solidFill>
+                        <a:srgbClr val="D9DEE7"/>
+                      </a:solidFill>
+                      <a:prstDash val="solid"/>
+                      <a:round/>
+                      <a:headEnd type="none" w="med" len="med"/>
+                      <a:tailEnd type="none" w="med" len="med"/>
+                    </a:lnR>
+                    <a:lnT w="9525" cap="flat" cmpd="sng" algn="ctr">
+                      <a:solidFill>
+                        <a:srgbClr val="D9DEE7"/>
+                      </a:solidFill>
+                      <a:prstDash val="solid"/>
+                      <a:round/>
+                      <a:headEnd type="none" w="med" len="med"/>
+                      <a:tailEnd type="none" w="med" len="med"/>
+                    </a:lnT>
+                    <a:lnB w="9525" cap="flat" cmpd="sng" algn="ctr">
+                      <a:solidFill>
+                        <a:srgbClr val="D9DEE7"/>
+                      </a:solidFill>
+                      <a:prstDash val="solid"/>
+                      <a:round/>
+                      <a:headEnd type="none" w="med" len="med"/>
+                      <a:tailEnd type="none" w="med" len="med"/>
+                    </a:lnB>
+                    <a:solidFill>
+                      <a:srgbClr val="FFFFFF"/>
+                    </a:solidFill>
+                  </a:tcPr>
+                </a:tc>
+                <a:tc>
+                  <a:txBody>
+                    <a:bodyPr/>
+                    <a:lstStyle/>
+                    <a:p>
+                      <a:pPr algn="ctr" indent="0" marL="0">
+                        <a:buNone/>
+                      </a:pPr>
+                      <a:r>
+                        <a:rPr lang="en-US" sz="1050" b="1" dirty="0">
+                          <a:solidFill>
+                            <a:srgbClr val="FF7A1A"/>
+                          </a:solidFill>
+                        </a:rPr>
+                        <a:t>直付</a:t>
+                      </a:r>
+                      <a:endParaRPr lang="en-US" sz="1050" dirty="0"/>
+                    </a:p>
+                  </a:txBody>
+                  <a:tcPr marL="27432" marR="27432" marT="27432" marB="27432" anchor="ctr">
+                    <a:lnL w="9525" cap="flat" cmpd="sng" algn="ctr">
+                      <a:solidFill>
+                        <a:srgbClr val="D9DEE7"/>
+                      </a:solidFill>
+                      <a:prstDash val="solid"/>
+                      <a:round/>
+                      <a:headEnd type="none" w="med" len="med"/>
+                      <a:tailEnd type="none" w="med" len="med"/>
+                    </a:lnL>
+                    <a:lnR w="9525" cap="flat" cmpd="sng" algn="ctr">
+                      <a:solidFill>
+                        <a:srgbClr val="D9DEE7"/>
+                      </a:solidFill>
+                      <a:prstDash val="solid"/>
+                      <a:round/>
+                      <a:headEnd type="none" w="med" len="med"/>
+                      <a:tailEnd type="none" w="med" len="med"/>
+                    </a:lnR>
+                    <a:lnT w="9525" cap="flat" cmpd="sng" algn="ctr">
+                      <a:solidFill>
+                        <a:srgbClr val="D9DEE7"/>
+                      </a:solidFill>
+                      <a:prstDash val="solid"/>
+                      <a:round/>
+                      <a:headEnd type="none" w="med" len="med"/>
+                      <a:tailEnd type="none" w="med" len="med"/>
+                    </a:lnT>
+                    <a:lnB w="9525" cap="flat" cmpd="sng" algn="ctr">
+                      <a:solidFill>
+                        <a:srgbClr val="D9DEE7"/>
+                      </a:solidFill>
+                      <a:prstDash val="solid"/>
+                      <a:round/>
+                      <a:headEnd type="none" w="med" len="med"/>
+                      <a:tailEnd type="none" w="med" len="med"/>
+                    </a:lnB>
+                    <a:solidFill>
+                      <a:srgbClr val="FFF1E6"/>
+                    </a:solidFill>
+                  </a:tcPr>
+                </a:tc>
+                <a:tc>
+                  <a:txBody>
+                    <a:bodyPr/>
+                    <a:lstStyle/>
+                    <a:p>
+                      <a:pPr algn="ctr" indent="0" marL="0">
+                        <a:buNone/>
+                      </a:pPr>
+                      <a:r>
+                        <a:rPr lang="en-US" sz="1050" b="1" dirty="0">
+                          <a:solidFill>
+                            <a:srgbClr val="287DFA"/>
+                          </a:solidFill>
+                        </a:rPr>
+                        <a:t>代付</a:t>
+                      </a:r>
+                      <a:endParaRPr lang="en-US" sz="1050" dirty="0"/>
+                    </a:p>
+                  </a:txBody>
+                  <a:tcPr marL="27432" marR="27432" marT="27432" marB="27432" anchor="ctr">
+                    <a:lnL w="9525" cap="flat" cmpd="sng" algn="ctr">
+                      <a:solidFill>
+                        <a:srgbClr val="D9DEE7"/>
+                      </a:solidFill>
+                      <a:prstDash val="solid"/>
+                      <a:round/>
+                      <a:headEnd type="none" w="med" len="med"/>
+                      <a:tailEnd type="none" w="med" len="med"/>
+                    </a:lnL>
+                    <a:lnR w="9525" cap="flat" cmpd="sng" algn="ctr">
+                      <a:solidFill>
+                        <a:srgbClr val="D9DEE7"/>
+                      </a:solidFill>
+                      <a:prstDash val="solid"/>
+                      <a:round/>
+                      <a:headEnd type="none" w="med" len="med"/>
+                      <a:tailEnd type="none" w="med" len="med"/>
+                    </a:lnR>
+                    <a:lnT w="9525" cap="flat" cmpd="sng" algn="ctr">
+                      <a:solidFill>
+                        <a:srgbClr val="D9DEE7"/>
+                      </a:solidFill>
+                      <a:prstDash val="solid"/>
+                      <a:round/>
+                      <a:headEnd type="none" w="med" len="med"/>
+                      <a:tailEnd type="none" w="med" len="med"/>
+                    </a:lnT>
+                    <a:lnB w="9525" cap="flat" cmpd="sng" algn="ctr">
+                      <a:solidFill>
+                        <a:srgbClr val="D9DEE7"/>
+                      </a:solidFill>
+                      <a:prstDash val="solid"/>
+                      <a:round/>
+                      <a:headEnd type="none" w="med" len="med"/>
+                      <a:tailEnd type="none" w="med" len="med"/>
+                    </a:lnB>
+                    <a:solidFill>
+                      <a:srgbClr val="FFFFFF"/>
+                    </a:solidFill>
+                  </a:tcPr>
+                </a:tc>
+                <a:tc>
+                  <a:txBody>
+                    <a:bodyPr/>
+                    <a:lstStyle/>
+                    <a:p>
+                      <a:pPr algn="ctr" indent="0" marL="0">
+                        <a:buNone/>
+                      </a:pPr>
+                      <a:r>
+                        <a:rPr lang="en-US" sz="1050" b="1" dirty="0">
+                          <a:solidFill>
+                            <a:srgbClr val="287DFA"/>
+                          </a:solidFill>
+                        </a:rPr>
+                        <a:t>代付</a:t>
+                      </a:r>
+                      <a:endParaRPr lang="en-US" sz="1050" dirty="0"/>
+                    </a:p>
+                  </a:txBody>
+                  <a:tcPr marL="27432" marR="27432" marT="27432" marB="27432" anchor="ctr">
+                    <a:lnL w="9525" cap="flat" cmpd="sng" algn="ctr">
+                      <a:solidFill>
+                        <a:srgbClr val="D9DEE7"/>
+                      </a:solidFill>
+                      <a:prstDash val="solid"/>
+                      <a:round/>
+                      <a:headEnd type="none" w="med" len="med"/>
+                      <a:tailEnd type="none" w="med" len="med"/>
+                    </a:lnL>
+                    <a:lnR w="9525" cap="flat" cmpd="sng" algn="ctr">
+                      <a:solidFill>
+                        <a:srgbClr val="D9DEE7"/>
+                      </a:solidFill>
+                      <a:prstDash val="solid"/>
+                      <a:round/>
+                      <a:headEnd type="none" w="med" len="med"/>
+                      <a:tailEnd type="none" w="med" len="med"/>
+                    </a:lnR>
+                    <a:lnT w="9525" cap="flat" cmpd="sng" algn="ctr">
+                      <a:solidFill>
+                        <a:srgbClr val="D9DEE7"/>
+                      </a:solidFill>
+                      <a:prstDash val="solid"/>
+                      <a:round/>
+                      <a:headEnd type="none" w="med" len="med"/>
+                      <a:tailEnd type="none" w="med" len="med"/>
+                    </a:lnT>
+                    <a:lnB w="9525" cap="flat" cmpd="sng" algn="ctr">
+                      <a:solidFill>
+                        <a:srgbClr val="D9DEE7"/>
+                      </a:solidFill>
+                      <a:prstDash val="solid"/>
+                      <a:round/>
+                      <a:headEnd type="none" w="med" len="med"/>
+                      <a:tailEnd type="none" w="med" len="med"/>
+                    </a:lnB>
+                    <a:solidFill>
+                      <a:srgbClr val="FFFFFF"/>
+                    </a:solidFill>
+                  </a:tcPr>
+                </a:tc>
+                <a:tc>
+                  <a:txBody>
+                    <a:bodyPr/>
+                    <a:lstStyle/>
+                    <a:p>
+                      <a:pPr algn="ctr" indent="0" marL="0">
+                        <a:buNone/>
+                      </a:pPr>
+                      <a:r>
+                        <a:rPr lang="en-US" sz="1050" b="1" dirty="0">
+                          <a:solidFill>
+                            <a:srgbClr val="287DFA"/>
+                          </a:solidFill>
+                        </a:rPr>
+                        <a:t>代付</a:t>
+                      </a:r>
+                      <a:endParaRPr lang="en-US" sz="1050" dirty="0"/>
+                    </a:p>
+                  </a:txBody>
+                  <a:tcPr marL="27432" marR="27432" marT="27432" marB="27432" anchor="ctr">
+                    <a:lnL w="9525" cap="flat" cmpd="sng" algn="ctr">
+                      <a:solidFill>
+                        <a:srgbClr val="D9DEE7"/>
+                      </a:solidFill>
+                      <a:prstDash val="solid"/>
+                      <a:round/>
+                      <a:headEnd type="none" w="med" len="med"/>
+                      <a:tailEnd type="none" w="med" len="med"/>
+                    </a:lnL>
+                    <a:lnR w="9525" cap="flat" cmpd="sng" algn="ctr">
+                      <a:solidFill>
+                        <a:srgbClr val="D9DEE7"/>
+                      </a:solidFill>
+                      <a:prstDash val="solid"/>
+                      <a:round/>
+                      <a:headEnd type="none" w="med" len="med"/>
+                      <a:tailEnd type="none" w="med" len="med"/>
+                    </a:lnR>
+                    <a:lnT w="9525" cap="flat" cmpd="sng" algn="ctr">
+                      <a:solidFill>
+                        <a:srgbClr val="D9DEE7"/>
+                      </a:solidFill>
+                      <a:prstDash val="solid"/>
+                      <a:round/>
+                      <a:headEnd type="none" w="med" len="med"/>
+                      <a:tailEnd type="none" w="med" len="med"/>
+                    </a:lnT>
+                    <a:lnB w="9525" cap="flat" cmpd="sng" algn="ctr">
+                      <a:solidFill>
+                        <a:srgbClr val="D9DEE7"/>
+                      </a:solidFill>
+                      <a:prstDash val="solid"/>
+                      <a:round/>
+                      <a:headEnd type="none" w="med" len="med"/>
+                      <a:tailEnd type="none" w="med" len="med"/>
+                    </a:lnB>
+                    <a:solidFill>
+                      <a:srgbClr val="FFFFFF"/>
+                    </a:solidFill>
+                  </a:tcPr>
+                </a:tc>
+                <a:tc>
+                  <a:txBody>
+                    <a:bodyPr/>
+                    <a:lstStyle/>
+                    <a:p>
+                      <a:pPr algn="ctr" indent="0" marL="0">
+                        <a:buNone/>
+                      </a:pPr>
+                      <a:r>
+                        <a:rPr lang="en-US" sz="1050" b="1" dirty="0">
+                          <a:solidFill>
+                            <a:srgbClr val="287DFA"/>
+                          </a:solidFill>
+                        </a:rPr>
+                        <a:t>代付</a:t>
+                      </a:r>
+                      <a:endParaRPr lang="en-US" sz="1050" dirty="0"/>
+                    </a:p>
+                  </a:txBody>
+                  <a:tcPr marL="27432" marR="27432" marT="27432" marB="27432" anchor="ctr">
+                    <a:lnL w="9525" cap="flat" cmpd="sng" algn="ctr">
+                      <a:solidFill>
+                        <a:srgbClr val="D9DEE7"/>
+                      </a:solidFill>
+                      <a:prstDash val="solid"/>
+                      <a:round/>
+                      <a:headEnd type="none" w="med" len="med"/>
+                      <a:tailEnd type="none" w="med" len="med"/>
+                    </a:lnL>
+                    <a:lnR w="9525" cap="flat" cmpd="sng" algn="ctr">
+                      <a:solidFill>
+                        <a:srgbClr val="D9DEE7"/>
+                      </a:solidFill>
+                      <a:prstDash val="solid"/>
+                      <a:round/>
+                      <a:headEnd type="none" w="med" len="med"/>
+                      <a:tailEnd type="none" w="med" len="med"/>
+                    </a:lnR>
+                    <a:lnT w="9525" cap="flat" cmpd="sng" algn="ctr">
+                      <a:solidFill>
+                        <a:srgbClr val="D9DEE7"/>
+                      </a:solidFill>
+                      <a:prstDash val="solid"/>
+                      <a:round/>
+                      <a:headEnd type="none" w="med" len="med"/>
+                      <a:tailEnd type="none" w="med" len="med"/>
+                    </a:lnT>
+                    <a:lnB w="9525" cap="flat" cmpd="sng" algn="ctr">
+                      <a:solidFill>
+                        <a:srgbClr val="D9DEE7"/>
+                      </a:solidFill>
+                      <a:prstDash val="solid"/>
+                      <a:round/>
+                      <a:headEnd type="none" w="med" len="med"/>
+                      <a:tailEnd type="none" w="med" len="med"/>
+                    </a:lnB>
+                    <a:solidFill>
+                      <a:srgbClr val="FFFFFF"/>
+                    </a:solidFill>
+                  </a:tcPr>
+                </a:tc>
+              </a:tr>
+              <a:tr h="384048">
+                <a:tc vMerge="1">
+                  <a:tcPr/>
+                </a:tc>
+                <a:tc>
+                  <a:txBody>
+                    <a:bodyPr/>
+                    <a:lstStyle/>
+                    <a:p>
+                      <a:pPr algn="l" indent="0" marL="0">
+                        <a:buNone/>
+                      </a:pPr>
+                      <a:r>
+                        <a:rPr lang="en-US" sz="1000" dirty="0">
+                          <a:solidFill>
+                            <a:srgbClr val="3D4757"/>
+                          </a:solidFill>
+                        </a:rPr>
+                        <a:t>非支付宝信用付</a:t>
+                      </a:r>
+                      <a:endParaRPr lang="en-US" sz="1000" dirty="0"/>
+                    </a:p>
+                  </a:txBody>
+                  <a:tcPr marL="27432" marR="27432" marT="27432" marB="27432" anchor="ctr">
+                    <a:lnL w="9525" cap="flat" cmpd="sng" algn="ctr">
+                      <a:solidFill>
+                        <a:srgbClr val="D9DEE7"/>
+                      </a:solidFill>
+                      <a:prstDash val="solid"/>
+                      <a:round/>
+                      <a:headEnd type="none" w="med" len="med"/>
+                      <a:tailEnd type="none" w="med" len="med"/>
+                    </a:lnL>
+                    <a:lnR w="9525" cap="flat" cmpd="sng" algn="ctr">
+                      <a:solidFill>
+                        <a:srgbClr val="D9DEE7"/>
+                      </a:solidFill>
+                      <a:prstDash val="solid"/>
+                      <a:round/>
+                      <a:headEnd type="none" w="med" len="med"/>
+                      <a:tailEnd type="none" w="med" len="med"/>
+                    </a:lnR>
+                    <a:lnT w="9525" cap="flat" cmpd="sng" algn="ctr">
+                      <a:solidFill>
+                        <a:srgbClr val="D9DEE7"/>
+                      </a:solidFill>
+                      <a:prstDash val="solid"/>
+                      <a:round/>
+                      <a:headEnd type="none" w="med" len="med"/>
+                      <a:tailEnd type="none" w="med" len="med"/>
+                    </a:lnT>
+                    <a:lnB w="9525" cap="flat" cmpd="sng" algn="ctr">
+                      <a:solidFill>
+                        <a:srgbClr val="D9DEE7"/>
+                      </a:solidFill>
+                      <a:prstDash val="solid"/>
+                      <a:round/>
+                      <a:headEnd type="none" w="med" len="med"/>
+                      <a:tailEnd type="none" w="med" len="med"/>
+                    </a:lnB>
+                    <a:solidFill>
+                      <a:srgbClr val="FFFFFF"/>
+                    </a:solidFill>
+                  </a:tcPr>
+                </a:tc>
+                <a:tc>
+                  <a:txBody>
+                    <a:bodyPr/>
+                    <a:lstStyle/>
+                    <a:p>
+                      <a:pPr algn="ctr" indent="0" marL="0">
+                        <a:buNone/>
+                      </a:pPr>
+                      <a:r>
+                        <a:rPr lang="en-US" sz="1050" b="1" dirty="0">
+                          <a:solidFill>
+                            <a:srgbClr val="FF7A1A"/>
+                          </a:solidFill>
+                        </a:rPr>
+                        <a:t>直付</a:t>
+                      </a:r>
+                      <a:endParaRPr lang="en-US" sz="1050" dirty="0"/>
+                    </a:p>
+                  </a:txBody>
+                  <a:tcPr marL="27432" marR="27432" marT="27432" marB="27432" anchor="ctr">
+                    <a:lnL w="9525" cap="flat" cmpd="sng" algn="ctr">
+                      <a:solidFill>
+                        <a:srgbClr val="D9DEE7"/>
+                      </a:solidFill>
+                      <a:prstDash val="solid"/>
+                      <a:round/>
+                      <a:headEnd type="none" w="med" len="med"/>
+                      <a:tailEnd type="none" w="med" len="med"/>
+                    </a:lnL>
+                    <a:lnR w="9525" cap="flat" cmpd="sng" algn="ctr">
+                      <a:solidFill>
+                        <a:srgbClr val="D9DEE7"/>
+                      </a:solidFill>
+                      <a:prstDash val="solid"/>
+                      <a:round/>
+                      <a:headEnd type="none" w="med" len="med"/>
+                      <a:tailEnd type="none" w="med" len="med"/>
+                    </a:lnR>
+                    <a:lnT w="9525" cap="flat" cmpd="sng" algn="ctr">
+                      <a:solidFill>
+                        <a:srgbClr val="D9DEE7"/>
+                      </a:solidFill>
+                      <a:prstDash val="solid"/>
+                      <a:round/>
+                      <a:headEnd type="none" w="med" len="med"/>
+                      <a:tailEnd type="none" w="med" len="med"/>
+                    </a:lnT>
+                    <a:lnB w="9525" cap="flat" cmpd="sng" algn="ctr">
+                      <a:solidFill>
+                        <a:srgbClr val="D9DEE7"/>
+                      </a:solidFill>
+                      <a:prstDash val="solid"/>
+                      <a:round/>
+                      <a:headEnd type="none" w="med" len="med"/>
+                      <a:tailEnd type="none" w="med" len="med"/>
+                    </a:lnB>
+                    <a:solidFill>
+                      <a:srgbClr val="FFF1E6"/>
+                    </a:solidFill>
+                  </a:tcPr>
+                </a:tc>
+                <a:tc>
+                  <a:txBody>
+                    <a:bodyPr/>
+                    <a:lstStyle/>
+                    <a:p>
+                      <a:pPr algn="ctr" indent="0" marL="0">
+                        <a:buNone/>
+                      </a:pPr>
+                      <a:r>
+                        <a:rPr lang="en-US" sz="1050" b="1" dirty="0">
+                          <a:solidFill>
+                            <a:srgbClr val="FF7A1A"/>
+                          </a:solidFill>
+                        </a:rPr>
+                        <a:t>直付</a:t>
+                      </a:r>
+                      <a:endParaRPr lang="en-US" sz="1050" dirty="0"/>
+                    </a:p>
+                  </a:txBody>
+                  <a:tcPr marL="27432" marR="27432" marT="27432" marB="27432" anchor="ctr">
+                    <a:lnL w="9525" cap="flat" cmpd="sng" algn="ctr">
+                      <a:solidFill>
+                        <a:srgbClr val="D9DEE7"/>
+                      </a:solidFill>
+                      <a:prstDash val="solid"/>
+                      <a:round/>
+                      <a:headEnd type="none" w="med" len="med"/>
+                      <a:tailEnd type="none" w="med" len="med"/>
+                    </a:lnL>
+                    <a:lnR w="9525" cap="flat" cmpd="sng" algn="ctr">
+                      <a:solidFill>
+                        <a:srgbClr val="D9DEE7"/>
+                      </a:solidFill>
+                      <a:prstDash val="solid"/>
+                      <a:round/>
+                      <a:headEnd type="none" w="med" len="med"/>
+                      <a:tailEnd type="none" w="med" len="med"/>
+                    </a:lnR>
+                    <a:lnT w="9525" cap="flat" cmpd="sng" algn="ctr">
+                      <a:solidFill>
+                        <a:srgbClr val="D9DEE7"/>
+                      </a:solidFill>
+                      <a:prstDash val="solid"/>
+                      <a:round/>
+                      <a:headEnd type="none" w="med" len="med"/>
+                      <a:tailEnd type="none" w="med" len="med"/>
+                    </a:lnT>
+                    <a:lnB w="9525" cap="flat" cmpd="sng" algn="ctr">
+                      <a:solidFill>
+                        <a:srgbClr val="D9DEE7"/>
+                      </a:solidFill>
+                      <a:prstDash val="solid"/>
+                      <a:round/>
+                      <a:headEnd type="none" w="med" len="med"/>
+                      <a:tailEnd type="none" w="med" len="med"/>
+                    </a:lnB>
+                    <a:solidFill>
+                      <a:srgbClr val="FFF1E6"/>
+                    </a:solidFill>
+                  </a:tcPr>
+                </a:tc>
+                <a:tc>
+                  <a:txBody>
+                    <a:bodyPr/>
+                    <a:lstStyle/>
+                    <a:p>
+                      <a:pPr algn="ctr" indent="0" marL="0">
+                        <a:buNone/>
+                      </a:pPr>
+                      <a:r>
+                        <a:rPr lang="en-US" sz="1050" b="1" dirty="0">
+                          <a:solidFill>
+                            <a:srgbClr val="FF7A1A"/>
+                          </a:solidFill>
+                        </a:rPr>
+                        <a:t>直付</a:t>
+                      </a:r>
+                      <a:endParaRPr lang="en-US" sz="1050" dirty="0"/>
+                    </a:p>
+                  </a:txBody>
+                  <a:tcPr marL="27432" marR="27432" marT="27432" marB="27432" anchor="ctr">
+                    <a:lnL w="9525" cap="flat" cmpd="sng" algn="ctr">
+                      <a:solidFill>
+                        <a:srgbClr val="D9DEE7"/>
+                      </a:solidFill>
+                      <a:prstDash val="solid"/>
+                      <a:round/>
+                      <a:headEnd type="none" w="med" len="med"/>
+                      <a:tailEnd type="none" w="med" len="med"/>
+                    </a:lnL>
+                    <a:lnR w="9525" cap="flat" cmpd="sng" algn="ctr">
+                      <a:solidFill>
+                        <a:srgbClr val="D9DEE7"/>
+                      </a:solidFill>
+                      <a:prstDash val="solid"/>
+                      <a:round/>
+                      <a:headEnd type="none" w="med" len="med"/>
+                      <a:tailEnd type="none" w="med" len="med"/>
+                    </a:lnR>
+                    <a:lnT w="9525" cap="flat" cmpd="sng" algn="ctr">
+                      <a:solidFill>
+                        <a:srgbClr val="D9DEE7"/>
+                      </a:solidFill>
+                      <a:prstDash val="solid"/>
+                      <a:round/>
+                      <a:headEnd type="none" w="med" len="med"/>
+                      <a:tailEnd type="none" w="med" len="med"/>
+                    </a:lnT>
+                    <a:lnB w="9525" cap="flat" cmpd="sng" algn="ctr">
+                      <a:solidFill>
+                        <a:srgbClr val="D9DEE7"/>
+                      </a:solidFill>
+                      <a:prstDash val="solid"/>
+                      <a:round/>
+                      <a:headEnd type="none" w="med" len="med"/>
+                      <a:tailEnd type="none" w="med" len="med"/>
+                    </a:lnB>
+                    <a:solidFill>
+                      <a:srgbClr val="FFF1E6"/>
+                    </a:solidFill>
+                  </a:tcPr>
+                </a:tc>
+                <a:tc>
+                  <a:txBody>
+                    <a:bodyPr/>
+                    <a:lstStyle/>
+                    <a:p>
+                      <a:pPr algn="ctr" indent="0" marL="0">
+                        <a:buNone/>
+                      </a:pPr>
+                      <a:r>
+                        <a:rPr lang="en-US" sz="1050" b="1" dirty="0">
+                          <a:solidFill>
+                            <a:srgbClr val="FF7A1A"/>
+                          </a:solidFill>
+                        </a:rPr>
+                        <a:t>直付</a:t>
+                      </a:r>
+                      <a:endParaRPr lang="en-US" sz="1050" dirty="0"/>
+                    </a:p>
+                  </a:txBody>
+                  <a:tcPr marL="27432" marR="27432" marT="27432" marB="27432" anchor="ctr">
+                    <a:lnL w="9525" cap="flat" cmpd="sng" algn="ctr">
+                      <a:solidFill>
+                        <a:srgbClr val="D9DEE7"/>
+                      </a:solidFill>
+                      <a:prstDash val="solid"/>
+                      <a:round/>
+                      <a:headEnd type="none" w="med" len="med"/>
+                      <a:tailEnd type="none" w="med" len="med"/>
+                    </a:lnL>
+                    <a:lnR w="9525" cap="flat" cmpd="sng" algn="ctr">
+                      <a:solidFill>
+                        <a:srgbClr val="D9DEE7"/>
+                      </a:solidFill>
+                      <a:prstDash val="solid"/>
+                      <a:round/>
+                      <a:headEnd type="none" w="med" len="med"/>
+                      <a:tailEnd type="none" w="med" len="med"/>
+                    </a:lnR>
+                    <a:lnT w="9525" cap="flat" cmpd="sng" algn="ctr">
+                      <a:solidFill>
+                        <a:srgbClr val="D9DEE7"/>
+                      </a:solidFill>
+                      <a:prstDash val="solid"/>
+                      <a:round/>
+                      <a:headEnd type="none" w="med" len="med"/>
+                      <a:tailEnd type="none" w="med" len="med"/>
+                    </a:lnT>
+                    <a:lnB w="9525" cap="flat" cmpd="sng" algn="ctr">
+                      <a:solidFill>
+                        <a:srgbClr val="D9DEE7"/>
+                      </a:solidFill>
+                      <a:prstDash val="solid"/>
+                      <a:round/>
+                      <a:headEnd type="none" w="med" len="med"/>
+                      <a:tailEnd type="none" w="med" len="med"/>
+                    </a:lnB>
+                    <a:solidFill>
+                      <a:srgbClr val="FFF1E6"/>
+                    </a:solidFill>
+                  </a:tcPr>
+                </a:tc>
+                <a:tc>
+                  <a:txBody>
+                    <a:bodyPr/>
+                    <a:lstStyle/>
+                    <a:p>
+                      <a:pPr algn="ctr" indent="0" marL="0">
+                        <a:buNone/>
+                      </a:pPr>
+                      <a:r>
+                        <a:rPr lang="en-US" sz="1050" dirty="0">
+                          <a:solidFill>
+                            <a:srgbClr val="5B6B80"/>
+                          </a:solidFill>
+                        </a:rPr>
+                        <a:t>—</a:t>
+                      </a:r>
+                      <a:endParaRPr lang="en-US" sz="1050" dirty="0"/>
+                    </a:p>
+                  </a:txBody>
+                  <a:tcPr marL="27432" marR="27432" marT="27432" marB="27432" anchor="ctr">
+                    <a:lnL w="9525" cap="flat" cmpd="sng" algn="ctr">
+                      <a:solidFill>
+                        <a:srgbClr val="D9DEE7"/>
+                      </a:solidFill>
+                      <a:prstDash val="solid"/>
+                      <a:round/>
+                      <a:headEnd type="none" w="med" len="med"/>
+                      <a:tailEnd type="none" w="med" len="med"/>
+                    </a:lnL>
+                    <a:lnR w="9525" cap="flat" cmpd="sng" algn="ctr">
+                      <a:solidFill>
+                        <a:srgbClr val="D9DEE7"/>
+                      </a:solidFill>
+                      <a:prstDash val="solid"/>
+                      <a:round/>
+                      <a:headEnd type="none" w="med" len="med"/>
+                      <a:tailEnd type="none" w="med" len="med"/>
+                    </a:lnR>
+                    <a:lnT w="9525" cap="flat" cmpd="sng" algn="ctr">
+                      <a:solidFill>
+                        <a:srgbClr val="D9DEE7"/>
+                      </a:solidFill>
+                      <a:prstDash val="solid"/>
+                      <a:round/>
+                      <a:headEnd type="none" w="med" len="med"/>
+                      <a:tailEnd type="none" w="med" len="med"/>
+                    </a:lnT>
+                    <a:lnB w="9525" cap="flat" cmpd="sng" algn="ctr">
+                      <a:solidFill>
+                        <a:srgbClr val="D9DEE7"/>
+                      </a:solidFill>
+                      <a:prstDash val="solid"/>
+                      <a:round/>
+                      <a:headEnd type="none" w="med" len="med"/>
+                      <a:tailEnd type="none" w="med" len="med"/>
+                    </a:lnB>
+                    <a:solidFill>
+                      <a:srgbClr val="FFFFFF"/>
+                    </a:solidFill>
+                  </a:tcPr>
+                </a:tc>
+              </a:tr>
+              <a:tr h="384048">
+                <a:tc vMerge="1">
+                  <a:tcPr/>
+                </a:tc>
+                <a:tc>
+                  <a:txBody>
+                    <a:bodyPr/>
+                    <a:lstStyle/>
+                    <a:p>
+                      <a:pPr algn="l" indent="0" marL="0">
+                        <a:buNone/>
+                      </a:pPr>
+                      <a:r>
+                        <a:rPr lang="en-US" sz="1000" dirty="0">
+                          <a:solidFill>
+                            <a:srgbClr val="3D4757"/>
+                          </a:solidFill>
+                        </a:rPr>
+                        <a:t>预付 *</a:t>
+                      </a:r>
+                      <a:endParaRPr lang="en-US" sz="1000" dirty="0"/>
+                    </a:p>
+                  </a:txBody>
+                  <a:tcPr marL="27432" marR="27432" marT="27432" marB="27432" anchor="ctr">
+                    <a:lnL w="9525" cap="flat" cmpd="sng" algn="ctr">
+                      <a:solidFill>
+                        <a:srgbClr val="D9DEE7"/>
+                      </a:solidFill>
+                      <a:prstDash val="solid"/>
+                      <a:round/>
+                      <a:headEnd type="none" w="med" len="med"/>
+                      <a:tailEnd type="none" w="med" len="med"/>
+                    </a:lnL>
+                    <a:lnR w="9525" cap="flat" cmpd="sng" algn="ctr">
+                      <a:solidFill>
+                        <a:srgbClr val="D9DEE7"/>
+                      </a:solidFill>
+                      <a:prstDash val="solid"/>
+                      <a:round/>
+                      <a:headEnd type="none" w="med" len="med"/>
+                      <a:tailEnd type="none" w="med" len="med"/>
+                    </a:lnR>
+                    <a:lnT w="9525" cap="flat" cmpd="sng" algn="ctr">
+                      <a:solidFill>
+                        <a:srgbClr val="D9DEE7"/>
+                      </a:solidFill>
+                      <a:prstDash val="solid"/>
+                      <a:round/>
+                      <a:headEnd type="none" w="med" len="med"/>
+                      <a:tailEnd type="none" w="med" len="med"/>
+                    </a:lnT>
+                    <a:lnB w="9525" cap="flat" cmpd="sng" algn="ctr">
+                      <a:solidFill>
+                        <a:srgbClr val="D9DEE7"/>
+                      </a:solidFill>
+                      <a:prstDash val="solid"/>
+                      <a:round/>
+                      <a:headEnd type="none" w="med" len="med"/>
+                      <a:tailEnd type="none" w="med" len="med"/>
+                    </a:lnB>
+                    <a:solidFill>
+                      <a:srgbClr val="FFFFFF"/>
+                    </a:solidFill>
+                  </a:tcPr>
+                </a:tc>
+                <a:tc>
+                  <a:txBody>
+                    <a:bodyPr/>
+                    <a:lstStyle/>
+                    <a:p>
+                      <a:pPr algn="ctr" indent="0" marL="0">
+                        <a:buNone/>
+                      </a:pPr>
+                      <a:r>
+                        <a:rPr lang="en-US" sz="1050" b="1" dirty="0">
+                          <a:solidFill>
+                            <a:srgbClr val="FF7A1A"/>
+                          </a:solidFill>
+                        </a:rPr>
+                        <a:t>直付</a:t>
+                      </a:r>
+                      <a:endParaRPr lang="en-US" sz="1050" dirty="0"/>
+                    </a:p>
+                  </a:txBody>
+                  <a:tcPr marL="27432" marR="27432" marT="27432" marB="27432" anchor="ctr">
+                    <a:lnL w="9525" cap="flat" cmpd="sng" algn="ctr">
+                      <a:solidFill>
+                        <a:srgbClr val="D9DEE7"/>
+                      </a:solidFill>
+                      <a:prstDash val="solid"/>
+                      <a:round/>
+                      <a:headEnd type="none" w="med" len="med"/>
+                      <a:tailEnd type="none" w="med" len="med"/>
+                    </a:lnL>
+                    <a:lnR w="9525" cap="flat" cmpd="sng" algn="ctr">
+                      <a:solidFill>
+                        <a:srgbClr val="D9DEE7"/>
+                      </a:solidFill>
+                      <a:prstDash val="solid"/>
+                      <a:round/>
+                      <a:headEnd type="none" w="med" len="med"/>
+                      <a:tailEnd type="none" w="med" len="med"/>
+                    </a:lnR>
+                    <a:lnT w="9525" cap="flat" cmpd="sng" algn="ctr">
+                      <a:solidFill>
+                        <a:srgbClr val="D9DEE7"/>
+                      </a:solidFill>
+                      <a:prstDash val="solid"/>
+                      <a:round/>
+                      <a:headEnd type="none" w="med" len="med"/>
+                      <a:tailEnd type="none" w="med" len="med"/>
+                    </a:lnT>
+                    <a:lnB w="9525" cap="flat" cmpd="sng" algn="ctr">
+                      <a:solidFill>
+                        <a:srgbClr val="D9DEE7"/>
+                      </a:solidFill>
+                      <a:prstDash val="solid"/>
+                      <a:round/>
+                      <a:headEnd type="none" w="med" len="med"/>
+                      <a:tailEnd type="none" w="med" len="med"/>
+                    </a:lnB>
+                    <a:solidFill>
+                      <a:srgbClr val="FFF1E6"/>
+                    </a:solidFill>
+                  </a:tcPr>
+                </a:tc>
+                <a:tc>
+                  <a:txBody>
+                    <a:bodyPr/>
+                    <a:lstStyle/>
+                    <a:p>
+                      <a:pPr algn="ctr" indent="0" marL="0">
+                        <a:buNone/>
+                      </a:pPr>
+                      <a:r>
+                        <a:rPr lang="en-US" sz="1050" b="1" dirty="0">
+                          <a:solidFill>
+                            <a:srgbClr val="FF7A1A"/>
+                          </a:solidFill>
+                        </a:rPr>
+                        <a:t>直付</a:t>
+                      </a:r>
+                      <a:endParaRPr lang="en-US" sz="1050" dirty="0"/>
+                    </a:p>
+                  </a:txBody>
+                  <a:tcPr marL="27432" marR="27432" marT="27432" marB="27432" anchor="ctr">
+                    <a:lnL w="9525" cap="flat" cmpd="sng" algn="ctr">
+                      <a:solidFill>
+                        <a:srgbClr val="D9DEE7"/>
+                      </a:solidFill>
+                      <a:prstDash val="solid"/>
+                      <a:round/>
+                      <a:headEnd type="none" w="med" len="med"/>
+                      <a:tailEnd type="none" w="med" len="med"/>
+                    </a:lnL>
+                    <a:lnR w="9525" cap="flat" cmpd="sng" algn="ctr">
+                      <a:solidFill>
+                        <a:srgbClr val="D9DEE7"/>
+                      </a:solidFill>
+                      <a:prstDash val="solid"/>
+                      <a:round/>
+                      <a:headEnd type="none" w="med" len="med"/>
+                      <a:tailEnd type="none" w="med" len="med"/>
+                    </a:lnR>
+                    <a:lnT w="9525" cap="flat" cmpd="sng" algn="ctr">
+                      <a:solidFill>
+                        <a:srgbClr val="D9DEE7"/>
+                      </a:solidFill>
+                      <a:prstDash val="solid"/>
+                      <a:round/>
+                      <a:headEnd type="none" w="med" len="med"/>
+                      <a:tailEnd type="none" w="med" len="med"/>
+                    </a:lnT>
+                    <a:lnB w="9525" cap="flat" cmpd="sng" algn="ctr">
+                      <a:solidFill>
+                        <a:srgbClr val="D9DEE7"/>
+                      </a:solidFill>
+                      <a:prstDash val="solid"/>
+                      <a:round/>
+                      <a:headEnd type="none" w="med" len="med"/>
+                      <a:tailEnd type="none" w="med" len="med"/>
+                    </a:lnB>
+                    <a:solidFill>
+                      <a:srgbClr val="FFF1E6"/>
+                    </a:solidFill>
+                  </a:tcPr>
+                </a:tc>
+                <a:tc>
+                  <a:txBody>
+                    <a:bodyPr/>
+                    <a:lstStyle/>
+                    <a:p>
+                      <a:pPr algn="ctr" indent="0" marL="0">
+                        <a:buNone/>
+                      </a:pPr>
+                      <a:r>
+                        <a:rPr lang="en-US" sz="1050" b="1" dirty="0">
+                          <a:solidFill>
+                            <a:srgbClr val="FF7A1A"/>
+                          </a:solidFill>
+                        </a:rPr>
+                        <a:t>直付</a:t>
+                      </a:r>
+                      <a:endParaRPr lang="en-US" sz="1050" dirty="0"/>
+                    </a:p>
+                  </a:txBody>
+                  <a:tcPr marL="27432" marR="27432" marT="27432" marB="27432" anchor="ctr">
+                    <a:lnL w="9525" cap="flat" cmpd="sng" algn="ctr">
+                      <a:solidFill>
+                        <a:srgbClr val="D9DEE7"/>
+                      </a:solidFill>
+                      <a:prstDash val="solid"/>
+                      <a:round/>
+                      <a:headEnd type="none" w="med" len="med"/>
+                      <a:tailEnd type="none" w="med" len="med"/>
+                    </a:lnL>
+                    <a:lnR w="9525" cap="flat" cmpd="sng" algn="ctr">
+                      <a:solidFill>
+                        <a:srgbClr val="D9DEE7"/>
+                      </a:solidFill>
+                      <a:prstDash val="solid"/>
+                      <a:round/>
+                      <a:headEnd type="none" w="med" len="med"/>
+                      <a:tailEnd type="none" w="med" len="med"/>
+                    </a:lnR>
+                    <a:lnT w="9525" cap="flat" cmpd="sng" algn="ctr">
+                      <a:solidFill>
+                        <a:srgbClr val="D9DEE7"/>
+                      </a:solidFill>
+                      <a:prstDash val="solid"/>
+                      <a:round/>
+                      <a:headEnd type="none" w="med" len="med"/>
+                      <a:tailEnd type="none" w="med" len="med"/>
+                    </a:lnT>
+                    <a:lnB w="9525" cap="flat" cmpd="sng" algn="ctr">
+                      <a:solidFill>
+                        <a:srgbClr val="D9DEE7"/>
+                      </a:solidFill>
+                      <a:prstDash val="solid"/>
+                      <a:round/>
+                      <a:headEnd type="none" w="med" len="med"/>
+                      <a:tailEnd type="none" w="med" len="med"/>
+                    </a:lnB>
+                    <a:solidFill>
+                      <a:srgbClr val="FFF1E6"/>
+                    </a:solidFill>
+                  </a:tcPr>
+                </a:tc>
+                <a:tc>
+                  <a:txBody>
+                    <a:bodyPr/>
+                    <a:lstStyle/>
+                    <a:p>
+                      <a:pPr algn="ctr" indent="0" marL="0">
+                        <a:buNone/>
+                      </a:pPr>
+                      <a:r>
+                        <a:rPr lang="en-US" sz="1050" b="1" dirty="0">
+                          <a:solidFill>
+                            <a:srgbClr val="FF7A1A"/>
+                          </a:solidFill>
+                        </a:rPr>
+                        <a:t>直付</a:t>
+                      </a:r>
+                      <a:endParaRPr lang="en-US" sz="1050" dirty="0"/>
+                    </a:p>
+                  </a:txBody>
+                  <a:tcPr marL="27432" marR="27432" marT="27432" marB="27432" anchor="ctr">
+                    <a:lnL w="9525" cap="flat" cmpd="sng" algn="ctr">
+                      <a:solidFill>
+                        <a:srgbClr val="D9DEE7"/>
+                      </a:solidFill>
+                      <a:prstDash val="solid"/>
+                      <a:round/>
+                      <a:headEnd type="none" w="med" len="med"/>
+                      <a:tailEnd type="none" w="med" len="med"/>
+                    </a:lnL>
+                    <a:lnR w="9525" cap="flat" cmpd="sng" algn="ctr">
+                      <a:solidFill>
+                        <a:srgbClr val="D9DEE7"/>
+                      </a:solidFill>
+                      <a:prstDash val="solid"/>
+                      <a:round/>
+                      <a:headEnd type="none" w="med" len="med"/>
+                      <a:tailEnd type="none" w="med" len="med"/>
+                    </a:lnR>
+                    <a:lnT w="9525" cap="flat" cmpd="sng" algn="ctr">
+                      <a:solidFill>
+                        <a:srgbClr val="D9DEE7"/>
+                      </a:solidFill>
+                      <a:prstDash val="solid"/>
+                      <a:round/>
+                      <a:headEnd type="none" w="med" len="med"/>
+                      <a:tailEnd type="none" w="med" len="med"/>
+                    </a:lnT>
+                    <a:lnB w="9525" cap="flat" cmpd="sng" algn="ctr">
+                      <a:solidFill>
+                        <a:srgbClr val="D9DEE7"/>
+                      </a:solidFill>
+                      <a:prstDash val="solid"/>
+                      <a:round/>
+                      <a:headEnd type="none" w="med" len="med"/>
+                      <a:tailEnd type="none" w="med" len="med"/>
+                    </a:lnB>
+                    <a:solidFill>
+                      <a:srgbClr val="FFF1E6"/>
+                    </a:solidFill>
+                  </a:tcPr>
+                </a:tc>
+                <a:tc>
+                  <a:txBody>
+                    <a:bodyPr/>
+                    <a:lstStyle/>
+                    <a:p>
+                      <a:pPr algn="ctr" indent="0" marL="0">
+                        <a:buNone/>
+                      </a:pPr>
+                      <a:r>
+                        <a:rPr lang="en-US" sz="1050" b="1" dirty="0">
+                          <a:solidFill>
+                            <a:srgbClr val="FF7A1A"/>
+                          </a:solidFill>
+                        </a:rPr>
+                        <a:t>直付</a:t>
+                      </a:r>
+                      <a:endParaRPr lang="en-US" sz="1050" dirty="0"/>
+                    </a:p>
+                  </a:txBody>
+                  <a:tcPr marL="27432" marR="27432" marT="27432" marB="27432" anchor="ctr">
+                    <a:lnL w="9525" cap="flat" cmpd="sng" algn="ctr">
+                      <a:solidFill>
+                        <a:srgbClr val="D9DEE7"/>
+                      </a:solidFill>
+                      <a:prstDash val="solid"/>
+                      <a:round/>
+                      <a:headEnd type="none" w="med" len="med"/>
+                      <a:tailEnd type="none" w="med" len="med"/>
+                    </a:lnL>
+                    <a:lnR w="9525" cap="flat" cmpd="sng" algn="ctr">
+                      <a:solidFill>
+                        <a:srgbClr val="D9DEE7"/>
+                      </a:solidFill>
+                      <a:prstDash val="solid"/>
+                      <a:round/>
+                      <a:headEnd type="none" w="med" len="med"/>
+                      <a:tailEnd type="none" w="med" len="med"/>
+                    </a:lnR>
+                    <a:lnT w="9525" cap="flat" cmpd="sng" algn="ctr">
+                      <a:solidFill>
+                        <a:srgbClr val="D9DEE7"/>
+                      </a:solidFill>
+                      <a:prstDash val="solid"/>
+                      <a:round/>
+                      <a:headEnd type="none" w="med" len="med"/>
+                      <a:tailEnd type="none" w="med" len="med"/>
+                    </a:lnT>
+                    <a:lnB w="9525" cap="flat" cmpd="sng" algn="ctr">
+                      <a:solidFill>
+                        <a:srgbClr val="D9DEE7"/>
+                      </a:solidFill>
+                      <a:prstDash val="solid"/>
+                      <a:round/>
+                      <a:headEnd type="none" w="med" len="med"/>
+                      <a:tailEnd type="none" w="med" len="med"/>
+                    </a:lnB>
+                    <a:solidFill>
+                      <a:srgbClr val="FFF1E6"/>
+                    </a:solidFill>
+                  </a:tcPr>
+                </a:tc>
+              </a:tr>
+              <a:tr h="384048">
+                <a:tc rowSpan="3">
+                  <a:txBody>
+                    <a:bodyPr/>
+                    <a:lstStyle/>
+                    <a:p>
+                      <a:pPr algn="ctr" indent="0" marL="0">
+                        <a:buNone/>
+                      </a:pPr>
+                      <a:r>
+                        <a:rPr lang="en-US" sz="1050" b="1" dirty="0">
+                          <a:solidFill>
+                            <a:srgbClr val="FF7A1A"/>
+                          </a:solidFill>
+                        </a:rPr>
+                        <a:t>小程序</a:t>
+                      </a:r>
+                      <a:endParaRPr lang="en-US" sz="1050" dirty="0"/>
+                    </a:p>
+                  </a:txBody>
+                  <a:tcPr marL="27432" marR="27432" marT="27432" marB="27432" anchor="ctr">
+                    <a:lnL w="9525" cap="flat" cmpd="sng" algn="ctr">
+                      <a:solidFill>
+                        <a:srgbClr val="D9DEE7"/>
+                      </a:solidFill>
+                      <a:prstDash val="solid"/>
+                      <a:round/>
+                      <a:headEnd type="none" w="med" len="med"/>
+                      <a:tailEnd type="none" w="med" len="med"/>
+                    </a:lnL>
+                    <a:lnR w="9525" cap="flat" cmpd="sng" algn="ctr">
+                      <a:solidFill>
+                        <a:srgbClr val="D9DEE7"/>
+                      </a:solidFill>
+                      <a:prstDash val="solid"/>
+                      <a:round/>
+                      <a:headEnd type="none" w="med" len="med"/>
+                      <a:tailEnd type="none" w="med" len="med"/>
+                    </a:lnR>
+                    <a:lnT w="9525" cap="flat" cmpd="sng" algn="ctr">
+                      <a:solidFill>
+                        <a:srgbClr val="D9DEE7"/>
+                      </a:solidFill>
+                      <a:prstDash val="solid"/>
+                      <a:round/>
+                      <a:headEnd type="none" w="med" len="med"/>
+                      <a:tailEnd type="none" w="med" len="med"/>
+                    </a:lnT>
+                    <a:lnB w="9525" cap="flat" cmpd="sng" algn="ctr">
+                      <a:solidFill>
+                        <a:srgbClr val="D9DEE7"/>
+                      </a:solidFill>
+                      <a:prstDash val="solid"/>
+                      <a:round/>
+                      <a:headEnd type="none" w="med" len="med"/>
+                      <a:tailEnd type="none" w="med" len="med"/>
+                    </a:lnB>
+                    <a:solidFill>
+                      <a:srgbClr val="FFFFFF"/>
+                    </a:solidFill>
+                  </a:tcPr>
+                </a:tc>
+                <a:tc>
+                  <a:txBody>
+                    <a:bodyPr/>
+                    <a:lstStyle/>
+                    <a:p>
+                      <a:pPr algn="l" indent="0" marL="0">
+                        <a:buNone/>
+                      </a:pPr>
+                      <a:r>
+                        <a:rPr lang="en-US" sz="1000" b="1" dirty="0">
+                          <a:solidFill>
+                            <a:srgbClr val="FF7A1A"/>
+                          </a:solidFill>
+                        </a:rPr>
+                        <a:t>支付宝</a:t>
+                      </a:r>
+                      <a:endParaRPr lang="en-US" sz="1000" dirty="0"/>
+                    </a:p>
+                  </a:txBody>
+                  <a:tcPr marL="27432" marR="27432" marT="27432" marB="27432" anchor="ctr">
+                    <a:lnL w="9525" cap="flat" cmpd="sng" algn="ctr">
+                      <a:solidFill>
+                        <a:srgbClr val="D9DEE7"/>
+                      </a:solidFill>
+                      <a:prstDash val="solid"/>
+                      <a:round/>
+                      <a:headEnd type="none" w="med" len="med"/>
+                      <a:tailEnd type="none" w="med" len="med"/>
+                    </a:lnL>
+                    <a:lnR w="9525" cap="flat" cmpd="sng" algn="ctr">
+                      <a:solidFill>
+                        <a:srgbClr val="D9DEE7"/>
+                      </a:solidFill>
+                      <a:prstDash val="solid"/>
+                      <a:round/>
+                      <a:headEnd type="none" w="med" len="med"/>
+                      <a:tailEnd type="none" w="med" len="med"/>
+                    </a:lnR>
+                    <a:lnT w="9525" cap="flat" cmpd="sng" algn="ctr">
+                      <a:solidFill>
+                        <a:srgbClr val="D9DEE7"/>
+                      </a:solidFill>
+                      <a:prstDash val="solid"/>
+                      <a:round/>
+                      <a:headEnd type="none" w="med" len="med"/>
+                      <a:tailEnd type="none" w="med" len="med"/>
+                    </a:lnT>
+                    <a:lnB w="9525" cap="flat" cmpd="sng" algn="ctr">
+                      <a:solidFill>
+                        <a:srgbClr val="D9DEE7"/>
+                      </a:solidFill>
+                      <a:prstDash val="solid"/>
+                      <a:round/>
+                      <a:headEnd type="none" w="med" len="med"/>
+                      <a:tailEnd type="none" w="med" len="med"/>
+                    </a:lnB>
+                    <a:solidFill>
+                      <a:srgbClr val="FFFFFF"/>
+                    </a:solidFill>
+                  </a:tcPr>
+                </a:tc>
+                <a:tc gridSpan="5">
+                  <a:txBody>
+                    <a:bodyPr/>
+                    <a:lstStyle/>
+                    <a:p>
+                      <a:pPr algn="ctr" indent="0" marL="0">
+                        <a:buNone/>
+                      </a:pPr>
+                      <a:r>
+                        <a:rPr lang="en-US" sz="1050" b="1" dirty="0">
+                          <a:solidFill>
+                            <a:srgbClr val="FF7A1A"/>
+                          </a:solidFill>
+                        </a:rPr>
+                        <a:t>无法使用，订单不具备代付条件</a:t>
+                      </a:r>
+                      <a:endParaRPr lang="en-US" sz="1050" dirty="0"/>
+                    </a:p>
+                  </a:txBody>
+                  <a:tcPr marL="27432" marR="27432" marT="27432" marB="27432" anchor="ctr">
+                    <a:lnL w="9525" cap="flat" cmpd="sng" algn="ctr">
+                      <a:solidFill>
+                        <a:srgbClr val="D9DEE7"/>
+                      </a:solidFill>
+                      <a:prstDash val="solid"/>
+                      <a:round/>
+                      <a:headEnd type="none" w="med" len="med"/>
+                      <a:tailEnd type="none" w="med" len="med"/>
+                    </a:lnL>
+                    <a:lnR w="9525" cap="flat" cmpd="sng" algn="ctr">
+                      <a:solidFill>
+                        <a:srgbClr val="D9DEE7"/>
+                      </a:solidFill>
+                      <a:prstDash val="solid"/>
+                      <a:round/>
+                      <a:headEnd type="none" w="med" len="med"/>
+                      <a:tailEnd type="none" w="med" len="med"/>
+                    </a:lnR>
+                    <a:lnT w="9525" cap="flat" cmpd="sng" algn="ctr">
+                      <a:solidFill>
+                        <a:srgbClr val="D9DEE7"/>
+                      </a:solidFill>
+                      <a:prstDash val="solid"/>
+                      <a:round/>
+                      <a:headEnd type="none" w="med" len="med"/>
+                      <a:tailEnd type="none" w="med" len="med"/>
+                    </a:lnT>
+                    <a:lnB w="9525" cap="flat" cmpd="sng" algn="ctr">
+                      <a:solidFill>
+                        <a:srgbClr val="D9DEE7"/>
+                      </a:solidFill>
+                      <a:prstDash val="solid"/>
+                      <a:round/>
+                      <a:headEnd type="none" w="med" len="med"/>
+                      <a:tailEnd type="none" w="med" len="med"/>
+                    </a:lnB>
+                    <a:solidFill>
+                      <a:srgbClr val="FFF1E6"/>
+                    </a:solidFill>
+                  </a:tcPr>
+                </a:tc>
+                <a:tc hMerge="1">
+                  <a:tcPr/>
+                </a:tc>
+                <a:tc hMerge="1">
+                  <a:tcPr/>
+                </a:tc>
+                <a:tc hMerge="1">
+                  <a:tcPr/>
+                </a:tc>
+                <a:tc hMerge="1">
+                  <a:tcPr/>
+                </a:tc>
+              </a:tr>
+              <a:tr h="384048">
+                <a:tc vMerge="1">
+                  <a:tcPr/>
+                </a:tc>
+                <a:tc>
+                  <a:txBody>
+                    <a:bodyPr/>
+                    <a:lstStyle/>
+                    <a:p>
+                      <a:pPr algn="l" indent="0" marL="0">
+                        <a:buNone/>
+                      </a:pPr>
+                      <a:r>
+                        <a:rPr lang="en-US" sz="1000" dirty="0">
+                          <a:solidFill>
+                            <a:srgbClr val="3D4757"/>
+                          </a:solidFill>
+                        </a:rPr>
+                        <a:t>微信支付分</a:t>
+                      </a:r>
+                      <a:endParaRPr lang="en-US" sz="1000" dirty="0"/>
+                    </a:p>
+                  </a:txBody>
+                  <a:tcPr marL="27432" marR="27432" marT="27432" marB="27432" anchor="ctr">
+                    <a:lnL w="9525" cap="flat" cmpd="sng" algn="ctr">
+                      <a:solidFill>
+                        <a:srgbClr val="D9DEE7"/>
+                      </a:solidFill>
+                      <a:prstDash val="solid"/>
+                      <a:round/>
+                      <a:headEnd type="none" w="med" len="med"/>
+                      <a:tailEnd type="none" w="med" len="med"/>
+                    </a:lnL>
+                    <a:lnR w="9525" cap="flat" cmpd="sng" algn="ctr">
+                      <a:solidFill>
+                        <a:srgbClr val="D9DEE7"/>
+                      </a:solidFill>
+                      <a:prstDash val="solid"/>
+                      <a:round/>
+                      <a:headEnd type="none" w="med" len="med"/>
+                      <a:tailEnd type="none" w="med" len="med"/>
+                    </a:lnR>
+                    <a:lnT w="9525" cap="flat" cmpd="sng" algn="ctr">
+                      <a:solidFill>
+                        <a:srgbClr val="D9DEE7"/>
+                      </a:solidFill>
+                      <a:prstDash val="solid"/>
+                      <a:round/>
+                      <a:headEnd type="none" w="med" len="med"/>
+                      <a:tailEnd type="none" w="med" len="med"/>
+                    </a:lnT>
+                    <a:lnB w="9525" cap="flat" cmpd="sng" algn="ctr">
+                      <a:solidFill>
+                        <a:srgbClr val="D9DEE7"/>
+                      </a:solidFill>
+                      <a:prstDash val="solid"/>
+                      <a:round/>
+                      <a:headEnd type="none" w="med" len="med"/>
+                      <a:tailEnd type="none" w="med" len="med"/>
+                    </a:lnB>
+                    <a:solidFill>
+                      <a:srgbClr val="FFFFFF"/>
+                    </a:solidFill>
+                  </a:tcPr>
+                </a:tc>
+                <a:tc>
+                  <a:txBody>
+                    <a:bodyPr/>
+                    <a:lstStyle/>
+                    <a:p>
+                      <a:pPr algn="ctr" indent="0" marL="0">
+                        <a:buNone/>
+                      </a:pPr>
+                      <a:r>
+                        <a:rPr lang="en-US" sz="1050" b="1" dirty="0">
+                          <a:solidFill>
+                            <a:srgbClr val="FF7A1A"/>
+                          </a:solidFill>
+                        </a:rPr>
+                        <a:t>直付</a:t>
+                      </a:r>
+                      <a:endParaRPr lang="en-US" sz="1050" dirty="0"/>
+                    </a:p>
+                  </a:txBody>
+                  <a:tcPr marL="27432" marR="27432" marT="27432" marB="27432" anchor="ctr">
+                    <a:lnL w="9525" cap="flat" cmpd="sng" algn="ctr">
+                      <a:solidFill>
+                        <a:srgbClr val="D9DEE7"/>
+                      </a:solidFill>
+                      <a:prstDash val="solid"/>
+                      <a:round/>
+                      <a:headEnd type="none" w="med" len="med"/>
+                      <a:tailEnd type="none" w="med" len="med"/>
+                    </a:lnL>
+                    <a:lnR w="9525" cap="flat" cmpd="sng" algn="ctr">
+                      <a:solidFill>
+                        <a:srgbClr val="D9DEE7"/>
+                      </a:solidFill>
+                      <a:prstDash val="solid"/>
+                      <a:round/>
+                      <a:headEnd type="none" w="med" len="med"/>
+                      <a:tailEnd type="none" w="med" len="med"/>
+                    </a:lnR>
+                    <a:lnT w="9525" cap="flat" cmpd="sng" algn="ctr">
+                      <a:solidFill>
+                        <a:srgbClr val="D9DEE7"/>
+                      </a:solidFill>
+                      <a:prstDash val="solid"/>
+                      <a:round/>
+                      <a:headEnd type="none" w="med" len="med"/>
+                      <a:tailEnd type="none" w="med" len="med"/>
+                    </a:lnT>
+                    <a:lnB w="9525" cap="flat" cmpd="sng" algn="ctr">
+                      <a:solidFill>
+                        <a:srgbClr val="D9DEE7"/>
+                      </a:solidFill>
+                      <a:prstDash val="solid"/>
+                      <a:round/>
+                      <a:headEnd type="none" w="med" len="med"/>
+                      <a:tailEnd type="none" w="med" len="med"/>
+                    </a:lnB>
+                    <a:solidFill>
+                      <a:srgbClr val="FFF1E6"/>
+                    </a:solidFill>
+                  </a:tcPr>
+                </a:tc>
+                <a:tc>
+                  <a:txBody>
+                    <a:bodyPr/>
+                    <a:lstStyle/>
+                    <a:p>
+                      <a:pPr algn="ctr" indent="0" marL="0">
+                        <a:buNone/>
+                      </a:pPr>
+                      <a:r>
+                        <a:rPr lang="en-US" sz="1050" b="1" dirty="0">
+                          <a:solidFill>
+                            <a:srgbClr val="FF7A1A"/>
+                          </a:solidFill>
+                        </a:rPr>
+                        <a:t>直付</a:t>
+                      </a:r>
+                      <a:endParaRPr lang="en-US" sz="1050" dirty="0"/>
+                    </a:p>
+                  </a:txBody>
+                  <a:tcPr marL="27432" marR="27432" marT="27432" marB="27432" anchor="ctr">
+                    <a:lnL w="9525" cap="flat" cmpd="sng" algn="ctr">
+                      <a:solidFill>
+                        <a:srgbClr val="D9DEE7"/>
+                      </a:solidFill>
+                      <a:prstDash val="solid"/>
+                      <a:round/>
+                      <a:headEnd type="none" w="med" len="med"/>
+                      <a:tailEnd type="none" w="med" len="med"/>
+                    </a:lnL>
+                    <a:lnR w="9525" cap="flat" cmpd="sng" algn="ctr">
+                      <a:solidFill>
+                        <a:srgbClr val="D9DEE7"/>
+                      </a:solidFill>
+                      <a:prstDash val="solid"/>
+                      <a:round/>
+                      <a:headEnd type="none" w="med" len="med"/>
+                      <a:tailEnd type="none" w="med" len="med"/>
+                    </a:lnR>
+                    <a:lnT w="9525" cap="flat" cmpd="sng" algn="ctr">
+                      <a:solidFill>
+                        <a:srgbClr val="D9DEE7"/>
+                      </a:solidFill>
+                      <a:prstDash val="solid"/>
+                      <a:round/>
+                      <a:headEnd type="none" w="med" len="med"/>
+                      <a:tailEnd type="none" w="med" len="med"/>
+                    </a:lnT>
+                    <a:lnB w="9525" cap="flat" cmpd="sng" algn="ctr">
+                      <a:solidFill>
+                        <a:srgbClr val="D9DEE7"/>
+                      </a:solidFill>
+                      <a:prstDash val="solid"/>
+                      <a:round/>
+                      <a:headEnd type="none" w="med" len="med"/>
+                      <a:tailEnd type="none" w="med" len="med"/>
+                    </a:lnB>
+                    <a:solidFill>
+                      <a:srgbClr val="FFF1E6"/>
+                    </a:solidFill>
+                  </a:tcPr>
+                </a:tc>
+                <a:tc>
+                  <a:txBody>
+                    <a:bodyPr/>
+                    <a:lstStyle/>
+                    <a:p>
+                      <a:pPr algn="ctr" indent="0" marL="0">
+                        <a:buNone/>
+                      </a:pPr>
+                      <a:r>
+                        <a:rPr lang="en-US" sz="1050" b="1" dirty="0">
+                          <a:solidFill>
+                            <a:srgbClr val="FF7A1A"/>
+                          </a:solidFill>
+                        </a:rPr>
+                        <a:t>直付</a:t>
+                      </a:r>
+                      <a:endParaRPr lang="en-US" sz="1050" dirty="0"/>
+                    </a:p>
+                  </a:txBody>
+                  <a:tcPr marL="27432" marR="27432" marT="27432" marB="27432" anchor="ctr">
+                    <a:lnL w="9525" cap="flat" cmpd="sng" algn="ctr">
+                      <a:solidFill>
+                        <a:srgbClr val="D9DEE7"/>
+                      </a:solidFill>
+                      <a:prstDash val="solid"/>
+                      <a:round/>
+                      <a:headEnd type="none" w="med" len="med"/>
+                      <a:tailEnd type="none" w="med" len="med"/>
+                    </a:lnL>
+                    <a:lnR w="9525" cap="flat" cmpd="sng" algn="ctr">
+                      <a:solidFill>
+                        <a:srgbClr val="D9DEE7"/>
+                      </a:solidFill>
+                      <a:prstDash val="solid"/>
+                      <a:round/>
+                      <a:headEnd type="none" w="med" len="med"/>
+                      <a:tailEnd type="none" w="med" len="med"/>
+                    </a:lnR>
+                    <a:lnT w="9525" cap="flat" cmpd="sng" algn="ctr">
+                      <a:solidFill>
+                        <a:srgbClr val="D9DEE7"/>
+                      </a:solidFill>
+                      <a:prstDash val="solid"/>
+                      <a:round/>
+                      <a:headEnd type="none" w="med" len="med"/>
+                      <a:tailEnd type="none" w="med" len="med"/>
+                    </a:lnT>
+                    <a:lnB w="9525" cap="flat" cmpd="sng" algn="ctr">
+                      <a:solidFill>
+                        <a:srgbClr val="D9DEE7"/>
+                      </a:solidFill>
+                      <a:prstDash val="solid"/>
+                      <a:round/>
+                      <a:headEnd type="none" w="med" len="med"/>
+                      <a:tailEnd type="none" w="med" len="med"/>
+                    </a:lnB>
+                    <a:solidFill>
+                      <a:srgbClr val="FFF1E6"/>
+                    </a:solidFill>
+                  </a:tcPr>
+                </a:tc>
+                <a:tc>
+                  <a:txBody>
+                    <a:bodyPr/>
+                    <a:lstStyle/>
+                    <a:p>
+                      <a:pPr algn="ctr" indent="0" marL="0">
+                        <a:buNone/>
+                      </a:pPr>
+                      <a:r>
+                        <a:rPr lang="en-US" sz="1050" dirty="0">
+                          <a:solidFill>
+                            <a:srgbClr val="5B6B80"/>
+                          </a:solidFill>
+                        </a:rPr>
+                        <a:t>—</a:t>
+                      </a:r>
+                      <a:endParaRPr lang="en-US" sz="1050" dirty="0"/>
+                    </a:p>
+                  </a:txBody>
+                  <a:tcPr marL="27432" marR="27432" marT="27432" marB="27432" anchor="ctr">
+                    <a:lnL w="9525" cap="flat" cmpd="sng" algn="ctr">
+                      <a:solidFill>
+                        <a:srgbClr val="D9DEE7"/>
+                      </a:solidFill>
+                      <a:prstDash val="solid"/>
+                      <a:round/>
+                      <a:headEnd type="none" w="med" len="med"/>
+                      <a:tailEnd type="none" w="med" len="med"/>
+                    </a:lnL>
+                    <a:lnR w="9525" cap="flat" cmpd="sng" algn="ctr">
+                      <a:solidFill>
+                        <a:srgbClr val="D9DEE7"/>
+                      </a:solidFill>
+                      <a:prstDash val="solid"/>
+                      <a:round/>
+                      <a:headEnd type="none" w="med" len="med"/>
+                      <a:tailEnd type="none" w="med" len="med"/>
+                    </a:lnR>
+                    <a:lnT w="9525" cap="flat" cmpd="sng" algn="ctr">
+                      <a:solidFill>
+                        <a:srgbClr val="D9DEE7"/>
+                      </a:solidFill>
+                      <a:prstDash val="solid"/>
+                      <a:round/>
+                      <a:headEnd type="none" w="med" len="med"/>
+                      <a:tailEnd type="none" w="med" len="med"/>
+                    </a:lnT>
+                    <a:lnB w="9525" cap="flat" cmpd="sng" algn="ctr">
+                      <a:solidFill>
+                        <a:srgbClr val="D9DEE7"/>
+                      </a:solidFill>
+                      <a:prstDash val="solid"/>
+                      <a:round/>
+                      <a:headEnd type="none" w="med" len="med"/>
+                      <a:tailEnd type="none" w="med" len="med"/>
+                    </a:lnB>
+                    <a:solidFill>
+                      <a:srgbClr val="FFFFFF"/>
+                    </a:solidFill>
+                  </a:tcPr>
+                </a:tc>
+                <a:tc>
+                  <a:txBody>
+                    <a:bodyPr/>
+                    <a:lstStyle/>
+                    <a:p>
+                      <a:pPr algn="ctr" indent="0" marL="0">
+                        <a:buNone/>
+                      </a:pPr>
+                      <a:r>
+                        <a:rPr lang="en-US" sz="1050" dirty="0">
+                          <a:solidFill>
+                            <a:srgbClr val="5B6B80"/>
+                          </a:solidFill>
+                        </a:rPr>
+                        <a:t>—</a:t>
+                      </a:r>
+                      <a:endParaRPr lang="en-US" sz="1050" dirty="0"/>
+                    </a:p>
+                  </a:txBody>
+                  <a:tcPr marL="27432" marR="27432" marT="27432" marB="27432" anchor="ctr">
+                    <a:lnL w="9525" cap="flat" cmpd="sng" algn="ctr">
+                      <a:solidFill>
+                        <a:srgbClr val="D9DEE7"/>
+                      </a:solidFill>
+                      <a:prstDash val="solid"/>
+                      <a:round/>
+                      <a:headEnd type="none" w="med" len="med"/>
+                      <a:tailEnd type="none" w="med" len="med"/>
+                    </a:lnL>
+                    <a:lnR w="9525" cap="flat" cmpd="sng" algn="ctr">
+                      <a:solidFill>
+                        <a:srgbClr val="D9DEE7"/>
+                      </a:solidFill>
+                      <a:prstDash val="solid"/>
+                      <a:round/>
+                      <a:headEnd type="none" w="med" len="med"/>
+                      <a:tailEnd type="none" w="med" len="med"/>
+                    </a:lnR>
+                    <a:lnT w="9525" cap="flat" cmpd="sng" algn="ctr">
+                      <a:solidFill>
+                        <a:srgbClr val="D9DEE7"/>
+                      </a:solidFill>
+                      <a:prstDash val="solid"/>
+                      <a:round/>
+                      <a:headEnd type="none" w="med" len="med"/>
+                      <a:tailEnd type="none" w="med" len="med"/>
+                    </a:lnT>
+                    <a:lnB w="9525" cap="flat" cmpd="sng" algn="ctr">
+                      <a:solidFill>
+                        <a:srgbClr val="D9DEE7"/>
+                      </a:solidFill>
+                      <a:prstDash val="solid"/>
+                      <a:round/>
+                      <a:headEnd type="none" w="med" len="med"/>
+                      <a:tailEnd type="none" w="med" len="med"/>
+                    </a:lnB>
+                    <a:solidFill>
+                      <a:srgbClr val="FFFFFF"/>
+                    </a:solidFill>
+                  </a:tcPr>
+                </a:tc>
+              </a:tr>
+              <a:tr h="384048">
+                <a:tc vMerge="1">
+                  <a:tcPr/>
+                </a:tc>
+                <a:tc>
+                  <a:txBody>
+                    <a:bodyPr/>
+                    <a:lstStyle/>
+                    <a:p>
+                      <a:pPr algn="l" indent="0" marL="0">
+                        <a:buNone/>
+                      </a:pPr>
+                      <a:r>
+                        <a:rPr lang="en-US" sz="1000" dirty="0">
+                          <a:solidFill>
+                            <a:srgbClr val="3D4757"/>
+                          </a:solidFill>
+                        </a:rPr>
+                        <a:t>预付</a:t>
+                      </a:r>
+                      <a:endParaRPr lang="en-US" sz="1000" dirty="0"/>
+                    </a:p>
+                  </a:txBody>
+                  <a:tcPr marL="27432" marR="27432" marT="27432" marB="27432" anchor="ctr">
+                    <a:lnL w="9525" cap="flat" cmpd="sng" algn="ctr">
+                      <a:solidFill>
+                        <a:srgbClr val="D9DEE7"/>
+                      </a:solidFill>
+                      <a:prstDash val="solid"/>
+                      <a:round/>
+                      <a:headEnd type="none" w="med" len="med"/>
+                      <a:tailEnd type="none" w="med" len="med"/>
+                    </a:lnL>
+                    <a:lnR w="9525" cap="flat" cmpd="sng" algn="ctr">
+                      <a:solidFill>
+                        <a:srgbClr val="D9DEE7"/>
+                      </a:solidFill>
+                      <a:prstDash val="solid"/>
+                      <a:round/>
+                      <a:headEnd type="none" w="med" len="med"/>
+                      <a:tailEnd type="none" w="med" len="med"/>
+                    </a:lnR>
+                    <a:lnT w="9525" cap="flat" cmpd="sng" algn="ctr">
+                      <a:solidFill>
+                        <a:srgbClr val="D9DEE7"/>
+                      </a:solidFill>
+                      <a:prstDash val="solid"/>
+                      <a:round/>
+                      <a:headEnd type="none" w="med" len="med"/>
+                      <a:tailEnd type="none" w="med" len="med"/>
+                    </a:lnT>
+                    <a:lnB w="9525" cap="flat" cmpd="sng" algn="ctr">
+                      <a:solidFill>
+                        <a:srgbClr val="D9DEE7"/>
+                      </a:solidFill>
+                      <a:prstDash val="solid"/>
+                      <a:round/>
+                      <a:headEnd type="none" w="med" len="med"/>
+                      <a:tailEnd type="none" w="med" len="med"/>
+                    </a:lnB>
+                    <a:solidFill>
+                      <a:srgbClr val="FFFFFF"/>
+                    </a:solidFill>
+                  </a:tcPr>
+                </a:tc>
+                <a:tc>
+                  <a:txBody>
+                    <a:bodyPr/>
+                    <a:lstStyle/>
+                    <a:p>
+                      <a:pPr algn="ctr" indent="0" marL="0">
+                        <a:buNone/>
+                      </a:pPr>
+                      <a:r>
+                        <a:rPr lang="en-US" sz="1050" b="1" dirty="0">
+                          <a:solidFill>
+                            <a:srgbClr val="FF7A1A"/>
+                          </a:solidFill>
+                        </a:rPr>
+                        <a:t>直付</a:t>
+                      </a:r>
+                      <a:endParaRPr lang="en-US" sz="1050" dirty="0"/>
+                    </a:p>
+                  </a:txBody>
+                  <a:tcPr marL="27432" marR="27432" marT="27432" marB="27432" anchor="ctr">
+                    <a:lnL w="9525" cap="flat" cmpd="sng" algn="ctr">
+                      <a:solidFill>
+                        <a:srgbClr val="D9DEE7"/>
+                      </a:solidFill>
+                      <a:prstDash val="solid"/>
+                      <a:round/>
+                      <a:headEnd type="none" w="med" len="med"/>
+                      <a:tailEnd type="none" w="med" len="med"/>
+                    </a:lnL>
+                    <a:lnR w="9525" cap="flat" cmpd="sng" algn="ctr">
+                      <a:solidFill>
+                        <a:srgbClr val="D9DEE7"/>
+                      </a:solidFill>
+                      <a:prstDash val="solid"/>
+                      <a:round/>
+                      <a:headEnd type="none" w="med" len="med"/>
+                      <a:tailEnd type="none" w="med" len="med"/>
+                    </a:lnR>
+                    <a:lnT w="9525" cap="flat" cmpd="sng" algn="ctr">
+                      <a:solidFill>
+                        <a:srgbClr val="D9DEE7"/>
+                      </a:solidFill>
+                      <a:prstDash val="solid"/>
+                      <a:round/>
+                      <a:headEnd type="none" w="med" len="med"/>
+                      <a:tailEnd type="none" w="med" len="med"/>
+                    </a:lnT>
+                    <a:lnB w="9525" cap="flat" cmpd="sng" algn="ctr">
+                      <a:solidFill>
+                        <a:srgbClr val="D9DEE7"/>
+                      </a:solidFill>
+                      <a:prstDash val="solid"/>
+                      <a:round/>
+                      <a:headEnd type="none" w="med" len="med"/>
+                      <a:tailEnd type="none" w="med" len="med"/>
+                    </a:lnB>
+                    <a:solidFill>
+                      <a:srgbClr val="FFF1E6"/>
+                    </a:solidFill>
+                  </a:tcPr>
+                </a:tc>
+                <a:tc>
+                  <a:txBody>
+                    <a:bodyPr/>
+                    <a:lstStyle/>
+                    <a:p>
+                      <a:pPr algn="ctr" indent="0" marL="0">
+                        <a:buNone/>
+                      </a:pPr>
+                      <a:r>
+                        <a:rPr lang="en-US" sz="1050" b="1" dirty="0">
+                          <a:solidFill>
+                            <a:srgbClr val="FF7A1A"/>
+                          </a:solidFill>
+                        </a:rPr>
+                        <a:t>直付</a:t>
+                      </a:r>
+                      <a:endParaRPr lang="en-US" sz="1050" dirty="0"/>
+                    </a:p>
+                  </a:txBody>
+                  <a:tcPr marL="27432" marR="27432" marT="27432" marB="27432" anchor="ctr">
+                    <a:lnL w="9525" cap="flat" cmpd="sng" algn="ctr">
+                      <a:solidFill>
+                        <a:srgbClr val="D9DEE7"/>
+                      </a:solidFill>
+                      <a:prstDash val="solid"/>
+                      <a:round/>
+                      <a:headEnd type="none" w="med" len="med"/>
+                      <a:tailEnd type="none" w="med" len="med"/>
+                    </a:lnL>
+                    <a:lnR w="9525" cap="flat" cmpd="sng" algn="ctr">
+                      <a:solidFill>
+                        <a:srgbClr val="D9DEE7"/>
+                      </a:solidFill>
+                      <a:prstDash val="solid"/>
+                      <a:round/>
+                      <a:headEnd type="none" w="med" len="med"/>
+                      <a:tailEnd type="none" w="med" len="med"/>
+                    </a:lnR>
+                    <a:lnT w="9525" cap="flat" cmpd="sng" algn="ctr">
+                      <a:solidFill>
+                        <a:srgbClr val="D9DEE7"/>
+                      </a:solidFill>
+                      <a:prstDash val="solid"/>
+                      <a:round/>
+                      <a:headEnd type="none" w="med" len="med"/>
+                      <a:tailEnd type="none" w="med" len="med"/>
+                    </a:lnT>
+                    <a:lnB w="9525" cap="flat" cmpd="sng" algn="ctr">
+                      <a:solidFill>
+                        <a:srgbClr val="D9DEE7"/>
+                      </a:solidFill>
+                      <a:prstDash val="solid"/>
+                      <a:round/>
+                      <a:headEnd type="none" w="med" len="med"/>
+                      <a:tailEnd type="none" w="med" len="med"/>
+                    </a:lnB>
+                    <a:solidFill>
+                      <a:srgbClr val="FFF1E6"/>
+                    </a:solidFill>
+                  </a:tcPr>
+                </a:tc>
+                <a:tc>
+                  <a:txBody>
+                    <a:bodyPr/>
+                    <a:lstStyle/>
+                    <a:p>
+                      <a:pPr algn="ctr" indent="0" marL="0">
+                        <a:buNone/>
+                      </a:pPr>
+                      <a:r>
+                        <a:rPr lang="en-US" sz="1050" b="1" dirty="0">
+                          <a:solidFill>
+                            <a:srgbClr val="FF7A1A"/>
+                          </a:solidFill>
+                        </a:rPr>
+                        <a:t>直付</a:t>
+                      </a:r>
+                      <a:endParaRPr lang="en-US" sz="1050" dirty="0"/>
+                    </a:p>
+                  </a:txBody>
+                  <a:tcPr marL="27432" marR="27432" marT="27432" marB="27432" anchor="ctr">
+                    <a:lnL w="9525" cap="flat" cmpd="sng" algn="ctr">
+                      <a:solidFill>
+                        <a:srgbClr val="D9DEE7"/>
+                      </a:solidFill>
+                      <a:prstDash val="solid"/>
+                      <a:round/>
+                      <a:headEnd type="none" w="med" len="med"/>
+                      <a:tailEnd type="none" w="med" len="med"/>
+                    </a:lnL>
+                    <a:lnR w="9525" cap="flat" cmpd="sng" algn="ctr">
+                      <a:solidFill>
+                        <a:srgbClr val="D9DEE7"/>
+                      </a:solidFill>
+                      <a:prstDash val="solid"/>
+                      <a:round/>
+                      <a:headEnd type="none" w="med" len="med"/>
+                      <a:tailEnd type="none" w="med" len="med"/>
+                    </a:lnR>
+                    <a:lnT w="9525" cap="flat" cmpd="sng" algn="ctr">
+                      <a:solidFill>
+                        <a:srgbClr val="D9DEE7"/>
+                      </a:solidFill>
+                      <a:prstDash val="solid"/>
+                      <a:round/>
+                      <a:headEnd type="none" w="med" len="med"/>
+                      <a:tailEnd type="none" w="med" len="med"/>
+                    </a:lnT>
+                    <a:lnB w="9525" cap="flat" cmpd="sng" algn="ctr">
+                      <a:solidFill>
+                        <a:srgbClr val="D9DEE7"/>
+                      </a:solidFill>
+                      <a:prstDash val="solid"/>
+                      <a:round/>
+                      <a:headEnd type="none" w="med" len="med"/>
+                      <a:tailEnd type="none" w="med" len="med"/>
+                    </a:lnB>
+                    <a:solidFill>
+                      <a:srgbClr val="FFF1E6"/>
+                    </a:solidFill>
+                  </a:tcPr>
+                </a:tc>
+                <a:tc>
+                  <a:txBody>
+                    <a:bodyPr/>
+                    <a:lstStyle/>
+                    <a:p>
+                      <a:pPr algn="ctr" indent="0" marL="0">
+                        <a:buNone/>
+                      </a:pPr>
+                      <a:r>
+                        <a:rPr lang="en-US" sz="1050" dirty="0">
+                          <a:solidFill>
+                            <a:srgbClr val="5B6B80"/>
+                          </a:solidFill>
+                        </a:rPr>
+                        <a:t>—</a:t>
+                      </a:r>
+                      <a:endParaRPr lang="en-US" sz="1050" dirty="0"/>
+                    </a:p>
+                  </a:txBody>
+                  <a:tcPr marL="27432" marR="27432" marT="27432" marB="27432" anchor="ctr">
+                    <a:lnL w="9525" cap="flat" cmpd="sng" algn="ctr">
+                      <a:solidFill>
+                        <a:srgbClr val="D9DEE7"/>
+                      </a:solidFill>
+                      <a:prstDash val="solid"/>
+                      <a:round/>
+                      <a:headEnd type="none" w="med" len="med"/>
+                      <a:tailEnd type="none" w="med" len="med"/>
+                    </a:lnL>
+                    <a:lnR w="9525" cap="flat" cmpd="sng" algn="ctr">
+                      <a:solidFill>
+                        <a:srgbClr val="D9DEE7"/>
+                      </a:solidFill>
+                      <a:prstDash val="solid"/>
+                      <a:round/>
+                      <a:headEnd type="none" w="med" len="med"/>
+                      <a:tailEnd type="none" w="med" len="med"/>
+                    </a:lnR>
+                    <a:lnT w="9525" cap="flat" cmpd="sng" algn="ctr">
+                      <a:solidFill>
+                        <a:srgbClr val="D9DEE7"/>
+                      </a:solidFill>
+                      <a:prstDash val="solid"/>
+                      <a:round/>
+                      <a:headEnd type="none" w="med" len="med"/>
+                      <a:tailEnd type="none" w="med" len="med"/>
+                    </a:lnT>
+                    <a:lnB w="9525" cap="flat" cmpd="sng" algn="ctr">
+                      <a:solidFill>
+                        <a:srgbClr val="D9DEE7"/>
+                      </a:solidFill>
+                      <a:prstDash val="solid"/>
+                      <a:round/>
+                      <a:headEnd type="none" w="med" len="med"/>
+                      <a:tailEnd type="none" w="med" len="med"/>
+                    </a:lnB>
+                    <a:solidFill>
+                      <a:srgbClr val="FFFFFF"/>
+                    </a:solidFill>
+                  </a:tcPr>
+                </a:tc>
+                <a:tc>
+                  <a:txBody>
+                    <a:bodyPr/>
+                    <a:lstStyle/>
+                    <a:p>
+                      <a:pPr algn="ctr" indent="0" marL="0">
+                        <a:buNone/>
+                      </a:pPr>
+                      <a:r>
+                        <a:rPr lang="en-US" sz="1050" dirty="0">
+                          <a:solidFill>
+                            <a:srgbClr val="5B6B80"/>
+                          </a:solidFill>
+                        </a:rPr>
+                        <a:t>—</a:t>
+                      </a:r>
+                      <a:endParaRPr lang="en-US" sz="1050" dirty="0"/>
+                    </a:p>
+                  </a:txBody>
+                  <a:tcPr marL="27432" marR="27432" marT="27432" marB="27432" anchor="ctr">
+                    <a:lnL w="9525" cap="flat" cmpd="sng" algn="ctr">
+                      <a:solidFill>
+                        <a:srgbClr val="D9DEE7"/>
+                      </a:solidFill>
+                      <a:prstDash val="solid"/>
+                      <a:round/>
+                      <a:headEnd type="none" w="med" len="med"/>
+                      <a:tailEnd type="none" w="med" len="med"/>
+                    </a:lnL>
+                    <a:lnR w="9525" cap="flat" cmpd="sng" algn="ctr">
+                      <a:solidFill>
+                        <a:srgbClr val="D9DEE7"/>
+                      </a:solidFill>
+                      <a:prstDash val="solid"/>
+                      <a:round/>
+                      <a:headEnd type="none" w="med" len="med"/>
+                      <a:tailEnd type="none" w="med" len="med"/>
+                    </a:lnR>
+                    <a:lnT w="9525" cap="flat" cmpd="sng" algn="ctr">
+                      <a:solidFill>
+                        <a:srgbClr val="D9DEE7"/>
+                      </a:solidFill>
+                      <a:prstDash val="solid"/>
+                      <a:round/>
+                      <a:headEnd type="none" w="med" len="med"/>
+                      <a:tailEnd type="none" w="med" len="med"/>
+                    </a:lnT>
+                    <a:lnB w="9525" cap="flat" cmpd="sng" algn="ctr">
+                      <a:solidFill>
+                        <a:srgbClr val="D9DEE7"/>
+                      </a:solidFill>
+                      <a:prstDash val="solid"/>
+                      <a:round/>
+                      <a:headEnd type="none" w="med" len="med"/>
+                      <a:tailEnd type="none" w="med" len="med"/>
+                    </a:lnB>
+                    <a:solidFill>
+                      <a:srgbClr val="FFFFFF"/>
+                    </a:solidFill>
+                  </a:tcPr>
+                </a:tc>
+              </a:tr>
+            </a:tbl>
+          </a:graphicData>
+        </a:graphic>
+      </p:graphicFrame>
+      <p:sp>
+        <p:nvSpPr>
+          <p:cNvPr id="13" name="th-a-legend"/>
           <p:cNvSpPr txBox="1"/>
           <p:nvPr/>
         </p:nvSpPr>
         <p:spPr>
           <a:xfrm>
-            <a:off x="685800" y="2743200"/>
-            <a:ext cx="2971800" cy="566928"/>
+            <a:off x="640080" y="5577840"/>
+            <a:ext cx="4526280" cy="411480"/>
           </a:xfrm>
           <a:prstGeom prst="rect">
             <a:avLst/>
@@ -2965,356 +5554,80 @@
           <a:ln/>
         </p:spPr>
         <p:txBody>
-          <a:bodyPr wrap="square" lIns="0" tIns="0" rIns="0" bIns="0" rtlCol="0" anchor="ctr"/>
+          <a:bodyPr wrap="square" lIns="0" tIns="0" rIns="0" bIns="0" rtlCol="0" anchor="t"/>
           <a:lstStyle/>
           <a:p>
-            <a:pPr algn="ctr" indent="0" marL="0">
-              <a:buNone/>
-            </a:pPr>
-            <a:r>
-              <a:rPr lang="en-US" sz="1300" b="1" dirty="0">
-                <a:solidFill>
-                  <a:srgbClr val="FFFFFF"/>
-                </a:solidFill>
-              </a:rPr>
-              <a:t>风控下，订单能否代付出票</a:t>
-            </a:r>
-            <a:endParaRPr lang="en-US" sz="1300" dirty="0"/>
+            <a:pPr indent="0" marL="0">
+              <a:buNone/>
+            </a:pPr>
+            <a:r>
+              <a:rPr lang="en-US" sz="950" b="1" dirty="0">
+                <a:solidFill>
+                  <a:srgbClr val="287DFA"/>
+                </a:solidFill>
+              </a:rPr>
+              <a:t>代付</a:t>
+            </a:r>
+            <a:pPr indent="0" marL="0">
+              <a:buNone/>
+            </a:pPr>
+            <a:r>
+              <a:rPr lang="en-US" sz="950" dirty="0">
+                <a:solidFill>
+                  <a:srgbClr val="5B6B80"/>
+                </a:solidFill>
+              </a:rPr>
+              <a:t>：扣位后由平台代付出票　</a:t>
+            </a:r>
+            <a:pPr indent="0" marL="0">
+              <a:buNone/>
+            </a:pPr>
+            <a:r>
+              <a:rPr lang="en-US" sz="950" b="1" dirty="0">
+                <a:solidFill>
+                  <a:srgbClr val="FF7A1A"/>
+                </a:solidFill>
+              </a:rPr>
+              <a:t>直付</a:t>
+            </a:r>
+            <a:pPr indent="0" marL="0">
+              <a:buNone/>
+            </a:pPr>
+            <a:r>
+              <a:rPr lang="en-US" sz="950" dirty="0">
+                <a:solidFill>
+                  <a:srgbClr val="5B6B80"/>
+                </a:solidFill>
+              </a:rPr>
+              <a:t>：需召回用户自行支付　—：表中未列</a:t>
+            </a:r>
+            <a:endParaRPr lang="en-US" sz="950" dirty="0"/>
+          </a:p>
+          <a:p>
+            <a:pPr indent="0" marL="0">
+              <a:buNone/>
+            </a:pPr>
+            <a:r>
+              <a:rPr lang="en-US" sz="950" dirty="0">
+                <a:solidFill>
+                  <a:srgbClr val="5B6B80"/>
+                </a:solidFill>
+              </a:rPr>
+              <a:t>*：非支付宝或支付宝黑名单订单</a:t>
+            </a:r>
+            <a:endParaRPr lang="en-US" sz="950" dirty="0"/>
           </a:p>
         </p:txBody>
       </p:sp>
       <p:sp>
         <p:nvSpPr>
-          <p:cNvPr id="14" name="th-a-v"/>
+          <p:cNvPr id="14" name="th-b-chip"/>
           <p:cNvSpPr/>
           <p:nvPr/>
         </p:nvSpPr>
         <p:spPr>
           <a:xfrm>
-            <a:off x="868680" y="3310128"/>
-            <a:ext cx="0" cy="2212848"/>
-          </a:xfrm>
-          <a:prstGeom prst="line">
-            <a:avLst/>
-          </a:prstGeom>
-          <a:noFill/>
-          <a:ln w="19050">
-            <a:solidFill>
-              <a:srgbClr val="8FB8F5"/>
-            </a:solidFill>
-            <a:prstDash val="solid"/>
-          </a:ln>
-        </p:spPr>
-      </p:sp>
-      <p:sp>
-        <p:nvSpPr>
-          <p:cNvPr id="15" name="th-a-h0"/>
-          <p:cNvSpPr/>
-          <p:nvPr/>
-        </p:nvSpPr>
-        <p:spPr>
-          <a:xfrm>
-            <a:off x="868680" y="3877056"/>
-            <a:ext cx="228600" cy="0"/>
-          </a:xfrm>
-          <a:prstGeom prst="line">
-            <a:avLst/>
-          </a:prstGeom>
-          <a:noFill/>
-          <a:ln w="19050">
-            <a:solidFill>
-              <a:srgbClr val="8FB8F5"/>
-            </a:solidFill>
-            <a:prstDash val="solid"/>
-          </a:ln>
-        </p:spPr>
-      </p:sp>
-      <p:sp>
-        <p:nvSpPr>
-          <p:cNvPr id="16" name="th-a-n0"/>
-          <p:cNvSpPr/>
-          <p:nvPr/>
-        </p:nvSpPr>
-        <p:spPr>
-          <a:xfrm>
-            <a:off x="1097280" y="3566160"/>
-            <a:ext cx="2560320" cy="621792"/>
-          </a:xfrm>
-          <a:prstGeom prst="roundRect">
-            <a:avLst>
-              <a:gd name="adj" fmla="val 8824"/>
-            </a:avLst>
-          </a:prstGeom>
-          <a:solidFill>
-            <a:srgbClr val="FFFFFF"/>
-          </a:solidFill>
-          <a:ln w="12700">
-            <a:solidFill>
-              <a:srgbClr val="8FB8F5"/>
-            </a:solidFill>
-            <a:prstDash val="solid"/>
-          </a:ln>
-        </p:spPr>
-      </p:sp>
-      <p:sp>
-        <p:nvSpPr>
-          <p:cNvPr id="17" name="th-a-n0-t"/>
-          <p:cNvSpPr txBox="1"/>
-          <p:nvPr/>
-        </p:nvSpPr>
-        <p:spPr>
-          <a:xfrm>
-            <a:off x="1234440" y="3621024"/>
-            <a:ext cx="2331720" cy="548640"/>
-          </a:xfrm>
-          <a:prstGeom prst="rect">
-            <a:avLst/>
-          </a:prstGeom>
-          <a:noFill/>
-          <a:ln/>
-        </p:spPr>
-        <p:txBody>
-          <a:bodyPr wrap="square" lIns="0" tIns="0" rIns="0" bIns="0" rtlCol="0" anchor="ctr"/>
-          <a:lstStyle/>
-          <a:p>
-            <a:pPr indent="0" marL="0">
-              <a:buNone/>
-            </a:pPr>
-            <a:r>
-              <a:rPr lang="en-US" sz="1300" b="1" dirty="0">
-                <a:solidFill>
-                  <a:srgbClr val="287DFA"/>
-                </a:solidFill>
-              </a:rPr>
-              <a:t>引导支付宝</a:t>
-            </a:r>
-            <a:endParaRPr lang="en-US" sz="1400" dirty="0"/>
-          </a:p>
-          <a:p>
-            <a:pPr indent="0" marL="0">
-              <a:buNone/>
-            </a:pPr>
-            <a:r>
-              <a:rPr lang="en-US" sz="1100" dirty="0">
-                <a:solidFill>
-                  <a:srgbClr val="3D4757"/>
-                </a:solidFill>
-              </a:rPr>
-              <a:t>扣位前，让订单具备代付条件</a:t>
-            </a:r>
-            <a:endParaRPr lang="en-US" sz="1400" dirty="0"/>
-          </a:p>
-        </p:txBody>
-      </p:sp>
-      <p:sp>
-        <p:nvSpPr>
-          <p:cNvPr id="18" name="th-a-h1"/>
-          <p:cNvSpPr/>
-          <p:nvPr/>
-        </p:nvSpPr>
-        <p:spPr>
-          <a:xfrm>
-            <a:off x="868680" y="4700016"/>
-            <a:ext cx="228600" cy="0"/>
-          </a:xfrm>
-          <a:prstGeom prst="line">
-            <a:avLst/>
-          </a:prstGeom>
-          <a:noFill/>
-          <a:ln w="19050">
-            <a:solidFill>
-              <a:srgbClr val="8FB8F5"/>
-            </a:solidFill>
-            <a:prstDash val="solid"/>
-          </a:ln>
-        </p:spPr>
-      </p:sp>
-      <p:sp>
-        <p:nvSpPr>
-          <p:cNvPr id="19" name="th-a-n1"/>
-          <p:cNvSpPr/>
-          <p:nvPr/>
-        </p:nvSpPr>
-        <p:spPr>
-          <a:xfrm>
-            <a:off x="1097280" y="4389120"/>
-            <a:ext cx="2560320" cy="621792"/>
-          </a:xfrm>
-          <a:prstGeom prst="roundRect">
-            <a:avLst>
-              <a:gd name="adj" fmla="val 8824"/>
-            </a:avLst>
-          </a:prstGeom>
-          <a:solidFill>
-            <a:srgbClr val="FFFFFF"/>
-          </a:solidFill>
-          <a:ln w="12700">
-            <a:solidFill>
-              <a:srgbClr val="8FB8F5"/>
-            </a:solidFill>
-            <a:prstDash val="solid"/>
-          </a:ln>
-        </p:spPr>
-      </p:sp>
-      <p:sp>
-        <p:nvSpPr>
-          <p:cNvPr id="20" name="th-a-n1-t"/>
-          <p:cNvSpPr txBox="1"/>
-          <p:nvPr/>
-        </p:nvSpPr>
-        <p:spPr>
-          <a:xfrm>
-            <a:off x="1234440" y="4443984"/>
-            <a:ext cx="2331720" cy="548640"/>
-          </a:xfrm>
-          <a:prstGeom prst="rect">
-            <a:avLst/>
-          </a:prstGeom>
-          <a:noFill/>
-          <a:ln/>
-        </p:spPr>
-        <p:txBody>
-          <a:bodyPr wrap="square" lIns="0" tIns="0" rIns="0" bIns="0" rtlCol="0" anchor="ctr"/>
-          <a:lstStyle/>
-          <a:p>
-            <a:pPr indent="0" marL="0">
-              <a:buNone/>
-            </a:pPr>
-            <a:r>
-              <a:rPr lang="en-US" sz="1300" b="1" dirty="0">
-                <a:solidFill>
-                  <a:srgbClr val="287DFA"/>
-                </a:solidFill>
-              </a:rPr>
-              <a:t>直付兜底</a:t>
-            </a:r>
-            <a:endParaRPr lang="en-US" sz="1400" dirty="0"/>
-          </a:p>
-          <a:p>
-            <a:pPr indent="0" marL="0">
-              <a:buNone/>
-            </a:pPr>
-            <a:r>
-              <a:rPr lang="en-US" sz="1100" dirty="0">
-                <a:solidFill>
-                  <a:srgbClr val="3D4757"/>
-                </a:solidFill>
-              </a:rPr>
-              <a:t>扣位后，代付不了仍可出票</a:t>
-            </a:r>
-            <a:endParaRPr lang="en-US" sz="1400" dirty="0"/>
-          </a:p>
-        </p:txBody>
-      </p:sp>
-      <p:sp>
-        <p:nvSpPr>
-          <p:cNvPr id="21" name="th-a-h2"/>
-          <p:cNvSpPr/>
-          <p:nvPr/>
-        </p:nvSpPr>
-        <p:spPr>
-          <a:xfrm>
-            <a:off x="868680" y="5522976"/>
-            <a:ext cx="228600" cy="0"/>
-          </a:xfrm>
-          <a:prstGeom prst="line">
-            <a:avLst/>
-          </a:prstGeom>
-          <a:noFill/>
-          <a:ln w="19050">
-            <a:solidFill>
-              <a:srgbClr val="8FB8F5"/>
-            </a:solidFill>
-            <a:prstDash val="solid"/>
-          </a:ln>
-        </p:spPr>
-      </p:sp>
-      <p:sp>
-        <p:nvSpPr>
-          <p:cNvPr id="22" name="th-a-n2"/>
-          <p:cNvSpPr/>
-          <p:nvPr/>
-        </p:nvSpPr>
-        <p:spPr>
-          <a:xfrm>
-            <a:off x="1097280" y="5212080"/>
-            <a:ext cx="2560320" cy="621792"/>
-          </a:xfrm>
-          <a:prstGeom prst="roundRect">
-            <a:avLst>
-              <a:gd name="adj" fmla="val 8824"/>
-            </a:avLst>
-          </a:prstGeom>
-          <a:solidFill>
-            <a:srgbClr val="FFFFFF"/>
-          </a:solidFill>
-          <a:ln w="12700">
-            <a:solidFill>
-              <a:srgbClr val="8FB8F5"/>
-            </a:solidFill>
-            <a:prstDash val="solid"/>
-          </a:ln>
-        </p:spPr>
-      </p:sp>
-      <p:sp>
-        <p:nvSpPr>
-          <p:cNvPr id="23" name="th-a-n2-t"/>
-          <p:cNvSpPr txBox="1"/>
-          <p:nvPr/>
-        </p:nvSpPr>
-        <p:spPr>
-          <a:xfrm>
-            <a:off x="1234440" y="5266944"/>
-            <a:ext cx="2331720" cy="548640"/>
-          </a:xfrm>
-          <a:prstGeom prst="rect">
-            <a:avLst/>
-          </a:prstGeom>
-          <a:noFill/>
-          <a:ln/>
-        </p:spPr>
-        <p:txBody>
-          <a:bodyPr wrap="square" lIns="0" tIns="0" rIns="0" bIns="0" rtlCol="0" anchor="ctr"/>
-          <a:lstStyle/>
-          <a:p>
-            <a:pPr indent="0" marL="0">
-              <a:buNone/>
-            </a:pPr>
-            <a:r>
-              <a:rPr lang="en-US" sz="1300" b="1" dirty="0">
-                <a:solidFill>
-                  <a:srgbClr val="287DFA"/>
-                </a:solidFill>
-              </a:rPr>
-              <a:t>拓展出票方式</a:t>
-            </a:r>
-            <a:endParaRPr lang="en-US" sz="1400" dirty="0"/>
-          </a:p>
-          <a:p>
-            <a:pPr indent="0" marL="0">
-              <a:buNone/>
-            </a:pPr>
-            <a:r>
-              <a:rPr lang="en-US" sz="1100" dirty="0">
-                <a:solidFill>
-                  <a:srgbClr val="3D4757"/>
-                </a:solidFill>
-              </a:rPr>
-              <a:t>放开支付宝订单抢转买</a:t>
-            </a:r>
-            <a:endParaRPr lang="en-US" sz="1400" dirty="0"/>
-          </a:p>
-        </p:txBody>
-      </p:sp>
-      <p:sp>
-        <p:nvSpPr>
-          <p:cNvPr id="24" name="th-b-chip"/>
-          <p:cNvSpPr/>
-          <p:nvPr/>
-        </p:nvSpPr>
-        <p:spPr>
-          <a:xfrm>
-            <a:off x="4608576" y="1828800"/>
+            <a:off x="5843016" y="1828800"/>
             <a:ext cx="713232" cy="329184"/>
           </a:xfrm>
           <a:prstGeom prst="roundRect">
@@ -3335,13 +5648,13 @@
       </p:sp>
       <p:sp>
         <p:nvSpPr>
-          <p:cNvPr id="25" name="th-b-chip-t"/>
+          <p:cNvPr id="15" name="th-b-chip-t"/>
           <p:cNvSpPr txBox="1"/>
           <p:nvPr/>
         </p:nvSpPr>
         <p:spPr>
           <a:xfrm>
-            <a:off x="4608576" y="1828800"/>
+            <a:off x="5843016" y="1828800"/>
             <a:ext cx="713232" cy="329184"/>
           </a:xfrm>
           <a:prstGeom prst="rect">
@@ -3371,14 +5684,14 @@
       </p:sp>
       <p:sp>
         <p:nvSpPr>
-          <p:cNvPr id="26" name="th-b-h"/>
+          <p:cNvPr id="16" name="th-b-h"/>
           <p:cNvSpPr txBox="1"/>
           <p:nvPr/>
         </p:nvSpPr>
         <p:spPr>
           <a:xfrm>
-            <a:off x="4608576" y="2286000"/>
-            <a:ext cx="2971800" cy="320040"/>
+            <a:off x="5843016" y="2286000"/>
+            <a:ext cx="2514600" cy="320040"/>
           </a:xfrm>
           <a:prstGeom prst="rect">
             <a:avLst/>
@@ -3407,14 +5720,14 @@
       </p:sp>
       <p:sp>
         <p:nvSpPr>
-          <p:cNvPr id="27" name="th-b-k-l"/>
+          <p:cNvPr id="17" name="th-b-k-l"/>
           <p:cNvSpPr txBox="1"/>
           <p:nvPr/>
         </p:nvSpPr>
         <p:spPr>
           <a:xfrm>
-            <a:off x="4608576" y="2788920"/>
-            <a:ext cx="2971800" cy="274320"/>
+            <a:off x="5843016" y="2788920"/>
+            <a:ext cx="2514600" cy="274320"/>
           </a:xfrm>
           <a:prstGeom prst="rect">
             <a:avLst/>
@@ -3443,14 +5756,14 @@
       </p:sp>
       <p:sp>
         <p:nvSpPr>
-          <p:cNvPr id="28" name="th-b-k-v"/>
+          <p:cNvPr id="18" name="th-b-k-v"/>
           <p:cNvSpPr txBox="1"/>
           <p:nvPr/>
         </p:nvSpPr>
         <p:spPr>
           <a:xfrm>
-            <a:off x="4608576" y="3063240"/>
-            <a:ext cx="2971800" cy="685800"/>
+            <a:off x="5843016" y="3063240"/>
+            <a:ext cx="2514600" cy="685800"/>
           </a:xfrm>
           <a:prstGeom prst="rect">
             <a:avLst/>
@@ -3479,14 +5792,14 @@
       </p:sp>
       <p:sp>
         <p:nvSpPr>
-          <p:cNvPr id="29" name="th-b-k-n"/>
+          <p:cNvPr id="19" name="th-b-k-n"/>
           <p:cNvSpPr txBox="1"/>
           <p:nvPr/>
         </p:nvSpPr>
         <p:spPr>
           <a:xfrm>
-            <a:off x="4608576" y="3749040"/>
-            <a:ext cx="2971800" cy="274320"/>
+            <a:off x="5843016" y="3749040"/>
+            <a:ext cx="2514600" cy="457200"/>
           </a:xfrm>
           <a:prstGeom prst="rect">
             <a:avLst/>
@@ -3507,7 +5820,7 @@
                   <a:srgbClr val="3D4757"/>
                 </a:solidFill>
               </a:rPr>
-              <a:t>相当于同期小程序开抢订单的一半左右</a:t>
+              <a:t>约为同期小程序开抢订单的一半</a:t>
             </a:r>
             <a:endParaRPr lang="en-US" sz="1200" dirty="0"/>
           </a:p>
@@ -3515,13 +5828,13 @@
       </p:sp>
       <p:sp>
         <p:nvSpPr>
-          <p:cNvPr id="30" name="th-b-bar0"/>
+          <p:cNvPr id="20" name="th-b-bar0"/>
           <p:cNvSpPr/>
           <p:nvPr/>
         </p:nvSpPr>
         <p:spPr>
           <a:xfrm>
-            <a:off x="4608576" y="4297680"/>
+            <a:off x="5843016" y="4389120"/>
             <a:ext cx="54864" cy="658368"/>
           </a:xfrm>
           <a:prstGeom prst="rect">
@@ -3540,14 +5853,14 @@
       </p:sp>
       <p:sp>
         <p:nvSpPr>
-          <p:cNvPr id="31" name="th-b-p0"/>
+          <p:cNvPr id="21" name="th-b-p0"/>
           <p:cNvSpPr txBox="1"/>
           <p:nvPr/>
         </p:nvSpPr>
         <p:spPr>
           <a:xfrm>
-            <a:off x="4791456" y="4297680"/>
-            <a:ext cx="2788920" cy="658368"/>
+            <a:off x="6025896" y="4389120"/>
+            <a:ext cx="2331720" cy="658368"/>
           </a:xfrm>
           <a:prstGeom prst="rect">
             <a:avLst/>
@@ -3590,13 +5903,13 @@
       </p:sp>
       <p:sp>
         <p:nvSpPr>
-          <p:cNvPr id="32" name="th-b-bar1"/>
+          <p:cNvPr id="22" name="th-b-bar1"/>
           <p:cNvSpPr/>
           <p:nvPr/>
         </p:nvSpPr>
         <p:spPr>
           <a:xfrm>
-            <a:off x="4608576" y="5138928"/>
+            <a:off x="5843016" y="5230368"/>
             <a:ext cx="54864" cy="658368"/>
           </a:xfrm>
           <a:prstGeom prst="rect">
@@ -3615,14 +5928,14 @@
       </p:sp>
       <p:sp>
         <p:nvSpPr>
-          <p:cNvPr id="33" name="th-b-p1"/>
+          <p:cNvPr id="23" name="th-b-p1"/>
           <p:cNvSpPr txBox="1"/>
           <p:nvPr/>
         </p:nvSpPr>
         <p:spPr>
           <a:xfrm>
-            <a:off x="4791456" y="5138928"/>
-            <a:ext cx="2788920" cy="658368"/>
+            <a:off x="6025896" y="5230368"/>
+            <a:ext cx="2331720" cy="658368"/>
           </a:xfrm>
           <a:prstGeom prst="rect">
             <a:avLst/>
@@ -3665,13 +5978,13 @@
       </p:sp>
       <p:sp>
         <p:nvSpPr>
-          <p:cNvPr id="34" name="th-c-chip"/>
+          <p:cNvPr id="24" name="th-c-chip"/>
           <p:cNvSpPr/>
           <p:nvPr/>
         </p:nvSpPr>
         <p:spPr>
           <a:xfrm>
-            <a:off x="8531352" y="1828800"/>
+            <a:off x="9034272" y="1828800"/>
             <a:ext cx="713232" cy="329184"/>
           </a:xfrm>
           <a:prstGeom prst="roundRect">
@@ -3692,13 +6005,13 @@
       </p:sp>
       <p:sp>
         <p:nvSpPr>
-          <p:cNvPr id="35" name="th-c-chip-t"/>
+          <p:cNvPr id="25" name="th-c-chip-t"/>
           <p:cNvSpPr txBox="1"/>
           <p:nvPr/>
         </p:nvSpPr>
         <p:spPr>
           <a:xfrm>
-            <a:off x="8531352" y="1828800"/>
+            <a:off x="9034272" y="1828800"/>
             <a:ext cx="713232" cy="329184"/>
           </a:xfrm>
           <a:prstGeom prst="rect">
@@ -3728,14 +6041,14 @@
       </p:sp>
       <p:sp>
         <p:nvSpPr>
-          <p:cNvPr id="36" name="th-c-h"/>
+          <p:cNvPr id="26" name="th-c-h"/>
           <p:cNvSpPr txBox="1"/>
           <p:nvPr/>
         </p:nvSpPr>
         <p:spPr>
           <a:xfrm>
-            <a:off x="8531352" y="2286000"/>
-            <a:ext cx="2971800" cy="320040"/>
+            <a:off x="9034272" y="2286000"/>
+            <a:ext cx="2514600" cy="320040"/>
           </a:xfrm>
           <a:prstGeom prst="rect">
             <a:avLst/>
@@ -3764,13 +6077,13 @@
       </p:sp>
       <p:sp>
         <p:nvSpPr>
-          <p:cNvPr id="37" name="th-c-n0"/>
+          <p:cNvPr id="27" name="th-c-n0"/>
           <p:cNvSpPr/>
           <p:nvPr/>
         </p:nvSpPr>
         <p:spPr>
           <a:xfrm>
-            <a:off x="8531352" y="2834640"/>
+            <a:off x="9034272" y="2834640"/>
             <a:ext cx="384048" cy="384048"/>
           </a:xfrm>
           <a:prstGeom prst="ellipse">
@@ -3789,13 +6102,13 @@
       </p:sp>
       <p:sp>
         <p:nvSpPr>
-          <p:cNvPr id="38" name="th-c-n0-t"/>
+          <p:cNvPr id="28" name="th-c-n0-t"/>
           <p:cNvSpPr txBox="1"/>
           <p:nvPr/>
         </p:nvSpPr>
         <p:spPr>
           <a:xfrm>
-            <a:off x="8531352" y="2834640"/>
+            <a:off x="9034272" y="2834640"/>
             <a:ext cx="384048" cy="384048"/>
           </a:xfrm>
           <a:prstGeom prst="rect">
@@ -3825,14 +6138,14 @@
       </p:sp>
       <p:sp>
         <p:nvSpPr>
-          <p:cNvPr id="39" name="th-c-p0"/>
+          <p:cNvPr id="29" name="th-c-p0"/>
           <p:cNvSpPr txBox="1"/>
           <p:nvPr/>
         </p:nvSpPr>
         <p:spPr>
           <a:xfrm>
-            <a:off x="9061704" y="2788920"/>
-            <a:ext cx="2441448" cy="1005840"/>
+            <a:off x="9537192" y="2788920"/>
+            <a:ext cx="2011680" cy="960120"/>
           </a:xfrm>
           <a:prstGeom prst="rect">
             <a:avLst/>
@@ -3875,13 +6188,13 @@
       </p:sp>
       <p:sp>
         <p:nvSpPr>
-          <p:cNvPr id="40" name="th-c-n1"/>
+          <p:cNvPr id="30" name="th-c-n1"/>
           <p:cNvSpPr/>
           <p:nvPr/>
         </p:nvSpPr>
         <p:spPr>
           <a:xfrm>
-            <a:off x="8531352" y="3977640"/>
+            <a:off x="9034272" y="3840480"/>
             <a:ext cx="384048" cy="384048"/>
           </a:xfrm>
           <a:prstGeom prst="ellipse">
@@ -3900,13 +6213,13 @@
       </p:sp>
       <p:sp>
         <p:nvSpPr>
-          <p:cNvPr id="41" name="th-c-n1-t"/>
+          <p:cNvPr id="31" name="th-c-n1-t"/>
           <p:cNvSpPr txBox="1"/>
           <p:nvPr/>
         </p:nvSpPr>
         <p:spPr>
           <a:xfrm>
-            <a:off x="8531352" y="3977640"/>
+            <a:off x="9034272" y="3840480"/>
             <a:ext cx="384048" cy="384048"/>
           </a:xfrm>
           <a:prstGeom prst="rect">
@@ -3936,14 +6249,14 @@
       </p:sp>
       <p:sp>
         <p:nvSpPr>
-          <p:cNvPr id="42" name="th-c-p1"/>
+          <p:cNvPr id="32" name="th-c-p1"/>
           <p:cNvSpPr txBox="1"/>
           <p:nvPr/>
         </p:nvSpPr>
         <p:spPr>
           <a:xfrm>
-            <a:off x="9061704" y="3931920"/>
-            <a:ext cx="2441448" cy="1005840"/>
+            <a:off x="9537192" y="3794760"/>
+            <a:ext cx="2011680" cy="960120"/>
           </a:xfrm>
           <a:prstGeom prst="rect">
             <a:avLst/>
@@ -3986,14 +6299,14 @@
       </p:sp>
       <p:sp>
         <p:nvSpPr>
-          <p:cNvPr id="43" name="th-c-goal"/>
+          <p:cNvPr id="33" name="th-c-goal"/>
           <p:cNvSpPr/>
           <p:nvPr/>
         </p:nvSpPr>
         <p:spPr>
           <a:xfrm>
-            <a:off x="8531352" y="5212080"/>
-            <a:ext cx="2971800" cy="658368"/>
+            <a:off x="9034272" y="5212080"/>
+            <a:ext cx="2514600" cy="658368"/>
           </a:xfrm>
           <a:prstGeom prst="roundRect">
             <a:avLst>
@@ -4013,14 +6326,14 @@
       </p:sp>
       <p:sp>
         <p:nvSpPr>
-          <p:cNvPr id="44" name="th-c-goal-t"/>
+          <p:cNvPr id="34" name="th-c-goal-t"/>
           <p:cNvSpPr txBox="1"/>
           <p:nvPr/>
         </p:nvSpPr>
         <p:spPr>
           <a:xfrm>
-            <a:off x="8668512" y="5212080"/>
-            <a:ext cx="2697480" cy="658368"/>
+            <a:off x="9144000" y="5212080"/>
+            <a:ext cx="2331720" cy="658368"/>
           </a:xfrm>
           <a:prstGeom prst="rect">
             <a:avLst/>
@@ -4039,14 +6352,14 @@
               <a:buNone/>
             </a:pPr>
             <a:r>
-              <a:rPr lang="en-US" sz="1250" b="1" dirty="0">
+              <a:rPr lang="en-US" sz="1150" b="1" dirty="0">
                 <a:solidFill>
                   <a:srgbClr val="FF7A1A"/>
                 </a:solidFill>
               </a:rPr>
               <a:t>目标</a:t>
             </a:r>
-            <a:endParaRPr lang="en-US" sz="1250" dirty="0"/>
+            <a:endParaRPr lang="en-US" sz="1150" dirty="0"/>
           </a:p>
           <a:p>
             <a:pPr indent="0" marL="0">
@@ -4056,14 +6369,14 @@
               <a:buNone/>
             </a:pPr>
             <a:r>
-              <a:rPr lang="en-US" sz="1250" b="1" dirty="0">
+              <a:rPr lang="en-US" sz="1150" b="1" dirty="0">
                 <a:solidFill>
                   <a:srgbClr val="15315E"/>
                 </a:solidFill>
               </a:rPr>
               <a:t>小程序成功率逐步回到风控前水平</a:t>
             </a:r>
-            <a:endParaRPr lang="en-US" sz="1250" dirty="0"/>
+            <a:endParaRPr lang="en-US" sz="1150" dirty="0"/>
           </a:p>
         </p:txBody>
       </p:sp>

--- a/体验与规划.pptx
+++ b/体验与规划.pptx
@@ -109,12 +109,12 @@
   <p:extLst>
     <p:ext uri="{521415D9-36F7-43E2-AB2F-B90AF26B5E84}">
       <p14:sectionLst xmlns:p14="http://schemas.microsoft.com/office/powerpoint/2010/main">
-        <p14:section name="体验专项" id="{df6a49d4-1657-6825-12fc-6dc8e49087c8}">
+        <p14:section name="体验专项" id="{b014b82a-ce75-b0b5-d4f5-56549811e8f0}">
           <p14:sldIdLst>
             <p14:sldId id="256"/>
           </p14:sldIdLst>
         </p14:section>
-        <p14:section name="思考与规划" id="{e64e7376-967b-6323-5cd8-f2cc9d4159b4}">
+        <p14:section name="思考与规划" id="{c343c46d-d3ec-b6a3-8ccd-8b5ed8c236ca}">
           <p14:sldIdLst>
             <p14:sldId id="257"/>
             <p14:sldId id="258"/>
@@ -2935,7 +2935,7 @@
           </p:nvPr>
         </p:nvGraphicFramePr>
         <p:xfrm>
-          <a:off x="640080" y="2743200"/>
+          <a:off x="640080" y="2697480"/>
           <a:ext cx="4526280" cy="914400"/>
         </p:xfrm>
         <a:graphic>
@@ -2943,76 +2943,14 @@
             <a:tbl>
               <a:tblPr/>
               <a:tblGrid>
-                <a:gridCol w="548640"/>
-                <a:gridCol w="1463040"/>
-                <a:gridCol w="502920"/>
-                <a:gridCol w="502920"/>
-                <a:gridCol w="502920"/>
-                <a:gridCol w="502920"/>
-                <a:gridCol w="502920"/>
+                <a:gridCol w="731520"/>
+                <a:gridCol w="1051560"/>
+                <a:gridCol w="777240"/>
+                <a:gridCol w="685800"/>
+                <a:gridCol w="640080"/>
+                <a:gridCol w="640080"/>
               </a:tblGrid>
               <a:tr h="457200">
-                <a:tc>
-                  <a:txBody>
-                    <a:bodyPr/>
-                    <a:lstStyle/>
-                    <a:p>
-                      <a:pPr algn="ctr" indent="0" marL="0">
-                        <a:buNone/>
-                      </a:pPr>
-                      <a:r>
-                        <a:rPr lang="en-US" sz="950" b="1" dirty="0">
-                          <a:solidFill>
-                            <a:srgbClr val="FFFFFF"/>
-                          </a:solidFill>
-                        </a:rPr>
-                        <a:t>端</a:t>
-                      </a:r>
-                      <a:endParaRPr lang="en-US" sz="950" dirty="0"/>
-                    </a:p>
-                  </a:txBody>
-                  <a:tcPr marL="27432" marR="27432" marT="27432" marB="27432" anchor="ctr">
-                    <a:lnL w="9525" cap="flat" cmpd="sng" algn="ctr">
-                      <a:solidFill>
-                        <a:srgbClr val="D9DEE7"/>
-                      </a:solidFill>
-                      <a:prstDash val="solid"/>
-                      <a:round/>
-                      <a:headEnd type="none" w="med" len="med"/>
-                      <a:tailEnd type="none" w="med" len="med"/>
-                    </a:lnL>
-                    <a:lnR w="9525" cap="flat" cmpd="sng" algn="ctr">
-                      <a:solidFill>
-                        <a:srgbClr val="D9DEE7"/>
-                      </a:solidFill>
-                      <a:prstDash val="solid"/>
-                      <a:round/>
-                      <a:headEnd type="none" w="med" len="med"/>
-                      <a:tailEnd type="none" w="med" len="med"/>
-                    </a:lnR>
-                    <a:lnT w="9525" cap="flat" cmpd="sng" algn="ctr">
-                      <a:solidFill>
-                        <a:srgbClr val="D9DEE7"/>
-                      </a:solidFill>
-                      <a:prstDash val="solid"/>
-                      <a:round/>
-                      <a:headEnd type="none" w="med" len="med"/>
-                      <a:tailEnd type="none" w="med" len="med"/>
-                    </a:lnT>
-                    <a:lnB w="9525" cap="flat" cmpd="sng" algn="ctr">
-                      <a:solidFill>
-                        <a:srgbClr val="D9DEE7"/>
-                      </a:solidFill>
-                      <a:prstDash val="solid"/>
-                      <a:round/>
-                      <a:headEnd type="none" w="med" len="med"/>
-                      <a:tailEnd type="none" w="med" len="med"/>
-                    </a:lnB>
-                    <a:solidFill>
-                      <a:srgbClr val="15315E"/>
-                    </a:solidFill>
-                  </a:tcPr>
-                </a:tc>
                 <a:tc>
                   <a:txBody>
                     <a:bodyPr/>
@@ -3088,7 +3026,7 @@
                             <a:srgbClr val="FFFFFF"/>
                           </a:solidFill>
                         </a:rPr>
-                        <a:t>候补</a:t>
+                        <a:t>支付渠道</a:t>
                       </a:r>
                       <a:endParaRPr lang="en-US" sz="950" dirty="0"/>
                     </a:p>
@@ -3149,7 +3087,7 @@
                             <a:srgbClr val="FFFFFF"/>
                           </a:solidFill>
                         </a:rPr>
-                        <a:t>秒杀/</a:t>
+                        <a:t>下单/开售</a:t>
                       </a:r>
                       <a:endParaRPr lang="en-US" sz="950" dirty="0"/>
                     </a:p>
@@ -3163,7 +3101,157 @@
                             <a:srgbClr val="FFFFFF"/>
                           </a:solidFill>
                         </a:rPr>
+                        <a:t>时候补</a:t>
+                      </a:r>
+                      <a:endParaRPr lang="en-US" sz="950" dirty="0"/>
+                    </a:p>
+                  </a:txBody>
+                  <a:tcPr marL="27432" marR="27432" marT="27432" marB="27432" anchor="ctr">
+                    <a:lnL w="9525" cap="flat" cmpd="sng" algn="ctr">
+                      <a:solidFill>
+                        <a:srgbClr val="D9DEE7"/>
+                      </a:solidFill>
+                      <a:prstDash val="solid"/>
+                      <a:round/>
+                      <a:headEnd type="none" w="med" len="med"/>
+                      <a:tailEnd type="none" w="med" len="med"/>
+                    </a:lnL>
+                    <a:lnR w="9525" cap="flat" cmpd="sng" algn="ctr">
+                      <a:solidFill>
+                        <a:srgbClr val="D9DEE7"/>
+                      </a:solidFill>
+                      <a:prstDash val="solid"/>
+                      <a:round/>
+                      <a:headEnd type="none" w="med" len="med"/>
+                      <a:tailEnd type="none" w="med" len="med"/>
+                    </a:lnR>
+                    <a:lnT w="9525" cap="flat" cmpd="sng" algn="ctr">
+                      <a:solidFill>
+                        <a:srgbClr val="D9DEE7"/>
+                      </a:solidFill>
+                      <a:prstDash val="solid"/>
+                      <a:round/>
+                      <a:headEnd type="none" w="med" len="med"/>
+                      <a:tailEnd type="none" w="med" len="med"/>
+                    </a:lnT>
+                    <a:lnB w="9525" cap="flat" cmpd="sng" algn="ctr">
+                      <a:solidFill>
+                        <a:srgbClr val="D9DEE7"/>
+                      </a:solidFill>
+                      <a:prstDash val="solid"/>
+                      <a:round/>
+                      <a:headEnd type="none" w="med" len="med"/>
+                      <a:tailEnd type="none" w="med" len="med"/>
+                    </a:lnB>
+                    <a:solidFill>
+                      <a:srgbClr val="15315E"/>
+                    </a:solidFill>
+                  </a:tcPr>
+                </a:tc>
+                <a:tc>
+                  <a:txBody>
+                    <a:bodyPr/>
+                    <a:lstStyle/>
+                    <a:p>
+                      <a:pPr algn="ctr" indent="0" marL="0">
+                        <a:buNone/>
+                      </a:pPr>
+                      <a:r>
+                        <a:rPr lang="en-US" sz="950" b="1" dirty="0">
+                          <a:solidFill>
+                            <a:srgbClr val="FFFFFF"/>
+                          </a:solidFill>
+                        </a:rPr>
+                        <a:t>抢票中</a:t>
+                      </a:r>
+                      <a:endParaRPr lang="en-US" sz="950" dirty="0"/>
+                    </a:p>
+                    <a:p>
+                      <a:pPr algn="ctr" indent="0" marL="0">
+                        <a:buNone/>
+                      </a:pPr>
+                      <a:r>
+                        <a:rPr lang="en-US" sz="950" b="1" dirty="0">
+                          <a:solidFill>
+                            <a:srgbClr val="FFFFFF"/>
+                          </a:solidFill>
+                        </a:rPr>
+                        <a:t>候补</a:t>
+                      </a:r>
+                      <a:endParaRPr lang="en-US" sz="950" dirty="0"/>
+                    </a:p>
+                  </a:txBody>
+                  <a:tcPr marL="27432" marR="27432" marT="27432" marB="27432" anchor="ctr">
+                    <a:lnL w="9525" cap="flat" cmpd="sng" algn="ctr">
+                      <a:solidFill>
+                        <a:srgbClr val="D9DEE7"/>
+                      </a:solidFill>
+                      <a:prstDash val="solid"/>
+                      <a:round/>
+                      <a:headEnd type="none" w="med" len="med"/>
+                      <a:tailEnd type="none" w="med" len="med"/>
+                    </a:lnL>
+                    <a:lnR w="9525" cap="flat" cmpd="sng" algn="ctr">
+                      <a:solidFill>
+                        <a:srgbClr val="D9DEE7"/>
+                      </a:solidFill>
+                      <a:prstDash val="solid"/>
+                      <a:round/>
+                      <a:headEnd type="none" w="med" len="med"/>
+                      <a:tailEnd type="none" w="med" len="med"/>
+                    </a:lnR>
+                    <a:lnT w="9525" cap="flat" cmpd="sng" algn="ctr">
+                      <a:solidFill>
+                        <a:srgbClr val="D9DEE7"/>
+                      </a:solidFill>
+                      <a:prstDash val="solid"/>
+                      <a:round/>
+                      <a:headEnd type="none" w="med" len="med"/>
+                      <a:tailEnd type="none" w="med" len="med"/>
+                    </a:lnT>
+                    <a:lnB w="9525" cap="flat" cmpd="sng" algn="ctr">
+                      <a:solidFill>
+                        <a:srgbClr val="D9DEE7"/>
+                      </a:solidFill>
+                      <a:prstDash val="solid"/>
+                      <a:round/>
+                      <a:headEnd type="none" w="med" len="med"/>
+                      <a:tailEnd type="none" w="med" len="med"/>
+                    </a:lnB>
+                    <a:solidFill>
+                      <a:srgbClr val="15315E"/>
+                    </a:solidFill>
+                  </a:tcPr>
+                </a:tc>
+                <a:tc>
+                  <a:txBody>
+                    <a:bodyPr/>
+                    <a:lstStyle/>
+                    <a:p>
+                      <a:pPr algn="ctr" indent="0" marL="0">
+                        <a:buNone/>
+                      </a:pPr>
+                      <a:r>
+                        <a:rPr lang="en-US" sz="950" b="1" dirty="0">
+                          <a:solidFill>
+                            <a:srgbClr val="FFFFFF"/>
+                          </a:solidFill>
+                        </a:rPr>
                         <a:t>捡漏</a:t>
+                      </a:r>
+                      <a:endParaRPr lang="en-US" sz="950" dirty="0"/>
+                    </a:p>
+                    <a:p>
+                      <a:pPr algn="ctr" indent="0" marL="0">
+                        <a:buNone/>
+                      </a:pPr>
+                      <a:r>
+                        <a:rPr lang="en-US" sz="950" b="1" dirty="0">
+                          <a:solidFill>
+                            <a:srgbClr val="FFFFFF"/>
+                          </a:solidFill>
+                        </a:rPr>
+                        <a:t>出票</a:t>
                       </a:r>
                       <a:endParaRPr lang="en-US" sz="950" dirty="0"/>
                     </a:p>
@@ -3228,53 +3316,6 @@
                       </a:r>
                       <a:endParaRPr lang="en-US" sz="950" dirty="0"/>
                     </a:p>
-                  </a:txBody>
-                  <a:tcPr marL="27432" marR="27432" marT="27432" marB="27432" anchor="ctr">
-                    <a:lnL w="9525" cap="flat" cmpd="sng" algn="ctr">
-                      <a:solidFill>
-                        <a:srgbClr val="D9DEE7"/>
-                      </a:solidFill>
-                      <a:prstDash val="solid"/>
-                      <a:round/>
-                      <a:headEnd type="none" w="med" len="med"/>
-                      <a:tailEnd type="none" w="med" len="med"/>
-                    </a:lnL>
-                    <a:lnR w="9525" cap="flat" cmpd="sng" algn="ctr">
-                      <a:solidFill>
-                        <a:srgbClr val="D9DEE7"/>
-                      </a:solidFill>
-                      <a:prstDash val="solid"/>
-                      <a:round/>
-                      <a:headEnd type="none" w="med" len="med"/>
-                      <a:tailEnd type="none" w="med" len="med"/>
-                    </a:lnR>
-                    <a:lnT w="9525" cap="flat" cmpd="sng" algn="ctr">
-                      <a:solidFill>
-                        <a:srgbClr val="D9DEE7"/>
-                      </a:solidFill>
-                      <a:prstDash val="solid"/>
-                      <a:round/>
-                      <a:headEnd type="none" w="med" len="med"/>
-                      <a:tailEnd type="none" w="med" len="med"/>
-                    </a:lnT>
-                    <a:lnB w="9525" cap="flat" cmpd="sng" algn="ctr">
-                      <a:solidFill>
-                        <a:srgbClr val="D9DEE7"/>
-                      </a:solidFill>
-                      <a:prstDash val="solid"/>
-                      <a:round/>
-                      <a:headEnd type="none" w="med" len="med"/>
-                      <a:tailEnd type="none" w="med" len="med"/>
-                    </a:lnB>
-                    <a:solidFill>
-                      <a:srgbClr val="15315E"/>
-                    </a:solidFill>
-                  </a:tcPr>
-                </a:tc>
-                <a:tc>
-                  <a:txBody>
-                    <a:bodyPr/>
-                    <a:lstStyle/>
                     <a:p>
                       <a:pPr algn="ctr" indent="0" marL="0">
                         <a:buNone/>
@@ -3285,96 +3326,7 @@
                             <a:srgbClr val="FFFFFF"/>
                           </a:solidFill>
                         </a:rPr>
-                        <a:t>行程</a:t>
-                      </a:r>
-                      <a:endParaRPr lang="en-US" sz="950" dirty="0"/>
-                    </a:p>
-                    <a:p>
-                      <a:pPr algn="ctr" indent="0" marL="0">
-                        <a:buNone/>
-                      </a:pPr>
-                      <a:r>
-                        <a:rPr lang="en-US" sz="950" b="1" dirty="0">
-                          <a:solidFill>
-                            <a:srgbClr val="FFFFFF"/>
-                          </a:solidFill>
-                        </a:rPr>
-                        <a:t>冲突</a:t>
-                      </a:r>
-                      <a:endParaRPr lang="en-US" sz="950" dirty="0"/>
-                    </a:p>
-                  </a:txBody>
-                  <a:tcPr marL="27432" marR="27432" marT="27432" marB="27432" anchor="ctr">
-                    <a:lnL w="9525" cap="flat" cmpd="sng" algn="ctr">
-                      <a:solidFill>
-                        <a:srgbClr val="D9DEE7"/>
-                      </a:solidFill>
-                      <a:prstDash val="solid"/>
-                      <a:round/>
-                      <a:headEnd type="none" w="med" len="med"/>
-                      <a:tailEnd type="none" w="med" len="med"/>
-                    </a:lnL>
-                    <a:lnR w="9525" cap="flat" cmpd="sng" algn="ctr">
-                      <a:solidFill>
-                        <a:srgbClr val="D9DEE7"/>
-                      </a:solidFill>
-                      <a:prstDash val="solid"/>
-                      <a:round/>
-                      <a:headEnd type="none" w="med" len="med"/>
-                      <a:tailEnd type="none" w="med" len="med"/>
-                    </a:lnR>
-                    <a:lnT w="9525" cap="flat" cmpd="sng" algn="ctr">
-                      <a:solidFill>
-                        <a:srgbClr val="D9DEE7"/>
-                      </a:solidFill>
-                      <a:prstDash val="solid"/>
-                      <a:round/>
-                      <a:headEnd type="none" w="med" len="med"/>
-                      <a:tailEnd type="none" w="med" len="med"/>
-                    </a:lnT>
-                    <a:lnB w="9525" cap="flat" cmpd="sng" algn="ctr">
-                      <a:solidFill>
-                        <a:srgbClr val="D9DEE7"/>
-                      </a:solidFill>
-                      <a:prstDash val="solid"/>
-                      <a:round/>
-                      <a:headEnd type="none" w="med" len="med"/>
-                      <a:tailEnd type="none" w="med" len="med"/>
-                    </a:lnB>
-                    <a:solidFill>
-                      <a:srgbClr val="15315E"/>
-                    </a:solidFill>
-                  </a:tcPr>
-                </a:tc>
-                <a:tc>
-                  <a:txBody>
-                    <a:bodyPr/>
-                    <a:lstStyle/>
-                    <a:p>
-                      <a:pPr algn="ctr" indent="0" marL="0">
-                        <a:buNone/>
-                      </a:pPr>
-                      <a:r>
-                        <a:rPr lang="en-US" sz="950" b="1" dirty="0">
-                          <a:solidFill>
-                            <a:srgbClr val="FFFFFF"/>
-                          </a:solidFill>
-                        </a:rPr>
-                        <a:t>票款不</a:t>
-                      </a:r>
-                      <a:endParaRPr lang="en-US" sz="950" dirty="0"/>
-                    </a:p>
-                    <a:p>
-                      <a:pPr algn="ctr" indent="0" marL="0">
-                        <a:buNone/>
-                      </a:pPr>
-                      <a:r>
-                        <a:rPr lang="en-US" sz="950" b="1" dirty="0">
-                          <a:solidFill>
-                            <a:srgbClr val="FFFFFF"/>
-                          </a:solidFill>
-                        </a:rPr>
-                        <a:t>足补款</a:t>
+                        <a:t>出票</a:t>
                       </a:r>
                       <a:endParaRPr lang="en-US" sz="950" dirty="0"/>
                     </a:p>
@@ -3422,8 +3374,8 @@
                   </a:tcPr>
                 </a:tc>
               </a:tr>
-              <a:tr h="384048">
-                <a:tc rowSpan="3">
+              <a:tr h="329184">
+                <a:tc rowSpan="2">
                   <a:txBody>
                     <a:bodyPr/>
                     <a:lstStyle/>
@@ -3437,7 +3389,21 @@
                             <a:srgbClr val="15315E"/>
                           </a:solidFill>
                         </a:rPr>
-                        <a:t>APP</a:t>
+                        <a:t>信用付</a:t>
+                      </a:r>
+                      <a:endParaRPr lang="en-US" sz="1050" dirty="0"/>
+                    </a:p>
+                    <a:p>
+                      <a:pPr algn="ctr" indent="0" marL="0">
+                        <a:buNone/>
+                      </a:pPr>
+                      <a:r>
+                        <a:rPr lang="en-US" sz="1050" b="1" dirty="0">
+                          <a:solidFill>
+                            <a:srgbClr val="15315E"/>
+                          </a:solidFill>
+                        </a:rPr>
+                        <a:t>70%</a:t>
                       </a:r>
                       <a:endParaRPr lang="en-US" sz="1050" dirty="0"/>
                     </a:p>
@@ -3489,18 +3455,328 @@
                     <a:bodyPr/>
                     <a:lstStyle/>
                     <a:p>
-                      <a:pPr algn="l" indent="0" marL="0">
+                      <a:pPr algn="ctr" indent="0" marL="0">
                         <a:buNone/>
                       </a:pPr>
                       <a:r>
-                        <a:rPr lang="en-US" sz="1000" dirty="0">
+                        <a:rPr lang="en-US" sz="1050" b="1" dirty="0">
                           <a:solidFill>
-                            <a:srgbClr val="3D4757"/>
+                            <a:srgbClr val="15315E"/>
                           </a:solidFill>
                         </a:rPr>
-                        <a:t>支付宝信用付</a:t>
+                        <a:t>支付宝 80%</a:t>
                       </a:r>
-                      <a:endParaRPr lang="en-US" sz="1000" dirty="0"/>
+                      <a:endParaRPr lang="en-US" sz="1050" dirty="0"/>
+                    </a:p>
+                  </a:txBody>
+                  <a:tcPr marL="27432" marR="27432" marT="27432" marB="27432" anchor="ctr">
+                    <a:lnL w="9525" cap="flat" cmpd="sng" algn="ctr">
+                      <a:solidFill>
+                        <a:srgbClr val="D9DEE7"/>
+                      </a:solidFill>
+                      <a:prstDash val="solid"/>
+                      <a:round/>
+                      <a:headEnd type="none" w="med" len="med"/>
+                      <a:tailEnd type="none" w="med" len="med"/>
+                    </a:lnL>
+                    <a:lnR w="9525" cap="flat" cmpd="sng" algn="ctr">
+                      <a:solidFill>
+                        <a:srgbClr val="D9DEE7"/>
+                      </a:solidFill>
+                      <a:prstDash val="solid"/>
+                      <a:round/>
+                      <a:headEnd type="none" w="med" len="med"/>
+                      <a:tailEnd type="none" w="med" len="med"/>
+                    </a:lnR>
+                    <a:lnT w="9525" cap="flat" cmpd="sng" algn="ctr">
+                      <a:solidFill>
+                        <a:srgbClr val="D9DEE7"/>
+                      </a:solidFill>
+                      <a:prstDash val="solid"/>
+                      <a:round/>
+                      <a:headEnd type="none" w="med" len="med"/>
+                      <a:tailEnd type="none" w="med" len="med"/>
+                    </a:lnT>
+                    <a:lnB w="9525" cap="flat" cmpd="sng" algn="ctr">
+                      <a:solidFill>
+                        <a:srgbClr val="D9DEE7"/>
+                      </a:solidFill>
+                      <a:prstDash val="solid"/>
+                      <a:round/>
+                      <a:headEnd type="none" w="med" len="med"/>
+                      <a:tailEnd type="none" w="med" len="med"/>
+                    </a:lnB>
+                    <a:solidFill>
+                      <a:srgbClr val="FFFFFF"/>
+                    </a:solidFill>
+                  </a:tcPr>
+                </a:tc>
+                <a:tc>
+                  <a:txBody>
+                    <a:bodyPr/>
+                    <a:lstStyle/>
+                    <a:p>
+                      <a:pPr algn="ctr" indent="0" marL="0">
+                        <a:buNone/>
+                      </a:pPr>
+                      <a:r>
+                        <a:rPr lang="en-US" sz="1050" b="1" dirty="0">
+                          <a:solidFill>
+                            <a:srgbClr val="287DFA"/>
+                          </a:solidFill>
+                        </a:rPr>
+                        <a:t>代付</a:t>
+                      </a:r>
+                      <a:endParaRPr lang="en-US" sz="1050" dirty="0"/>
+                    </a:p>
+                  </a:txBody>
+                  <a:tcPr marL="27432" marR="27432" marT="27432" marB="27432" anchor="ctr">
+                    <a:lnL w="9525" cap="flat" cmpd="sng" algn="ctr">
+                      <a:solidFill>
+                        <a:srgbClr val="D9DEE7"/>
+                      </a:solidFill>
+                      <a:prstDash val="solid"/>
+                      <a:round/>
+                      <a:headEnd type="none" w="med" len="med"/>
+                      <a:tailEnd type="none" w="med" len="med"/>
+                    </a:lnL>
+                    <a:lnR w="9525" cap="flat" cmpd="sng" algn="ctr">
+                      <a:solidFill>
+                        <a:srgbClr val="D9DEE7"/>
+                      </a:solidFill>
+                      <a:prstDash val="solid"/>
+                      <a:round/>
+                      <a:headEnd type="none" w="med" len="med"/>
+                      <a:tailEnd type="none" w="med" len="med"/>
+                    </a:lnR>
+                    <a:lnT w="9525" cap="flat" cmpd="sng" algn="ctr">
+                      <a:solidFill>
+                        <a:srgbClr val="D9DEE7"/>
+                      </a:solidFill>
+                      <a:prstDash val="solid"/>
+                      <a:round/>
+                      <a:headEnd type="none" w="med" len="med"/>
+                      <a:tailEnd type="none" w="med" len="med"/>
+                    </a:lnT>
+                    <a:lnB w="9525" cap="flat" cmpd="sng" algn="ctr">
+                      <a:solidFill>
+                        <a:srgbClr val="D9DEE7"/>
+                      </a:solidFill>
+                      <a:prstDash val="solid"/>
+                      <a:round/>
+                      <a:headEnd type="none" w="med" len="med"/>
+                      <a:tailEnd type="none" w="med" len="med"/>
+                    </a:lnB>
+                    <a:solidFill>
+                      <a:srgbClr val="FFFFFF"/>
+                    </a:solidFill>
+                  </a:tcPr>
+                </a:tc>
+                <a:tc>
+                  <a:txBody>
+                    <a:bodyPr/>
+                    <a:lstStyle/>
+                    <a:p>
+                      <a:pPr algn="ctr" indent="0" marL="0">
+                        <a:buNone/>
+                      </a:pPr>
+                      <a:r>
+                        <a:rPr lang="en-US" sz="1050" b="1" dirty="0">
+                          <a:solidFill>
+                            <a:srgbClr val="287DFA"/>
+                          </a:solidFill>
+                        </a:rPr>
+                        <a:t>代付</a:t>
+                      </a:r>
+                      <a:endParaRPr lang="en-US" sz="1050" dirty="0"/>
+                    </a:p>
+                  </a:txBody>
+                  <a:tcPr marL="27432" marR="27432" marT="27432" marB="27432" anchor="ctr">
+                    <a:lnL w="9525" cap="flat" cmpd="sng" algn="ctr">
+                      <a:solidFill>
+                        <a:srgbClr val="D9DEE7"/>
+                      </a:solidFill>
+                      <a:prstDash val="solid"/>
+                      <a:round/>
+                      <a:headEnd type="none" w="med" len="med"/>
+                      <a:tailEnd type="none" w="med" len="med"/>
+                    </a:lnL>
+                    <a:lnR w="9525" cap="flat" cmpd="sng" algn="ctr">
+                      <a:solidFill>
+                        <a:srgbClr val="D9DEE7"/>
+                      </a:solidFill>
+                      <a:prstDash val="solid"/>
+                      <a:round/>
+                      <a:headEnd type="none" w="med" len="med"/>
+                      <a:tailEnd type="none" w="med" len="med"/>
+                    </a:lnR>
+                    <a:lnT w="9525" cap="flat" cmpd="sng" algn="ctr">
+                      <a:solidFill>
+                        <a:srgbClr val="D9DEE7"/>
+                      </a:solidFill>
+                      <a:prstDash val="solid"/>
+                      <a:round/>
+                      <a:headEnd type="none" w="med" len="med"/>
+                      <a:tailEnd type="none" w="med" len="med"/>
+                    </a:lnT>
+                    <a:lnB w="9525" cap="flat" cmpd="sng" algn="ctr">
+                      <a:solidFill>
+                        <a:srgbClr val="D9DEE7"/>
+                      </a:solidFill>
+                      <a:prstDash val="solid"/>
+                      <a:round/>
+                      <a:headEnd type="none" w="med" len="med"/>
+                      <a:tailEnd type="none" w="med" len="med"/>
+                    </a:lnB>
+                    <a:solidFill>
+                      <a:srgbClr val="FFFFFF"/>
+                    </a:solidFill>
+                  </a:tcPr>
+                </a:tc>
+                <a:tc>
+                  <a:txBody>
+                    <a:bodyPr/>
+                    <a:lstStyle/>
+                    <a:p>
+                      <a:pPr algn="ctr" indent="0" marL="0">
+                        <a:buNone/>
+                      </a:pPr>
+                      <a:r>
+                        <a:rPr lang="en-US" sz="1050" b="1" dirty="0">
+                          <a:solidFill>
+                            <a:srgbClr val="287DFA"/>
+                          </a:solidFill>
+                        </a:rPr>
+                        <a:t>代付</a:t>
+                      </a:r>
+                      <a:endParaRPr lang="en-US" sz="1050" dirty="0"/>
+                    </a:p>
+                  </a:txBody>
+                  <a:tcPr marL="27432" marR="27432" marT="27432" marB="27432" anchor="ctr">
+                    <a:lnL w="9525" cap="flat" cmpd="sng" algn="ctr">
+                      <a:solidFill>
+                        <a:srgbClr val="D9DEE7"/>
+                      </a:solidFill>
+                      <a:prstDash val="solid"/>
+                      <a:round/>
+                      <a:headEnd type="none" w="med" len="med"/>
+                      <a:tailEnd type="none" w="med" len="med"/>
+                    </a:lnL>
+                    <a:lnR w="9525" cap="flat" cmpd="sng" algn="ctr">
+                      <a:solidFill>
+                        <a:srgbClr val="D9DEE7"/>
+                      </a:solidFill>
+                      <a:prstDash val="solid"/>
+                      <a:round/>
+                      <a:headEnd type="none" w="med" len="med"/>
+                      <a:tailEnd type="none" w="med" len="med"/>
+                    </a:lnR>
+                    <a:lnT w="9525" cap="flat" cmpd="sng" algn="ctr">
+                      <a:solidFill>
+                        <a:srgbClr val="D9DEE7"/>
+                      </a:solidFill>
+                      <a:prstDash val="solid"/>
+                      <a:round/>
+                      <a:headEnd type="none" w="med" len="med"/>
+                      <a:tailEnd type="none" w="med" len="med"/>
+                    </a:lnT>
+                    <a:lnB w="9525" cap="flat" cmpd="sng" algn="ctr">
+                      <a:solidFill>
+                        <a:srgbClr val="D9DEE7"/>
+                      </a:solidFill>
+                      <a:prstDash val="solid"/>
+                      <a:round/>
+                      <a:headEnd type="none" w="med" len="med"/>
+                      <a:tailEnd type="none" w="med" len="med"/>
+                    </a:lnB>
+                    <a:solidFill>
+                      <a:srgbClr val="FFFFFF"/>
+                    </a:solidFill>
+                  </a:tcPr>
+                </a:tc>
+                <a:tc>
+                  <a:txBody>
+                    <a:bodyPr/>
+                    <a:lstStyle/>
+                    <a:p>
+                      <a:pPr algn="ctr" indent="0" marL="0">
+                        <a:buNone/>
+                      </a:pPr>
+                      <a:r>
+                        <a:rPr lang="en-US" sz="1050" b="1" dirty="0">
+                          <a:solidFill>
+                            <a:srgbClr val="287DFA"/>
+                          </a:solidFill>
+                        </a:rPr>
+                        <a:t>代付</a:t>
+                      </a:r>
+                      <a:endParaRPr lang="en-US" sz="1050" dirty="0"/>
+                    </a:p>
+                  </a:txBody>
+                  <a:tcPr marL="27432" marR="27432" marT="27432" marB="27432" anchor="ctr">
+                    <a:lnL w="9525" cap="flat" cmpd="sng" algn="ctr">
+                      <a:solidFill>
+                        <a:srgbClr val="D9DEE7"/>
+                      </a:solidFill>
+                      <a:prstDash val="solid"/>
+                      <a:round/>
+                      <a:headEnd type="none" w="med" len="med"/>
+                      <a:tailEnd type="none" w="med" len="med"/>
+                    </a:lnL>
+                    <a:lnR w="9525" cap="flat" cmpd="sng" algn="ctr">
+                      <a:solidFill>
+                        <a:srgbClr val="D9DEE7"/>
+                      </a:solidFill>
+                      <a:prstDash val="solid"/>
+                      <a:round/>
+                      <a:headEnd type="none" w="med" len="med"/>
+                      <a:tailEnd type="none" w="med" len="med"/>
+                    </a:lnR>
+                    <a:lnT w="9525" cap="flat" cmpd="sng" algn="ctr">
+                      <a:solidFill>
+                        <a:srgbClr val="D9DEE7"/>
+                      </a:solidFill>
+                      <a:prstDash val="solid"/>
+                      <a:round/>
+                      <a:headEnd type="none" w="med" len="med"/>
+                      <a:tailEnd type="none" w="med" len="med"/>
+                    </a:lnT>
+                    <a:lnB w="9525" cap="flat" cmpd="sng" algn="ctr">
+                      <a:solidFill>
+                        <a:srgbClr val="D9DEE7"/>
+                      </a:solidFill>
+                      <a:prstDash val="solid"/>
+                      <a:round/>
+                      <a:headEnd type="none" w="med" len="med"/>
+                      <a:tailEnd type="none" w="med" len="med"/>
+                    </a:lnB>
+                    <a:solidFill>
+                      <a:srgbClr val="FFFFFF"/>
+                    </a:solidFill>
+                  </a:tcPr>
+                </a:tc>
+              </a:tr>
+              <a:tr h="329184">
+                <a:tc vMerge="1">
+                  <a:tcPr/>
+                </a:tc>
+                <a:tc>
+                  <a:txBody>
+                    <a:bodyPr/>
+                    <a:lstStyle/>
+                    <a:p>
+                      <a:pPr algn="ctr" indent="0" marL="0">
+                        <a:buNone/>
+                      </a:pPr>
+                      <a:r>
+                        <a:rPr lang="en-US" sz="1050" b="1" dirty="0">
+                          <a:solidFill>
+                            <a:srgbClr val="FF7A1A"/>
+                          </a:solidFill>
+                        </a:rPr>
+                        <a:t>其他 20%</a:t>
+                      </a:r>
+                      <a:endParaRPr lang="en-US" sz="1050" dirty="0"/>
                     </a:p>
                   </a:txBody>
                   <a:tcPr marL="27432" marR="27432" marT="27432" marB="27432" anchor="ctr">
@@ -3617,10 +3893,270 @@
                       <a:r>
                         <a:rPr lang="en-US" sz="1050" b="1" dirty="0">
                           <a:solidFill>
-                            <a:srgbClr val="287DFA"/>
+                            <a:srgbClr val="FF7A1A"/>
                           </a:solidFill>
                         </a:rPr>
-                        <a:t>代付</a:t>
+                        <a:t>直付</a:t>
+                      </a:r>
+                      <a:endParaRPr lang="en-US" sz="1050" dirty="0"/>
+                    </a:p>
+                  </a:txBody>
+                  <a:tcPr marL="27432" marR="27432" marT="27432" marB="27432" anchor="ctr">
+                    <a:lnL w="9525" cap="flat" cmpd="sng" algn="ctr">
+                      <a:solidFill>
+                        <a:srgbClr val="D9DEE7"/>
+                      </a:solidFill>
+                      <a:prstDash val="solid"/>
+                      <a:round/>
+                      <a:headEnd type="none" w="med" len="med"/>
+                      <a:tailEnd type="none" w="med" len="med"/>
+                    </a:lnL>
+                    <a:lnR w="9525" cap="flat" cmpd="sng" algn="ctr">
+                      <a:solidFill>
+                        <a:srgbClr val="D9DEE7"/>
+                      </a:solidFill>
+                      <a:prstDash val="solid"/>
+                      <a:round/>
+                      <a:headEnd type="none" w="med" len="med"/>
+                      <a:tailEnd type="none" w="med" len="med"/>
+                    </a:lnR>
+                    <a:lnT w="9525" cap="flat" cmpd="sng" algn="ctr">
+                      <a:solidFill>
+                        <a:srgbClr val="D9DEE7"/>
+                      </a:solidFill>
+                      <a:prstDash val="solid"/>
+                      <a:round/>
+                      <a:headEnd type="none" w="med" len="med"/>
+                      <a:tailEnd type="none" w="med" len="med"/>
+                    </a:lnT>
+                    <a:lnB w="9525" cap="flat" cmpd="sng" algn="ctr">
+                      <a:solidFill>
+                        <a:srgbClr val="D9DEE7"/>
+                      </a:solidFill>
+                      <a:prstDash val="solid"/>
+                      <a:round/>
+                      <a:headEnd type="none" w="med" len="med"/>
+                      <a:tailEnd type="none" w="med" len="med"/>
+                    </a:lnB>
+                    <a:solidFill>
+                      <a:srgbClr val="FFF1E6"/>
+                    </a:solidFill>
+                  </a:tcPr>
+                </a:tc>
+                <a:tc>
+                  <a:txBody>
+                    <a:bodyPr/>
+                    <a:lstStyle/>
+                    <a:p>
+                      <a:pPr algn="ctr" indent="0" marL="0">
+                        <a:buNone/>
+                      </a:pPr>
+                      <a:r>
+                        <a:rPr lang="en-US" sz="1050" b="1" dirty="0">
+                          <a:solidFill>
+                            <a:srgbClr val="FF7A1A"/>
+                          </a:solidFill>
+                        </a:rPr>
+                        <a:t>直付</a:t>
+                      </a:r>
+                      <a:endParaRPr lang="en-US" sz="1050" dirty="0"/>
+                    </a:p>
+                  </a:txBody>
+                  <a:tcPr marL="27432" marR="27432" marT="27432" marB="27432" anchor="ctr">
+                    <a:lnL w="9525" cap="flat" cmpd="sng" algn="ctr">
+                      <a:solidFill>
+                        <a:srgbClr val="D9DEE7"/>
+                      </a:solidFill>
+                      <a:prstDash val="solid"/>
+                      <a:round/>
+                      <a:headEnd type="none" w="med" len="med"/>
+                      <a:tailEnd type="none" w="med" len="med"/>
+                    </a:lnL>
+                    <a:lnR w="9525" cap="flat" cmpd="sng" algn="ctr">
+                      <a:solidFill>
+                        <a:srgbClr val="D9DEE7"/>
+                      </a:solidFill>
+                      <a:prstDash val="solid"/>
+                      <a:round/>
+                      <a:headEnd type="none" w="med" len="med"/>
+                      <a:tailEnd type="none" w="med" len="med"/>
+                    </a:lnR>
+                    <a:lnT w="9525" cap="flat" cmpd="sng" algn="ctr">
+                      <a:solidFill>
+                        <a:srgbClr val="D9DEE7"/>
+                      </a:solidFill>
+                      <a:prstDash val="solid"/>
+                      <a:round/>
+                      <a:headEnd type="none" w="med" len="med"/>
+                      <a:tailEnd type="none" w="med" len="med"/>
+                    </a:lnT>
+                    <a:lnB w="9525" cap="flat" cmpd="sng" algn="ctr">
+                      <a:solidFill>
+                        <a:srgbClr val="D9DEE7"/>
+                      </a:solidFill>
+                      <a:prstDash val="solid"/>
+                      <a:round/>
+                      <a:headEnd type="none" w="med" len="med"/>
+                      <a:tailEnd type="none" w="med" len="med"/>
+                    </a:lnB>
+                    <a:solidFill>
+                      <a:srgbClr val="FFF1E6"/>
+                    </a:solidFill>
+                  </a:tcPr>
+                </a:tc>
+                <a:tc>
+                  <a:txBody>
+                    <a:bodyPr/>
+                    <a:lstStyle/>
+                    <a:p>
+                      <a:pPr algn="ctr" indent="0" marL="0">
+                        <a:buNone/>
+                      </a:pPr>
+                      <a:r>
+                        <a:rPr lang="en-US" sz="1050" b="1" dirty="0">
+                          <a:solidFill>
+                            <a:srgbClr val="FF7A1A"/>
+                          </a:solidFill>
+                        </a:rPr>
+                        <a:t>直付</a:t>
+                      </a:r>
+                      <a:endParaRPr lang="en-US" sz="1050" dirty="0"/>
+                    </a:p>
+                  </a:txBody>
+                  <a:tcPr marL="27432" marR="27432" marT="27432" marB="27432" anchor="ctr">
+                    <a:lnL w="9525" cap="flat" cmpd="sng" algn="ctr">
+                      <a:solidFill>
+                        <a:srgbClr val="D9DEE7"/>
+                      </a:solidFill>
+                      <a:prstDash val="solid"/>
+                      <a:round/>
+                      <a:headEnd type="none" w="med" len="med"/>
+                      <a:tailEnd type="none" w="med" len="med"/>
+                    </a:lnL>
+                    <a:lnR w="9525" cap="flat" cmpd="sng" algn="ctr">
+                      <a:solidFill>
+                        <a:srgbClr val="D9DEE7"/>
+                      </a:solidFill>
+                      <a:prstDash val="solid"/>
+                      <a:round/>
+                      <a:headEnd type="none" w="med" len="med"/>
+                      <a:tailEnd type="none" w="med" len="med"/>
+                    </a:lnR>
+                    <a:lnT w="9525" cap="flat" cmpd="sng" algn="ctr">
+                      <a:solidFill>
+                        <a:srgbClr val="D9DEE7"/>
+                      </a:solidFill>
+                      <a:prstDash val="solid"/>
+                      <a:round/>
+                      <a:headEnd type="none" w="med" len="med"/>
+                      <a:tailEnd type="none" w="med" len="med"/>
+                    </a:lnT>
+                    <a:lnB w="9525" cap="flat" cmpd="sng" algn="ctr">
+                      <a:solidFill>
+                        <a:srgbClr val="D9DEE7"/>
+                      </a:solidFill>
+                      <a:prstDash val="solid"/>
+                      <a:round/>
+                      <a:headEnd type="none" w="med" len="med"/>
+                      <a:tailEnd type="none" w="med" len="med"/>
+                    </a:lnB>
+                    <a:solidFill>
+                      <a:srgbClr val="FFF1E6"/>
+                    </a:solidFill>
+                  </a:tcPr>
+                </a:tc>
+              </a:tr>
+              <a:tr h="329184">
+                <a:tc rowSpan="2">
+                  <a:txBody>
+                    <a:bodyPr/>
+                    <a:lstStyle/>
+                    <a:p>
+                      <a:pPr algn="ctr" indent="0" marL="0">
+                        <a:buNone/>
+                      </a:pPr>
+                      <a:r>
+                        <a:rPr lang="en-US" sz="1050" b="1" dirty="0">
+                          <a:solidFill>
+                            <a:srgbClr val="15315E"/>
+                          </a:solidFill>
+                        </a:rPr>
+                        <a:t>预付</a:t>
+                      </a:r>
+                      <a:endParaRPr lang="en-US" sz="1050" dirty="0"/>
+                    </a:p>
+                    <a:p>
+                      <a:pPr algn="ctr" indent="0" marL="0">
+                        <a:buNone/>
+                      </a:pPr>
+                      <a:r>
+                        <a:rPr lang="en-US" sz="1050" b="1" dirty="0">
+                          <a:solidFill>
+                            <a:srgbClr val="15315E"/>
+                          </a:solidFill>
+                        </a:rPr>
+                        <a:t>30%</a:t>
+                      </a:r>
+                      <a:endParaRPr lang="en-US" sz="1050" dirty="0"/>
+                    </a:p>
+                  </a:txBody>
+                  <a:tcPr marL="27432" marR="27432" marT="27432" marB="27432" anchor="ctr">
+                    <a:lnL w="9525" cap="flat" cmpd="sng" algn="ctr">
+                      <a:solidFill>
+                        <a:srgbClr val="D9DEE7"/>
+                      </a:solidFill>
+                      <a:prstDash val="solid"/>
+                      <a:round/>
+                      <a:headEnd type="none" w="med" len="med"/>
+                      <a:tailEnd type="none" w="med" len="med"/>
+                    </a:lnL>
+                    <a:lnR w="9525" cap="flat" cmpd="sng" algn="ctr">
+                      <a:solidFill>
+                        <a:srgbClr val="D9DEE7"/>
+                      </a:solidFill>
+                      <a:prstDash val="solid"/>
+                      <a:round/>
+                      <a:headEnd type="none" w="med" len="med"/>
+                      <a:tailEnd type="none" w="med" len="med"/>
+                    </a:lnR>
+                    <a:lnT w="9525" cap="flat" cmpd="sng" algn="ctr">
+                      <a:solidFill>
+                        <a:srgbClr val="D9DEE7"/>
+                      </a:solidFill>
+                      <a:prstDash val="solid"/>
+                      <a:round/>
+                      <a:headEnd type="none" w="med" len="med"/>
+                      <a:tailEnd type="none" w="med" len="med"/>
+                    </a:lnT>
+                    <a:lnB w="9525" cap="flat" cmpd="sng" algn="ctr">
+                      <a:solidFill>
+                        <a:srgbClr val="D9DEE7"/>
+                      </a:solidFill>
+                      <a:prstDash val="solid"/>
+                      <a:round/>
+                      <a:headEnd type="none" w="med" len="med"/>
+                      <a:tailEnd type="none" w="med" len="med"/>
+                    </a:lnB>
+                    <a:solidFill>
+                      <a:srgbClr val="FFFFFF"/>
+                    </a:solidFill>
+                  </a:tcPr>
+                </a:tc>
+                <a:tc>
+                  <a:txBody>
+                    <a:bodyPr/>
+                    <a:lstStyle/>
+                    <a:p>
+                      <a:pPr algn="ctr" indent="0" marL="0">
+                        <a:buNone/>
+                      </a:pPr>
+                      <a:r>
+                        <a:rPr lang="en-US" sz="1050" b="1" dirty="0">
+                          <a:solidFill>
+                            <a:srgbClr val="15315E"/>
+                          </a:solidFill>
+                        </a:rPr>
+                        <a:t>支付宝 80%</a:t>
                       </a:r>
                       <a:endParaRPr lang="en-US" sz="1050" dirty="0"/>
                     </a:p>
@@ -3850,8 +4386,69 @@
                     </a:solidFill>
                   </a:tcPr>
                 </a:tc>
+                <a:tc>
+                  <a:txBody>
+                    <a:bodyPr/>
+                    <a:lstStyle/>
+                    <a:p>
+                      <a:pPr algn="ctr" indent="0" marL="0">
+                        <a:buNone/>
+                      </a:pPr>
+                      <a:r>
+                        <a:rPr lang="en-US" sz="1050" b="1" dirty="0">
+                          <a:solidFill>
+                            <a:srgbClr val="287DFA"/>
+                          </a:solidFill>
+                        </a:rPr>
+                        <a:t>代付</a:t>
+                      </a:r>
+                      <a:endParaRPr lang="en-US" sz="1050" dirty="0"/>
+                    </a:p>
+                  </a:txBody>
+                  <a:tcPr marL="27432" marR="27432" marT="27432" marB="27432" anchor="ctr">
+                    <a:lnL w="9525" cap="flat" cmpd="sng" algn="ctr">
+                      <a:solidFill>
+                        <a:srgbClr val="D9DEE7"/>
+                      </a:solidFill>
+                      <a:prstDash val="solid"/>
+                      <a:round/>
+                      <a:headEnd type="none" w="med" len="med"/>
+                      <a:tailEnd type="none" w="med" len="med"/>
+                    </a:lnL>
+                    <a:lnR w="9525" cap="flat" cmpd="sng" algn="ctr">
+                      <a:solidFill>
+                        <a:srgbClr val="D9DEE7"/>
+                      </a:solidFill>
+                      <a:prstDash val="solid"/>
+                      <a:round/>
+                      <a:headEnd type="none" w="med" len="med"/>
+                      <a:tailEnd type="none" w="med" len="med"/>
+                    </a:lnR>
+                    <a:lnT w="9525" cap="flat" cmpd="sng" algn="ctr">
+                      <a:solidFill>
+                        <a:srgbClr val="D9DEE7"/>
+                      </a:solidFill>
+                      <a:prstDash val="solid"/>
+                      <a:round/>
+                      <a:headEnd type="none" w="med" len="med"/>
+                      <a:tailEnd type="none" w="med" len="med"/>
+                    </a:lnT>
+                    <a:lnB w="9525" cap="flat" cmpd="sng" algn="ctr">
+                      <a:solidFill>
+                        <a:srgbClr val="D9DEE7"/>
+                      </a:solidFill>
+                      <a:prstDash val="solid"/>
+                      <a:round/>
+                      <a:headEnd type="none" w="med" len="med"/>
+                      <a:tailEnd type="none" w="med" len="med"/>
+                    </a:lnB>
+                    <a:solidFill>
+                      <a:srgbClr val="FFFFFF"/>
+                    </a:solidFill>
+                  </a:tcPr>
+                </a:tc>
               </a:tr>
-              <a:tr h="384048">
+              <a:tr h="329184">
                 <a:tc vMerge="1">
                   <a:tcPr/>
                 </a:tc>
@@ -3860,18 +4457,18 @@
                     <a:bodyPr/>
                     <a:lstStyle/>
                     <a:p>
-                      <a:pPr algn="l" indent="0" marL="0">
+                      <a:pPr algn="ctr" indent="0" marL="0">
                         <a:buNone/>
                       </a:pPr>
                       <a:r>
-                        <a:rPr lang="en-US" sz="1000" dirty="0">
+                        <a:rPr lang="en-US" sz="1050" b="1" dirty="0">
                           <a:solidFill>
-                            <a:srgbClr val="3D4757"/>
+                            <a:srgbClr val="FF7A1A"/>
                           </a:solidFill>
                         </a:rPr>
-                        <a:t>非支付宝信用付</a:t>
+                        <a:t>其他 20%</a:t>
                       </a:r>
-                      <a:endParaRPr lang="en-US" sz="1000" dirty="0"/>
+                      <a:endParaRPr lang="en-US" sz="1050" dirty="0"/>
                     </a:p>
                   </a:txBody>
                   <a:tcPr marL="27432" marR="27432" marT="27432" marB="27432" anchor="ctr">
@@ -3930,7 +4527,7 @@
                             <a:srgbClr val="FF7A1A"/>
                           </a:solidFill>
                         </a:rPr>
-                        <a:t>直付</a:t>
+                        <a:t>直付 *</a:t>
                       </a:r>
                       <a:endParaRPr lang="en-US" sz="1050" dirty="0"/>
                     </a:p>
@@ -4160,1377 +4757,6 @@
                     </a:solidFill>
                   </a:tcPr>
                 </a:tc>
-                <a:tc>
-                  <a:txBody>
-                    <a:bodyPr/>
-                    <a:lstStyle/>
-                    <a:p>
-                      <a:pPr algn="ctr" indent="0" marL="0">
-                        <a:buNone/>
-                      </a:pPr>
-                      <a:r>
-                        <a:rPr lang="en-US" sz="1050" dirty="0">
-                          <a:solidFill>
-                            <a:srgbClr val="5B6B80"/>
-                          </a:solidFill>
-                        </a:rPr>
-                        <a:t>—</a:t>
-                      </a:r>
-                      <a:endParaRPr lang="en-US" sz="1050" dirty="0"/>
-                    </a:p>
-                  </a:txBody>
-                  <a:tcPr marL="27432" marR="27432" marT="27432" marB="27432" anchor="ctr">
-                    <a:lnL w="9525" cap="flat" cmpd="sng" algn="ctr">
-                      <a:solidFill>
-                        <a:srgbClr val="D9DEE7"/>
-                      </a:solidFill>
-                      <a:prstDash val="solid"/>
-                      <a:round/>
-                      <a:headEnd type="none" w="med" len="med"/>
-                      <a:tailEnd type="none" w="med" len="med"/>
-                    </a:lnL>
-                    <a:lnR w="9525" cap="flat" cmpd="sng" algn="ctr">
-                      <a:solidFill>
-                        <a:srgbClr val="D9DEE7"/>
-                      </a:solidFill>
-                      <a:prstDash val="solid"/>
-                      <a:round/>
-                      <a:headEnd type="none" w="med" len="med"/>
-                      <a:tailEnd type="none" w="med" len="med"/>
-                    </a:lnR>
-                    <a:lnT w="9525" cap="flat" cmpd="sng" algn="ctr">
-                      <a:solidFill>
-                        <a:srgbClr val="D9DEE7"/>
-                      </a:solidFill>
-                      <a:prstDash val="solid"/>
-                      <a:round/>
-                      <a:headEnd type="none" w="med" len="med"/>
-                      <a:tailEnd type="none" w="med" len="med"/>
-                    </a:lnT>
-                    <a:lnB w="9525" cap="flat" cmpd="sng" algn="ctr">
-                      <a:solidFill>
-                        <a:srgbClr val="D9DEE7"/>
-                      </a:solidFill>
-                      <a:prstDash val="solid"/>
-                      <a:round/>
-                      <a:headEnd type="none" w="med" len="med"/>
-                      <a:tailEnd type="none" w="med" len="med"/>
-                    </a:lnB>
-                    <a:solidFill>
-                      <a:srgbClr val="FFFFFF"/>
-                    </a:solidFill>
-                  </a:tcPr>
-                </a:tc>
-              </a:tr>
-              <a:tr h="384048">
-                <a:tc vMerge="1">
-                  <a:tcPr/>
-                </a:tc>
-                <a:tc>
-                  <a:txBody>
-                    <a:bodyPr/>
-                    <a:lstStyle/>
-                    <a:p>
-                      <a:pPr algn="l" indent="0" marL="0">
-                        <a:buNone/>
-                      </a:pPr>
-                      <a:r>
-                        <a:rPr lang="en-US" sz="1000" dirty="0">
-                          <a:solidFill>
-                            <a:srgbClr val="3D4757"/>
-                          </a:solidFill>
-                        </a:rPr>
-                        <a:t>预付 *</a:t>
-                      </a:r>
-                      <a:endParaRPr lang="en-US" sz="1000" dirty="0"/>
-                    </a:p>
-                  </a:txBody>
-                  <a:tcPr marL="27432" marR="27432" marT="27432" marB="27432" anchor="ctr">
-                    <a:lnL w="9525" cap="flat" cmpd="sng" algn="ctr">
-                      <a:solidFill>
-                        <a:srgbClr val="D9DEE7"/>
-                      </a:solidFill>
-                      <a:prstDash val="solid"/>
-                      <a:round/>
-                      <a:headEnd type="none" w="med" len="med"/>
-                      <a:tailEnd type="none" w="med" len="med"/>
-                    </a:lnL>
-                    <a:lnR w="9525" cap="flat" cmpd="sng" algn="ctr">
-                      <a:solidFill>
-                        <a:srgbClr val="D9DEE7"/>
-                      </a:solidFill>
-                      <a:prstDash val="solid"/>
-                      <a:round/>
-                      <a:headEnd type="none" w="med" len="med"/>
-                      <a:tailEnd type="none" w="med" len="med"/>
-                    </a:lnR>
-                    <a:lnT w="9525" cap="flat" cmpd="sng" algn="ctr">
-                      <a:solidFill>
-                        <a:srgbClr val="D9DEE7"/>
-                      </a:solidFill>
-                      <a:prstDash val="solid"/>
-                      <a:round/>
-                      <a:headEnd type="none" w="med" len="med"/>
-                      <a:tailEnd type="none" w="med" len="med"/>
-                    </a:lnT>
-                    <a:lnB w="9525" cap="flat" cmpd="sng" algn="ctr">
-                      <a:solidFill>
-                        <a:srgbClr val="D9DEE7"/>
-                      </a:solidFill>
-                      <a:prstDash val="solid"/>
-                      <a:round/>
-                      <a:headEnd type="none" w="med" len="med"/>
-                      <a:tailEnd type="none" w="med" len="med"/>
-                    </a:lnB>
-                    <a:solidFill>
-                      <a:srgbClr val="FFFFFF"/>
-                    </a:solidFill>
-                  </a:tcPr>
-                </a:tc>
-                <a:tc>
-                  <a:txBody>
-                    <a:bodyPr/>
-                    <a:lstStyle/>
-                    <a:p>
-                      <a:pPr algn="ctr" indent="0" marL="0">
-                        <a:buNone/>
-                      </a:pPr>
-                      <a:r>
-                        <a:rPr lang="en-US" sz="1050" b="1" dirty="0">
-                          <a:solidFill>
-                            <a:srgbClr val="FF7A1A"/>
-                          </a:solidFill>
-                        </a:rPr>
-                        <a:t>直付</a:t>
-                      </a:r>
-                      <a:endParaRPr lang="en-US" sz="1050" dirty="0"/>
-                    </a:p>
-                  </a:txBody>
-                  <a:tcPr marL="27432" marR="27432" marT="27432" marB="27432" anchor="ctr">
-                    <a:lnL w="9525" cap="flat" cmpd="sng" algn="ctr">
-                      <a:solidFill>
-                        <a:srgbClr val="D9DEE7"/>
-                      </a:solidFill>
-                      <a:prstDash val="solid"/>
-                      <a:round/>
-                      <a:headEnd type="none" w="med" len="med"/>
-                      <a:tailEnd type="none" w="med" len="med"/>
-                    </a:lnL>
-                    <a:lnR w="9525" cap="flat" cmpd="sng" algn="ctr">
-                      <a:solidFill>
-                        <a:srgbClr val="D9DEE7"/>
-                      </a:solidFill>
-                      <a:prstDash val="solid"/>
-                      <a:round/>
-                      <a:headEnd type="none" w="med" len="med"/>
-                      <a:tailEnd type="none" w="med" len="med"/>
-                    </a:lnR>
-                    <a:lnT w="9525" cap="flat" cmpd="sng" algn="ctr">
-                      <a:solidFill>
-                        <a:srgbClr val="D9DEE7"/>
-                      </a:solidFill>
-                      <a:prstDash val="solid"/>
-                      <a:round/>
-                      <a:headEnd type="none" w="med" len="med"/>
-                      <a:tailEnd type="none" w="med" len="med"/>
-                    </a:lnT>
-                    <a:lnB w="9525" cap="flat" cmpd="sng" algn="ctr">
-                      <a:solidFill>
-                        <a:srgbClr val="D9DEE7"/>
-                      </a:solidFill>
-                      <a:prstDash val="solid"/>
-                      <a:round/>
-                      <a:headEnd type="none" w="med" len="med"/>
-                      <a:tailEnd type="none" w="med" len="med"/>
-                    </a:lnB>
-                    <a:solidFill>
-                      <a:srgbClr val="FFF1E6"/>
-                    </a:solidFill>
-                  </a:tcPr>
-                </a:tc>
-                <a:tc>
-                  <a:txBody>
-                    <a:bodyPr/>
-                    <a:lstStyle/>
-                    <a:p>
-                      <a:pPr algn="ctr" indent="0" marL="0">
-                        <a:buNone/>
-                      </a:pPr>
-                      <a:r>
-                        <a:rPr lang="en-US" sz="1050" b="1" dirty="0">
-                          <a:solidFill>
-                            <a:srgbClr val="FF7A1A"/>
-                          </a:solidFill>
-                        </a:rPr>
-                        <a:t>直付</a:t>
-                      </a:r>
-                      <a:endParaRPr lang="en-US" sz="1050" dirty="0"/>
-                    </a:p>
-                  </a:txBody>
-                  <a:tcPr marL="27432" marR="27432" marT="27432" marB="27432" anchor="ctr">
-                    <a:lnL w="9525" cap="flat" cmpd="sng" algn="ctr">
-                      <a:solidFill>
-                        <a:srgbClr val="D9DEE7"/>
-                      </a:solidFill>
-                      <a:prstDash val="solid"/>
-                      <a:round/>
-                      <a:headEnd type="none" w="med" len="med"/>
-                      <a:tailEnd type="none" w="med" len="med"/>
-                    </a:lnL>
-                    <a:lnR w="9525" cap="flat" cmpd="sng" algn="ctr">
-                      <a:solidFill>
-                        <a:srgbClr val="D9DEE7"/>
-                      </a:solidFill>
-                      <a:prstDash val="solid"/>
-                      <a:round/>
-                      <a:headEnd type="none" w="med" len="med"/>
-                      <a:tailEnd type="none" w="med" len="med"/>
-                    </a:lnR>
-                    <a:lnT w="9525" cap="flat" cmpd="sng" algn="ctr">
-                      <a:solidFill>
-                        <a:srgbClr val="D9DEE7"/>
-                      </a:solidFill>
-                      <a:prstDash val="solid"/>
-                      <a:round/>
-                      <a:headEnd type="none" w="med" len="med"/>
-                      <a:tailEnd type="none" w="med" len="med"/>
-                    </a:lnT>
-                    <a:lnB w="9525" cap="flat" cmpd="sng" algn="ctr">
-                      <a:solidFill>
-                        <a:srgbClr val="D9DEE7"/>
-                      </a:solidFill>
-                      <a:prstDash val="solid"/>
-                      <a:round/>
-                      <a:headEnd type="none" w="med" len="med"/>
-                      <a:tailEnd type="none" w="med" len="med"/>
-                    </a:lnB>
-                    <a:solidFill>
-                      <a:srgbClr val="FFF1E6"/>
-                    </a:solidFill>
-                  </a:tcPr>
-                </a:tc>
-                <a:tc>
-                  <a:txBody>
-                    <a:bodyPr/>
-                    <a:lstStyle/>
-                    <a:p>
-                      <a:pPr algn="ctr" indent="0" marL="0">
-                        <a:buNone/>
-                      </a:pPr>
-                      <a:r>
-                        <a:rPr lang="en-US" sz="1050" b="1" dirty="0">
-                          <a:solidFill>
-                            <a:srgbClr val="FF7A1A"/>
-                          </a:solidFill>
-                        </a:rPr>
-                        <a:t>直付</a:t>
-                      </a:r>
-                      <a:endParaRPr lang="en-US" sz="1050" dirty="0"/>
-                    </a:p>
-                  </a:txBody>
-                  <a:tcPr marL="27432" marR="27432" marT="27432" marB="27432" anchor="ctr">
-                    <a:lnL w="9525" cap="flat" cmpd="sng" algn="ctr">
-                      <a:solidFill>
-                        <a:srgbClr val="D9DEE7"/>
-                      </a:solidFill>
-                      <a:prstDash val="solid"/>
-                      <a:round/>
-                      <a:headEnd type="none" w="med" len="med"/>
-                      <a:tailEnd type="none" w="med" len="med"/>
-                    </a:lnL>
-                    <a:lnR w="9525" cap="flat" cmpd="sng" algn="ctr">
-                      <a:solidFill>
-                        <a:srgbClr val="D9DEE7"/>
-                      </a:solidFill>
-                      <a:prstDash val="solid"/>
-                      <a:round/>
-                      <a:headEnd type="none" w="med" len="med"/>
-                      <a:tailEnd type="none" w="med" len="med"/>
-                    </a:lnR>
-                    <a:lnT w="9525" cap="flat" cmpd="sng" algn="ctr">
-                      <a:solidFill>
-                        <a:srgbClr val="D9DEE7"/>
-                      </a:solidFill>
-                      <a:prstDash val="solid"/>
-                      <a:round/>
-                      <a:headEnd type="none" w="med" len="med"/>
-                      <a:tailEnd type="none" w="med" len="med"/>
-                    </a:lnT>
-                    <a:lnB w="9525" cap="flat" cmpd="sng" algn="ctr">
-                      <a:solidFill>
-                        <a:srgbClr val="D9DEE7"/>
-                      </a:solidFill>
-                      <a:prstDash val="solid"/>
-                      <a:round/>
-                      <a:headEnd type="none" w="med" len="med"/>
-                      <a:tailEnd type="none" w="med" len="med"/>
-                    </a:lnB>
-                    <a:solidFill>
-                      <a:srgbClr val="FFF1E6"/>
-                    </a:solidFill>
-                  </a:tcPr>
-                </a:tc>
-                <a:tc>
-                  <a:txBody>
-                    <a:bodyPr/>
-                    <a:lstStyle/>
-                    <a:p>
-                      <a:pPr algn="ctr" indent="0" marL="0">
-                        <a:buNone/>
-                      </a:pPr>
-                      <a:r>
-                        <a:rPr lang="en-US" sz="1050" b="1" dirty="0">
-                          <a:solidFill>
-                            <a:srgbClr val="FF7A1A"/>
-                          </a:solidFill>
-                        </a:rPr>
-                        <a:t>直付</a:t>
-                      </a:r>
-                      <a:endParaRPr lang="en-US" sz="1050" dirty="0"/>
-                    </a:p>
-                  </a:txBody>
-                  <a:tcPr marL="27432" marR="27432" marT="27432" marB="27432" anchor="ctr">
-                    <a:lnL w="9525" cap="flat" cmpd="sng" algn="ctr">
-                      <a:solidFill>
-                        <a:srgbClr val="D9DEE7"/>
-                      </a:solidFill>
-                      <a:prstDash val="solid"/>
-                      <a:round/>
-                      <a:headEnd type="none" w="med" len="med"/>
-                      <a:tailEnd type="none" w="med" len="med"/>
-                    </a:lnL>
-                    <a:lnR w="9525" cap="flat" cmpd="sng" algn="ctr">
-                      <a:solidFill>
-                        <a:srgbClr val="D9DEE7"/>
-                      </a:solidFill>
-                      <a:prstDash val="solid"/>
-                      <a:round/>
-                      <a:headEnd type="none" w="med" len="med"/>
-                      <a:tailEnd type="none" w="med" len="med"/>
-                    </a:lnR>
-                    <a:lnT w="9525" cap="flat" cmpd="sng" algn="ctr">
-                      <a:solidFill>
-                        <a:srgbClr val="D9DEE7"/>
-                      </a:solidFill>
-                      <a:prstDash val="solid"/>
-                      <a:round/>
-                      <a:headEnd type="none" w="med" len="med"/>
-                      <a:tailEnd type="none" w="med" len="med"/>
-                    </a:lnT>
-                    <a:lnB w="9525" cap="flat" cmpd="sng" algn="ctr">
-                      <a:solidFill>
-                        <a:srgbClr val="D9DEE7"/>
-                      </a:solidFill>
-                      <a:prstDash val="solid"/>
-                      <a:round/>
-                      <a:headEnd type="none" w="med" len="med"/>
-                      <a:tailEnd type="none" w="med" len="med"/>
-                    </a:lnB>
-                    <a:solidFill>
-                      <a:srgbClr val="FFF1E6"/>
-                    </a:solidFill>
-                  </a:tcPr>
-                </a:tc>
-                <a:tc>
-                  <a:txBody>
-                    <a:bodyPr/>
-                    <a:lstStyle/>
-                    <a:p>
-                      <a:pPr algn="ctr" indent="0" marL="0">
-                        <a:buNone/>
-                      </a:pPr>
-                      <a:r>
-                        <a:rPr lang="en-US" sz="1050" b="1" dirty="0">
-                          <a:solidFill>
-                            <a:srgbClr val="FF7A1A"/>
-                          </a:solidFill>
-                        </a:rPr>
-                        <a:t>直付</a:t>
-                      </a:r>
-                      <a:endParaRPr lang="en-US" sz="1050" dirty="0"/>
-                    </a:p>
-                  </a:txBody>
-                  <a:tcPr marL="27432" marR="27432" marT="27432" marB="27432" anchor="ctr">
-                    <a:lnL w="9525" cap="flat" cmpd="sng" algn="ctr">
-                      <a:solidFill>
-                        <a:srgbClr val="D9DEE7"/>
-                      </a:solidFill>
-                      <a:prstDash val="solid"/>
-                      <a:round/>
-                      <a:headEnd type="none" w="med" len="med"/>
-                      <a:tailEnd type="none" w="med" len="med"/>
-                    </a:lnL>
-                    <a:lnR w="9525" cap="flat" cmpd="sng" algn="ctr">
-                      <a:solidFill>
-                        <a:srgbClr val="D9DEE7"/>
-                      </a:solidFill>
-                      <a:prstDash val="solid"/>
-                      <a:round/>
-                      <a:headEnd type="none" w="med" len="med"/>
-                      <a:tailEnd type="none" w="med" len="med"/>
-                    </a:lnR>
-                    <a:lnT w="9525" cap="flat" cmpd="sng" algn="ctr">
-                      <a:solidFill>
-                        <a:srgbClr val="D9DEE7"/>
-                      </a:solidFill>
-                      <a:prstDash val="solid"/>
-                      <a:round/>
-                      <a:headEnd type="none" w="med" len="med"/>
-                      <a:tailEnd type="none" w="med" len="med"/>
-                    </a:lnT>
-                    <a:lnB w="9525" cap="flat" cmpd="sng" algn="ctr">
-                      <a:solidFill>
-                        <a:srgbClr val="D9DEE7"/>
-                      </a:solidFill>
-                      <a:prstDash val="solid"/>
-                      <a:round/>
-                      <a:headEnd type="none" w="med" len="med"/>
-                      <a:tailEnd type="none" w="med" len="med"/>
-                    </a:lnB>
-                    <a:solidFill>
-                      <a:srgbClr val="FFF1E6"/>
-                    </a:solidFill>
-                  </a:tcPr>
-                </a:tc>
-              </a:tr>
-              <a:tr h="384048">
-                <a:tc rowSpan="3">
-                  <a:txBody>
-                    <a:bodyPr/>
-                    <a:lstStyle/>
-                    <a:p>
-                      <a:pPr algn="ctr" indent="0" marL="0">
-                        <a:buNone/>
-                      </a:pPr>
-                      <a:r>
-                        <a:rPr lang="en-US" sz="1050" b="1" dirty="0">
-                          <a:solidFill>
-                            <a:srgbClr val="FF7A1A"/>
-                          </a:solidFill>
-                        </a:rPr>
-                        <a:t>小程序</a:t>
-                      </a:r>
-                      <a:endParaRPr lang="en-US" sz="1050" dirty="0"/>
-                    </a:p>
-                  </a:txBody>
-                  <a:tcPr marL="27432" marR="27432" marT="27432" marB="27432" anchor="ctr">
-                    <a:lnL w="9525" cap="flat" cmpd="sng" algn="ctr">
-                      <a:solidFill>
-                        <a:srgbClr val="D9DEE7"/>
-                      </a:solidFill>
-                      <a:prstDash val="solid"/>
-                      <a:round/>
-                      <a:headEnd type="none" w="med" len="med"/>
-                      <a:tailEnd type="none" w="med" len="med"/>
-                    </a:lnL>
-                    <a:lnR w="9525" cap="flat" cmpd="sng" algn="ctr">
-                      <a:solidFill>
-                        <a:srgbClr val="D9DEE7"/>
-                      </a:solidFill>
-                      <a:prstDash val="solid"/>
-                      <a:round/>
-                      <a:headEnd type="none" w="med" len="med"/>
-                      <a:tailEnd type="none" w="med" len="med"/>
-                    </a:lnR>
-                    <a:lnT w="9525" cap="flat" cmpd="sng" algn="ctr">
-                      <a:solidFill>
-                        <a:srgbClr val="D9DEE7"/>
-                      </a:solidFill>
-                      <a:prstDash val="solid"/>
-                      <a:round/>
-                      <a:headEnd type="none" w="med" len="med"/>
-                      <a:tailEnd type="none" w="med" len="med"/>
-                    </a:lnT>
-                    <a:lnB w="9525" cap="flat" cmpd="sng" algn="ctr">
-                      <a:solidFill>
-                        <a:srgbClr val="D9DEE7"/>
-                      </a:solidFill>
-                      <a:prstDash val="solid"/>
-                      <a:round/>
-                      <a:headEnd type="none" w="med" len="med"/>
-                      <a:tailEnd type="none" w="med" len="med"/>
-                    </a:lnB>
-                    <a:solidFill>
-                      <a:srgbClr val="FFFFFF"/>
-                    </a:solidFill>
-                  </a:tcPr>
-                </a:tc>
-                <a:tc>
-                  <a:txBody>
-                    <a:bodyPr/>
-                    <a:lstStyle/>
-                    <a:p>
-                      <a:pPr algn="l" indent="0" marL="0">
-                        <a:buNone/>
-                      </a:pPr>
-                      <a:r>
-                        <a:rPr lang="en-US" sz="1000" b="1" dirty="0">
-                          <a:solidFill>
-                            <a:srgbClr val="FF7A1A"/>
-                          </a:solidFill>
-                        </a:rPr>
-                        <a:t>支付宝</a:t>
-                      </a:r>
-                      <a:endParaRPr lang="en-US" sz="1000" dirty="0"/>
-                    </a:p>
-                  </a:txBody>
-                  <a:tcPr marL="27432" marR="27432" marT="27432" marB="27432" anchor="ctr">
-                    <a:lnL w="9525" cap="flat" cmpd="sng" algn="ctr">
-                      <a:solidFill>
-                        <a:srgbClr val="D9DEE7"/>
-                      </a:solidFill>
-                      <a:prstDash val="solid"/>
-                      <a:round/>
-                      <a:headEnd type="none" w="med" len="med"/>
-                      <a:tailEnd type="none" w="med" len="med"/>
-                    </a:lnL>
-                    <a:lnR w="9525" cap="flat" cmpd="sng" algn="ctr">
-                      <a:solidFill>
-                        <a:srgbClr val="D9DEE7"/>
-                      </a:solidFill>
-                      <a:prstDash val="solid"/>
-                      <a:round/>
-                      <a:headEnd type="none" w="med" len="med"/>
-                      <a:tailEnd type="none" w="med" len="med"/>
-                    </a:lnR>
-                    <a:lnT w="9525" cap="flat" cmpd="sng" algn="ctr">
-                      <a:solidFill>
-                        <a:srgbClr val="D9DEE7"/>
-                      </a:solidFill>
-                      <a:prstDash val="solid"/>
-                      <a:round/>
-                      <a:headEnd type="none" w="med" len="med"/>
-                      <a:tailEnd type="none" w="med" len="med"/>
-                    </a:lnT>
-                    <a:lnB w="9525" cap="flat" cmpd="sng" algn="ctr">
-                      <a:solidFill>
-                        <a:srgbClr val="D9DEE7"/>
-                      </a:solidFill>
-                      <a:prstDash val="solid"/>
-                      <a:round/>
-                      <a:headEnd type="none" w="med" len="med"/>
-                      <a:tailEnd type="none" w="med" len="med"/>
-                    </a:lnB>
-                    <a:solidFill>
-                      <a:srgbClr val="FFFFFF"/>
-                    </a:solidFill>
-                  </a:tcPr>
-                </a:tc>
-                <a:tc gridSpan="5">
-                  <a:txBody>
-                    <a:bodyPr/>
-                    <a:lstStyle/>
-                    <a:p>
-                      <a:pPr algn="ctr" indent="0" marL="0">
-                        <a:buNone/>
-                      </a:pPr>
-                      <a:r>
-                        <a:rPr lang="en-US" sz="1050" b="1" dirty="0">
-                          <a:solidFill>
-                            <a:srgbClr val="FF7A1A"/>
-                          </a:solidFill>
-                        </a:rPr>
-                        <a:t>无法使用，订单不具备代付条件</a:t>
-                      </a:r>
-                      <a:endParaRPr lang="en-US" sz="1050" dirty="0"/>
-                    </a:p>
-                  </a:txBody>
-                  <a:tcPr marL="27432" marR="27432" marT="27432" marB="27432" anchor="ctr">
-                    <a:lnL w="9525" cap="flat" cmpd="sng" algn="ctr">
-                      <a:solidFill>
-                        <a:srgbClr val="D9DEE7"/>
-                      </a:solidFill>
-                      <a:prstDash val="solid"/>
-                      <a:round/>
-                      <a:headEnd type="none" w="med" len="med"/>
-                      <a:tailEnd type="none" w="med" len="med"/>
-                    </a:lnL>
-                    <a:lnR w="9525" cap="flat" cmpd="sng" algn="ctr">
-                      <a:solidFill>
-                        <a:srgbClr val="D9DEE7"/>
-                      </a:solidFill>
-                      <a:prstDash val="solid"/>
-                      <a:round/>
-                      <a:headEnd type="none" w="med" len="med"/>
-                      <a:tailEnd type="none" w="med" len="med"/>
-                    </a:lnR>
-                    <a:lnT w="9525" cap="flat" cmpd="sng" algn="ctr">
-                      <a:solidFill>
-                        <a:srgbClr val="D9DEE7"/>
-                      </a:solidFill>
-                      <a:prstDash val="solid"/>
-                      <a:round/>
-                      <a:headEnd type="none" w="med" len="med"/>
-                      <a:tailEnd type="none" w="med" len="med"/>
-                    </a:lnT>
-                    <a:lnB w="9525" cap="flat" cmpd="sng" algn="ctr">
-                      <a:solidFill>
-                        <a:srgbClr val="D9DEE7"/>
-                      </a:solidFill>
-                      <a:prstDash val="solid"/>
-                      <a:round/>
-                      <a:headEnd type="none" w="med" len="med"/>
-                      <a:tailEnd type="none" w="med" len="med"/>
-                    </a:lnB>
-                    <a:solidFill>
-                      <a:srgbClr val="FFF1E6"/>
-                    </a:solidFill>
-                  </a:tcPr>
-                </a:tc>
-                <a:tc hMerge="1">
-                  <a:tcPr/>
-                </a:tc>
-                <a:tc hMerge="1">
-                  <a:tcPr/>
-                </a:tc>
-                <a:tc hMerge="1">
-                  <a:tcPr/>
-                </a:tc>
-                <a:tc hMerge="1">
-                  <a:tcPr/>
-                </a:tc>
-              </a:tr>
-              <a:tr h="384048">
-                <a:tc vMerge="1">
-                  <a:tcPr/>
-                </a:tc>
-                <a:tc>
-                  <a:txBody>
-                    <a:bodyPr/>
-                    <a:lstStyle/>
-                    <a:p>
-                      <a:pPr algn="l" indent="0" marL="0">
-                        <a:buNone/>
-                      </a:pPr>
-                      <a:r>
-                        <a:rPr lang="en-US" sz="1000" dirty="0">
-                          <a:solidFill>
-                            <a:srgbClr val="3D4757"/>
-                          </a:solidFill>
-                        </a:rPr>
-                        <a:t>微信支付分</a:t>
-                      </a:r>
-                      <a:endParaRPr lang="en-US" sz="1000" dirty="0"/>
-                    </a:p>
-                  </a:txBody>
-                  <a:tcPr marL="27432" marR="27432" marT="27432" marB="27432" anchor="ctr">
-                    <a:lnL w="9525" cap="flat" cmpd="sng" algn="ctr">
-                      <a:solidFill>
-                        <a:srgbClr val="D9DEE7"/>
-                      </a:solidFill>
-                      <a:prstDash val="solid"/>
-                      <a:round/>
-                      <a:headEnd type="none" w="med" len="med"/>
-                      <a:tailEnd type="none" w="med" len="med"/>
-                    </a:lnL>
-                    <a:lnR w="9525" cap="flat" cmpd="sng" algn="ctr">
-                      <a:solidFill>
-                        <a:srgbClr val="D9DEE7"/>
-                      </a:solidFill>
-                      <a:prstDash val="solid"/>
-                      <a:round/>
-                      <a:headEnd type="none" w="med" len="med"/>
-                      <a:tailEnd type="none" w="med" len="med"/>
-                    </a:lnR>
-                    <a:lnT w="9525" cap="flat" cmpd="sng" algn="ctr">
-                      <a:solidFill>
-                        <a:srgbClr val="D9DEE7"/>
-                      </a:solidFill>
-                      <a:prstDash val="solid"/>
-                      <a:round/>
-                      <a:headEnd type="none" w="med" len="med"/>
-                      <a:tailEnd type="none" w="med" len="med"/>
-                    </a:lnT>
-                    <a:lnB w="9525" cap="flat" cmpd="sng" algn="ctr">
-                      <a:solidFill>
-                        <a:srgbClr val="D9DEE7"/>
-                      </a:solidFill>
-                      <a:prstDash val="solid"/>
-                      <a:round/>
-                      <a:headEnd type="none" w="med" len="med"/>
-                      <a:tailEnd type="none" w="med" len="med"/>
-                    </a:lnB>
-                    <a:solidFill>
-                      <a:srgbClr val="FFFFFF"/>
-                    </a:solidFill>
-                  </a:tcPr>
-                </a:tc>
-                <a:tc>
-                  <a:txBody>
-                    <a:bodyPr/>
-                    <a:lstStyle/>
-                    <a:p>
-                      <a:pPr algn="ctr" indent="0" marL="0">
-                        <a:buNone/>
-                      </a:pPr>
-                      <a:r>
-                        <a:rPr lang="en-US" sz="1050" b="1" dirty="0">
-                          <a:solidFill>
-                            <a:srgbClr val="FF7A1A"/>
-                          </a:solidFill>
-                        </a:rPr>
-                        <a:t>直付</a:t>
-                      </a:r>
-                      <a:endParaRPr lang="en-US" sz="1050" dirty="0"/>
-                    </a:p>
-                  </a:txBody>
-                  <a:tcPr marL="27432" marR="27432" marT="27432" marB="27432" anchor="ctr">
-                    <a:lnL w="9525" cap="flat" cmpd="sng" algn="ctr">
-                      <a:solidFill>
-                        <a:srgbClr val="D9DEE7"/>
-                      </a:solidFill>
-                      <a:prstDash val="solid"/>
-                      <a:round/>
-                      <a:headEnd type="none" w="med" len="med"/>
-                      <a:tailEnd type="none" w="med" len="med"/>
-                    </a:lnL>
-                    <a:lnR w="9525" cap="flat" cmpd="sng" algn="ctr">
-                      <a:solidFill>
-                        <a:srgbClr val="D9DEE7"/>
-                      </a:solidFill>
-                      <a:prstDash val="solid"/>
-                      <a:round/>
-                      <a:headEnd type="none" w="med" len="med"/>
-                      <a:tailEnd type="none" w="med" len="med"/>
-                    </a:lnR>
-                    <a:lnT w="9525" cap="flat" cmpd="sng" algn="ctr">
-                      <a:solidFill>
-                        <a:srgbClr val="D9DEE7"/>
-                      </a:solidFill>
-                      <a:prstDash val="solid"/>
-                      <a:round/>
-                      <a:headEnd type="none" w="med" len="med"/>
-                      <a:tailEnd type="none" w="med" len="med"/>
-                    </a:lnT>
-                    <a:lnB w="9525" cap="flat" cmpd="sng" algn="ctr">
-                      <a:solidFill>
-                        <a:srgbClr val="D9DEE7"/>
-                      </a:solidFill>
-                      <a:prstDash val="solid"/>
-                      <a:round/>
-                      <a:headEnd type="none" w="med" len="med"/>
-                      <a:tailEnd type="none" w="med" len="med"/>
-                    </a:lnB>
-                    <a:solidFill>
-                      <a:srgbClr val="FFF1E6"/>
-                    </a:solidFill>
-                  </a:tcPr>
-                </a:tc>
-                <a:tc>
-                  <a:txBody>
-                    <a:bodyPr/>
-                    <a:lstStyle/>
-                    <a:p>
-                      <a:pPr algn="ctr" indent="0" marL="0">
-                        <a:buNone/>
-                      </a:pPr>
-                      <a:r>
-                        <a:rPr lang="en-US" sz="1050" b="1" dirty="0">
-                          <a:solidFill>
-                            <a:srgbClr val="FF7A1A"/>
-                          </a:solidFill>
-                        </a:rPr>
-                        <a:t>直付</a:t>
-                      </a:r>
-                      <a:endParaRPr lang="en-US" sz="1050" dirty="0"/>
-                    </a:p>
-                  </a:txBody>
-                  <a:tcPr marL="27432" marR="27432" marT="27432" marB="27432" anchor="ctr">
-                    <a:lnL w="9525" cap="flat" cmpd="sng" algn="ctr">
-                      <a:solidFill>
-                        <a:srgbClr val="D9DEE7"/>
-                      </a:solidFill>
-                      <a:prstDash val="solid"/>
-                      <a:round/>
-                      <a:headEnd type="none" w="med" len="med"/>
-                      <a:tailEnd type="none" w="med" len="med"/>
-                    </a:lnL>
-                    <a:lnR w="9525" cap="flat" cmpd="sng" algn="ctr">
-                      <a:solidFill>
-                        <a:srgbClr val="D9DEE7"/>
-                      </a:solidFill>
-                      <a:prstDash val="solid"/>
-                      <a:round/>
-                      <a:headEnd type="none" w="med" len="med"/>
-                      <a:tailEnd type="none" w="med" len="med"/>
-                    </a:lnR>
-                    <a:lnT w="9525" cap="flat" cmpd="sng" algn="ctr">
-                      <a:solidFill>
-                        <a:srgbClr val="D9DEE7"/>
-                      </a:solidFill>
-                      <a:prstDash val="solid"/>
-                      <a:round/>
-                      <a:headEnd type="none" w="med" len="med"/>
-                      <a:tailEnd type="none" w="med" len="med"/>
-                    </a:lnT>
-                    <a:lnB w="9525" cap="flat" cmpd="sng" algn="ctr">
-                      <a:solidFill>
-                        <a:srgbClr val="D9DEE7"/>
-                      </a:solidFill>
-                      <a:prstDash val="solid"/>
-                      <a:round/>
-                      <a:headEnd type="none" w="med" len="med"/>
-                      <a:tailEnd type="none" w="med" len="med"/>
-                    </a:lnB>
-                    <a:solidFill>
-                      <a:srgbClr val="FFF1E6"/>
-                    </a:solidFill>
-                  </a:tcPr>
-                </a:tc>
-                <a:tc>
-                  <a:txBody>
-                    <a:bodyPr/>
-                    <a:lstStyle/>
-                    <a:p>
-                      <a:pPr algn="ctr" indent="0" marL="0">
-                        <a:buNone/>
-                      </a:pPr>
-                      <a:r>
-                        <a:rPr lang="en-US" sz="1050" b="1" dirty="0">
-                          <a:solidFill>
-                            <a:srgbClr val="FF7A1A"/>
-                          </a:solidFill>
-                        </a:rPr>
-                        <a:t>直付</a:t>
-                      </a:r>
-                      <a:endParaRPr lang="en-US" sz="1050" dirty="0"/>
-                    </a:p>
-                  </a:txBody>
-                  <a:tcPr marL="27432" marR="27432" marT="27432" marB="27432" anchor="ctr">
-                    <a:lnL w="9525" cap="flat" cmpd="sng" algn="ctr">
-                      <a:solidFill>
-                        <a:srgbClr val="D9DEE7"/>
-                      </a:solidFill>
-                      <a:prstDash val="solid"/>
-                      <a:round/>
-                      <a:headEnd type="none" w="med" len="med"/>
-                      <a:tailEnd type="none" w="med" len="med"/>
-                    </a:lnL>
-                    <a:lnR w="9525" cap="flat" cmpd="sng" algn="ctr">
-                      <a:solidFill>
-                        <a:srgbClr val="D9DEE7"/>
-                      </a:solidFill>
-                      <a:prstDash val="solid"/>
-                      <a:round/>
-                      <a:headEnd type="none" w="med" len="med"/>
-                      <a:tailEnd type="none" w="med" len="med"/>
-                    </a:lnR>
-                    <a:lnT w="9525" cap="flat" cmpd="sng" algn="ctr">
-                      <a:solidFill>
-                        <a:srgbClr val="D9DEE7"/>
-                      </a:solidFill>
-                      <a:prstDash val="solid"/>
-                      <a:round/>
-                      <a:headEnd type="none" w="med" len="med"/>
-                      <a:tailEnd type="none" w="med" len="med"/>
-                    </a:lnT>
-                    <a:lnB w="9525" cap="flat" cmpd="sng" algn="ctr">
-                      <a:solidFill>
-                        <a:srgbClr val="D9DEE7"/>
-                      </a:solidFill>
-                      <a:prstDash val="solid"/>
-                      <a:round/>
-                      <a:headEnd type="none" w="med" len="med"/>
-                      <a:tailEnd type="none" w="med" len="med"/>
-                    </a:lnB>
-                    <a:solidFill>
-                      <a:srgbClr val="FFF1E6"/>
-                    </a:solidFill>
-                  </a:tcPr>
-                </a:tc>
-                <a:tc>
-                  <a:txBody>
-                    <a:bodyPr/>
-                    <a:lstStyle/>
-                    <a:p>
-                      <a:pPr algn="ctr" indent="0" marL="0">
-                        <a:buNone/>
-                      </a:pPr>
-                      <a:r>
-                        <a:rPr lang="en-US" sz="1050" dirty="0">
-                          <a:solidFill>
-                            <a:srgbClr val="5B6B80"/>
-                          </a:solidFill>
-                        </a:rPr>
-                        <a:t>—</a:t>
-                      </a:r>
-                      <a:endParaRPr lang="en-US" sz="1050" dirty="0"/>
-                    </a:p>
-                  </a:txBody>
-                  <a:tcPr marL="27432" marR="27432" marT="27432" marB="27432" anchor="ctr">
-                    <a:lnL w="9525" cap="flat" cmpd="sng" algn="ctr">
-                      <a:solidFill>
-                        <a:srgbClr val="D9DEE7"/>
-                      </a:solidFill>
-                      <a:prstDash val="solid"/>
-                      <a:round/>
-                      <a:headEnd type="none" w="med" len="med"/>
-                      <a:tailEnd type="none" w="med" len="med"/>
-                    </a:lnL>
-                    <a:lnR w="9525" cap="flat" cmpd="sng" algn="ctr">
-                      <a:solidFill>
-                        <a:srgbClr val="D9DEE7"/>
-                      </a:solidFill>
-                      <a:prstDash val="solid"/>
-                      <a:round/>
-                      <a:headEnd type="none" w="med" len="med"/>
-                      <a:tailEnd type="none" w="med" len="med"/>
-                    </a:lnR>
-                    <a:lnT w="9525" cap="flat" cmpd="sng" algn="ctr">
-                      <a:solidFill>
-                        <a:srgbClr val="D9DEE7"/>
-                      </a:solidFill>
-                      <a:prstDash val="solid"/>
-                      <a:round/>
-                      <a:headEnd type="none" w="med" len="med"/>
-                      <a:tailEnd type="none" w="med" len="med"/>
-                    </a:lnT>
-                    <a:lnB w="9525" cap="flat" cmpd="sng" algn="ctr">
-                      <a:solidFill>
-                        <a:srgbClr val="D9DEE7"/>
-                      </a:solidFill>
-                      <a:prstDash val="solid"/>
-                      <a:round/>
-                      <a:headEnd type="none" w="med" len="med"/>
-                      <a:tailEnd type="none" w="med" len="med"/>
-                    </a:lnB>
-                    <a:solidFill>
-                      <a:srgbClr val="FFFFFF"/>
-                    </a:solidFill>
-                  </a:tcPr>
-                </a:tc>
-                <a:tc>
-                  <a:txBody>
-                    <a:bodyPr/>
-                    <a:lstStyle/>
-                    <a:p>
-                      <a:pPr algn="ctr" indent="0" marL="0">
-                        <a:buNone/>
-                      </a:pPr>
-                      <a:r>
-                        <a:rPr lang="en-US" sz="1050" dirty="0">
-                          <a:solidFill>
-                            <a:srgbClr val="5B6B80"/>
-                          </a:solidFill>
-                        </a:rPr>
-                        <a:t>—</a:t>
-                      </a:r>
-                      <a:endParaRPr lang="en-US" sz="1050" dirty="0"/>
-                    </a:p>
-                  </a:txBody>
-                  <a:tcPr marL="27432" marR="27432" marT="27432" marB="27432" anchor="ctr">
-                    <a:lnL w="9525" cap="flat" cmpd="sng" algn="ctr">
-                      <a:solidFill>
-                        <a:srgbClr val="D9DEE7"/>
-                      </a:solidFill>
-                      <a:prstDash val="solid"/>
-                      <a:round/>
-                      <a:headEnd type="none" w="med" len="med"/>
-                      <a:tailEnd type="none" w="med" len="med"/>
-                    </a:lnL>
-                    <a:lnR w="9525" cap="flat" cmpd="sng" algn="ctr">
-                      <a:solidFill>
-                        <a:srgbClr val="D9DEE7"/>
-                      </a:solidFill>
-                      <a:prstDash val="solid"/>
-                      <a:round/>
-                      <a:headEnd type="none" w="med" len="med"/>
-                      <a:tailEnd type="none" w="med" len="med"/>
-                    </a:lnR>
-                    <a:lnT w="9525" cap="flat" cmpd="sng" algn="ctr">
-                      <a:solidFill>
-                        <a:srgbClr val="D9DEE7"/>
-                      </a:solidFill>
-                      <a:prstDash val="solid"/>
-                      <a:round/>
-                      <a:headEnd type="none" w="med" len="med"/>
-                      <a:tailEnd type="none" w="med" len="med"/>
-                    </a:lnT>
-                    <a:lnB w="9525" cap="flat" cmpd="sng" algn="ctr">
-                      <a:solidFill>
-                        <a:srgbClr val="D9DEE7"/>
-                      </a:solidFill>
-                      <a:prstDash val="solid"/>
-                      <a:round/>
-                      <a:headEnd type="none" w="med" len="med"/>
-                      <a:tailEnd type="none" w="med" len="med"/>
-                    </a:lnB>
-                    <a:solidFill>
-                      <a:srgbClr val="FFFFFF"/>
-                    </a:solidFill>
-                  </a:tcPr>
-                </a:tc>
-              </a:tr>
-              <a:tr h="384048">
-                <a:tc vMerge="1">
-                  <a:tcPr/>
-                </a:tc>
-                <a:tc>
-                  <a:txBody>
-                    <a:bodyPr/>
-                    <a:lstStyle/>
-                    <a:p>
-                      <a:pPr algn="l" indent="0" marL="0">
-                        <a:buNone/>
-                      </a:pPr>
-                      <a:r>
-                        <a:rPr lang="en-US" sz="1000" dirty="0">
-                          <a:solidFill>
-                            <a:srgbClr val="3D4757"/>
-                          </a:solidFill>
-                        </a:rPr>
-                        <a:t>预付</a:t>
-                      </a:r>
-                      <a:endParaRPr lang="en-US" sz="1000" dirty="0"/>
-                    </a:p>
-                  </a:txBody>
-                  <a:tcPr marL="27432" marR="27432" marT="27432" marB="27432" anchor="ctr">
-                    <a:lnL w="9525" cap="flat" cmpd="sng" algn="ctr">
-                      <a:solidFill>
-                        <a:srgbClr val="D9DEE7"/>
-                      </a:solidFill>
-                      <a:prstDash val="solid"/>
-                      <a:round/>
-                      <a:headEnd type="none" w="med" len="med"/>
-                      <a:tailEnd type="none" w="med" len="med"/>
-                    </a:lnL>
-                    <a:lnR w="9525" cap="flat" cmpd="sng" algn="ctr">
-                      <a:solidFill>
-                        <a:srgbClr val="D9DEE7"/>
-                      </a:solidFill>
-                      <a:prstDash val="solid"/>
-                      <a:round/>
-                      <a:headEnd type="none" w="med" len="med"/>
-                      <a:tailEnd type="none" w="med" len="med"/>
-                    </a:lnR>
-                    <a:lnT w="9525" cap="flat" cmpd="sng" algn="ctr">
-                      <a:solidFill>
-                        <a:srgbClr val="D9DEE7"/>
-                      </a:solidFill>
-                      <a:prstDash val="solid"/>
-                      <a:round/>
-                      <a:headEnd type="none" w="med" len="med"/>
-                      <a:tailEnd type="none" w="med" len="med"/>
-                    </a:lnT>
-                    <a:lnB w="9525" cap="flat" cmpd="sng" algn="ctr">
-                      <a:solidFill>
-                        <a:srgbClr val="D9DEE7"/>
-                      </a:solidFill>
-                      <a:prstDash val="solid"/>
-                      <a:round/>
-                      <a:headEnd type="none" w="med" len="med"/>
-                      <a:tailEnd type="none" w="med" len="med"/>
-                    </a:lnB>
-                    <a:solidFill>
-                      <a:srgbClr val="FFFFFF"/>
-                    </a:solidFill>
-                  </a:tcPr>
-                </a:tc>
-                <a:tc>
-                  <a:txBody>
-                    <a:bodyPr/>
-                    <a:lstStyle/>
-                    <a:p>
-                      <a:pPr algn="ctr" indent="0" marL="0">
-                        <a:buNone/>
-                      </a:pPr>
-                      <a:r>
-                        <a:rPr lang="en-US" sz="1050" b="1" dirty="0">
-                          <a:solidFill>
-                            <a:srgbClr val="FF7A1A"/>
-                          </a:solidFill>
-                        </a:rPr>
-                        <a:t>直付</a:t>
-                      </a:r>
-                      <a:endParaRPr lang="en-US" sz="1050" dirty="0"/>
-                    </a:p>
-                  </a:txBody>
-                  <a:tcPr marL="27432" marR="27432" marT="27432" marB="27432" anchor="ctr">
-                    <a:lnL w="9525" cap="flat" cmpd="sng" algn="ctr">
-                      <a:solidFill>
-                        <a:srgbClr val="D9DEE7"/>
-                      </a:solidFill>
-                      <a:prstDash val="solid"/>
-                      <a:round/>
-                      <a:headEnd type="none" w="med" len="med"/>
-                      <a:tailEnd type="none" w="med" len="med"/>
-                    </a:lnL>
-                    <a:lnR w="9525" cap="flat" cmpd="sng" algn="ctr">
-                      <a:solidFill>
-                        <a:srgbClr val="D9DEE7"/>
-                      </a:solidFill>
-                      <a:prstDash val="solid"/>
-                      <a:round/>
-                      <a:headEnd type="none" w="med" len="med"/>
-                      <a:tailEnd type="none" w="med" len="med"/>
-                    </a:lnR>
-                    <a:lnT w="9525" cap="flat" cmpd="sng" algn="ctr">
-                      <a:solidFill>
-                        <a:srgbClr val="D9DEE7"/>
-                      </a:solidFill>
-                      <a:prstDash val="solid"/>
-                      <a:round/>
-                      <a:headEnd type="none" w="med" len="med"/>
-                      <a:tailEnd type="none" w="med" len="med"/>
-                    </a:lnT>
-                    <a:lnB w="9525" cap="flat" cmpd="sng" algn="ctr">
-                      <a:solidFill>
-                        <a:srgbClr val="D9DEE7"/>
-                      </a:solidFill>
-                      <a:prstDash val="solid"/>
-                      <a:round/>
-                      <a:headEnd type="none" w="med" len="med"/>
-                      <a:tailEnd type="none" w="med" len="med"/>
-                    </a:lnB>
-                    <a:solidFill>
-                      <a:srgbClr val="FFF1E6"/>
-                    </a:solidFill>
-                  </a:tcPr>
-                </a:tc>
-                <a:tc>
-                  <a:txBody>
-                    <a:bodyPr/>
-                    <a:lstStyle/>
-                    <a:p>
-                      <a:pPr algn="ctr" indent="0" marL="0">
-                        <a:buNone/>
-                      </a:pPr>
-                      <a:r>
-                        <a:rPr lang="en-US" sz="1050" b="1" dirty="0">
-                          <a:solidFill>
-                            <a:srgbClr val="FF7A1A"/>
-                          </a:solidFill>
-                        </a:rPr>
-                        <a:t>直付</a:t>
-                      </a:r>
-                      <a:endParaRPr lang="en-US" sz="1050" dirty="0"/>
-                    </a:p>
-                  </a:txBody>
-                  <a:tcPr marL="27432" marR="27432" marT="27432" marB="27432" anchor="ctr">
-                    <a:lnL w="9525" cap="flat" cmpd="sng" algn="ctr">
-                      <a:solidFill>
-                        <a:srgbClr val="D9DEE7"/>
-                      </a:solidFill>
-                      <a:prstDash val="solid"/>
-                      <a:round/>
-                      <a:headEnd type="none" w="med" len="med"/>
-                      <a:tailEnd type="none" w="med" len="med"/>
-                    </a:lnL>
-                    <a:lnR w="9525" cap="flat" cmpd="sng" algn="ctr">
-                      <a:solidFill>
-                        <a:srgbClr val="D9DEE7"/>
-                      </a:solidFill>
-                      <a:prstDash val="solid"/>
-                      <a:round/>
-                      <a:headEnd type="none" w="med" len="med"/>
-                      <a:tailEnd type="none" w="med" len="med"/>
-                    </a:lnR>
-                    <a:lnT w="9525" cap="flat" cmpd="sng" algn="ctr">
-                      <a:solidFill>
-                        <a:srgbClr val="D9DEE7"/>
-                      </a:solidFill>
-                      <a:prstDash val="solid"/>
-                      <a:round/>
-                      <a:headEnd type="none" w="med" len="med"/>
-                      <a:tailEnd type="none" w="med" len="med"/>
-                    </a:lnT>
-                    <a:lnB w="9525" cap="flat" cmpd="sng" algn="ctr">
-                      <a:solidFill>
-                        <a:srgbClr val="D9DEE7"/>
-                      </a:solidFill>
-                      <a:prstDash val="solid"/>
-                      <a:round/>
-                      <a:headEnd type="none" w="med" len="med"/>
-                      <a:tailEnd type="none" w="med" len="med"/>
-                    </a:lnB>
-                    <a:solidFill>
-                      <a:srgbClr val="FFF1E6"/>
-                    </a:solidFill>
-                  </a:tcPr>
-                </a:tc>
-                <a:tc>
-                  <a:txBody>
-                    <a:bodyPr/>
-                    <a:lstStyle/>
-                    <a:p>
-                      <a:pPr algn="ctr" indent="0" marL="0">
-                        <a:buNone/>
-                      </a:pPr>
-                      <a:r>
-                        <a:rPr lang="en-US" sz="1050" b="1" dirty="0">
-                          <a:solidFill>
-                            <a:srgbClr val="FF7A1A"/>
-                          </a:solidFill>
-                        </a:rPr>
-                        <a:t>直付</a:t>
-                      </a:r>
-                      <a:endParaRPr lang="en-US" sz="1050" dirty="0"/>
-                    </a:p>
-                  </a:txBody>
-                  <a:tcPr marL="27432" marR="27432" marT="27432" marB="27432" anchor="ctr">
-                    <a:lnL w="9525" cap="flat" cmpd="sng" algn="ctr">
-                      <a:solidFill>
-                        <a:srgbClr val="D9DEE7"/>
-                      </a:solidFill>
-                      <a:prstDash val="solid"/>
-                      <a:round/>
-                      <a:headEnd type="none" w="med" len="med"/>
-                      <a:tailEnd type="none" w="med" len="med"/>
-                    </a:lnL>
-                    <a:lnR w="9525" cap="flat" cmpd="sng" algn="ctr">
-                      <a:solidFill>
-                        <a:srgbClr val="D9DEE7"/>
-                      </a:solidFill>
-                      <a:prstDash val="solid"/>
-                      <a:round/>
-                      <a:headEnd type="none" w="med" len="med"/>
-                      <a:tailEnd type="none" w="med" len="med"/>
-                    </a:lnR>
-                    <a:lnT w="9525" cap="flat" cmpd="sng" algn="ctr">
-                      <a:solidFill>
-                        <a:srgbClr val="D9DEE7"/>
-                      </a:solidFill>
-                      <a:prstDash val="solid"/>
-                      <a:round/>
-                      <a:headEnd type="none" w="med" len="med"/>
-                      <a:tailEnd type="none" w="med" len="med"/>
-                    </a:lnT>
-                    <a:lnB w="9525" cap="flat" cmpd="sng" algn="ctr">
-                      <a:solidFill>
-                        <a:srgbClr val="D9DEE7"/>
-                      </a:solidFill>
-                      <a:prstDash val="solid"/>
-                      <a:round/>
-                      <a:headEnd type="none" w="med" len="med"/>
-                      <a:tailEnd type="none" w="med" len="med"/>
-                    </a:lnB>
-                    <a:solidFill>
-                      <a:srgbClr val="FFF1E6"/>
-                    </a:solidFill>
-                  </a:tcPr>
-                </a:tc>
-                <a:tc>
-                  <a:txBody>
-                    <a:bodyPr/>
-                    <a:lstStyle/>
-                    <a:p>
-                      <a:pPr algn="ctr" indent="0" marL="0">
-                        <a:buNone/>
-                      </a:pPr>
-                      <a:r>
-                        <a:rPr lang="en-US" sz="1050" dirty="0">
-                          <a:solidFill>
-                            <a:srgbClr val="5B6B80"/>
-                          </a:solidFill>
-                        </a:rPr>
-                        <a:t>—</a:t>
-                      </a:r>
-                      <a:endParaRPr lang="en-US" sz="1050" dirty="0"/>
-                    </a:p>
-                  </a:txBody>
-                  <a:tcPr marL="27432" marR="27432" marT="27432" marB="27432" anchor="ctr">
-                    <a:lnL w="9525" cap="flat" cmpd="sng" algn="ctr">
-                      <a:solidFill>
-                        <a:srgbClr val="D9DEE7"/>
-                      </a:solidFill>
-                      <a:prstDash val="solid"/>
-                      <a:round/>
-                      <a:headEnd type="none" w="med" len="med"/>
-                      <a:tailEnd type="none" w="med" len="med"/>
-                    </a:lnL>
-                    <a:lnR w="9525" cap="flat" cmpd="sng" algn="ctr">
-                      <a:solidFill>
-                        <a:srgbClr val="D9DEE7"/>
-                      </a:solidFill>
-                      <a:prstDash val="solid"/>
-                      <a:round/>
-                      <a:headEnd type="none" w="med" len="med"/>
-                      <a:tailEnd type="none" w="med" len="med"/>
-                    </a:lnR>
-                    <a:lnT w="9525" cap="flat" cmpd="sng" algn="ctr">
-                      <a:solidFill>
-                        <a:srgbClr val="D9DEE7"/>
-                      </a:solidFill>
-                      <a:prstDash val="solid"/>
-                      <a:round/>
-                      <a:headEnd type="none" w="med" len="med"/>
-                      <a:tailEnd type="none" w="med" len="med"/>
-                    </a:lnT>
-                    <a:lnB w="9525" cap="flat" cmpd="sng" algn="ctr">
-                      <a:solidFill>
-                        <a:srgbClr val="D9DEE7"/>
-                      </a:solidFill>
-                      <a:prstDash val="solid"/>
-                      <a:round/>
-                      <a:headEnd type="none" w="med" len="med"/>
-                      <a:tailEnd type="none" w="med" len="med"/>
-                    </a:lnB>
-                    <a:solidFill>
-                      <a:srgbClr val="FFFFFF"/>
-                    </a:solidFill>
-                  </a:tcPr>
-                </a:tc>
-                <a:tc>
-                  <a:txBody>
-                    <a:bodyPr/>
-                    <a:lstStyle/>
-                    <a:p>
-                      <a:pPr algn="ctr" indent="0" marL="0">
-                        <a:buNone/>
-                      </a:pPr>
-                      <a:r>
-                        <a:rPr lang="en-US" sz="1050" dirty="0">
-                          <a:solidFill>
-                            <a:srgbClr val="5B6B80"/>
-                          </a:solidFill>
-                        </a:rPr>
-                        <a:t>—</a:t>
-                      </a:r>
-                      <a:endParaRPr lang="en-US" sz="1050" dirty="0"/>
-                    </a:p>
-                  </a:txBody>
-                  <a:tcPr marL="27432" marR="27432" marT="27432" marB="27432" anchor="ctr">
-                    <a:lnL w="9525" cap="flat" cmpd="sng" algn="ctr">
-                      <a:solidFill>
-                        <a:srgbClr val="D9DEE7"/>
-                      </a:solidFill>
-                      <a:prstDash val="solid"/>
-                      <a:round/>
-                      <a:headEnd type="none" w="med" len="med"/>
-                      <a:tailEnd type="none" w="med" len="med"/>
-                    </a:lnL>
-                    <a:lnR w="9525" cap="flat" cmpd="sng" algn="ctr">
-                      <a:solidFill>
-                        <a:srgbClr val="D9DEE7"/>
-                      </a:solidFill>
-                      <a:prstDash val="solid"/>
-                      <a:round/>
-                      <a:headEnd type="none" w="med" len="med"/>
-                      <a:tailEnd type="none" w="med" len="med"/>
-                    </a:lnR>
-                    <a:lnT w="9525" cap="flat" cmpd="sng" algn="ctr">
-                      <a:solidFill>
-                        <a:srgbClr val="D9DEE7"/>
-                      </a:solidFill>
-                      <a:prstDash val="solid"/>
-                      <a:round/>
-                      <a:headEnd type="none" w="med" len="med"/>
-                      <a:tailEnd type="none" w="med" len="med"/>
-                    </a:lnT>
-                    <a:lnB w="9525" cap="flat" cmpd="sng" algn="ctr">
-                      <a:solidFill>
-                        <a:srgbClr val="D9DEE7"/>
-                      </a:solidFill>
-                      <a:prstDash val="solid"/>
-                      <a:round/>
-                      <a:headEnd type="none" w="med" len="med"/>
-                      <a:tailEnd type="none" w="med" len="med"/>
-                    </a:lnB>
-                    <a:solidFill>
-                      <a:srgbClr val="FFFFFF"/>
-                    </a:solidFill>
-                  </a:tcPr>
-                </a:tc>
               </a:tr>
             </a:tbl>
           </a:graphicData>
@@ -5538,14 +4764,14 @@
       </p:graphicFrame>
       <p:sp>
         <p:nvSpPr>
-          <p:cNvPr id="13" name="th-a-legend"/>
+          <p:cNvPr id="13" name="th-a-note"/>
           <p:cNvSpPr txBox="1"/>
           <p:nvPr/>
         </p:nvSpPr>
         <p:spPr>
           <a:xfrm>
-            <a:off x="640080" y="5577840"/>
-            <a:ext cx="4526280" cy="411480"/>
+            <a:off x="640080" y="4498848"/>
+            <a:ext cx="4526280" cy="365760"/>
           </a:xfrm>
           <a:prstGeom prst="rect">
             <a:avLst/>
@@ -5561,67 +4787,197 @@
               <a:buNone/>
             </a:pPr>
             <a:r>
-              <a:rPr lang="en-US" sz="950" b="1" dirty="0">
-                <a:solidFill>
-                  <a:srgbClr val="287DFA"/>
-                </a:solidFill>
-              </a:rPr>
-              <a:t>代付</a:t>
-            </a:r>
+              <a:rPr lang="en-US" sz="900" dirty="0">
+                <a:solidFill>
+                  <a:srgbClr val="5B6B80"/>
+                </a:solidFill>
+              </a:rPr>
+              <a:t>预约 / 非预约、含 / 无套餐结论一致；* 非预约订单下单时无候补　小程序无法使用支付宝，订单全部落在「其他」</a:t>
+            </a:r>
+            <a:endParaRPr lang="en-US" sz="900" dirty="0"/>
+          </a:p>
+        </p:txBody>
+      </p:sp>
+      <p:sp>
+        <p:nvSpPr>
+          <p:cNvPr id="14" name="th-a-cost-h"/>
+          <p:cNvSpPr txBox="1"/>
+          <p:nvPr/>
+        </p:nvSpPr>
+        <p:spPr>
+          <a:xfrm>
+            <a:off x="640080" y="4892040"/>
+            <a:ext cx="4526280" cy="274320"/>
+          </a:xfrm>
+          <a:prstGeom prst="rect">
+            <a:avLst/>
+          </a:prstGeom>
+          <a:noFill/>
+          <a:ln/>
+        </p:spPr>
+        <p:txBody>
+          <a:bodyPr wrap="square" lIns="0" tIns="0" rIns="0" bIns="0" rtlCol="0" anchor="t"/>
+          <a:lstStyle/>
+          <a:p>
             <a:pPr indent="0" marL="0">
               <a:buNone/>
             </a:pPr>
             <a:r>
-              <a:rPr lang="en-US" sz="950" dirty="0">
-                <a:solidFill>
-                  <a:srgbClr val="5B6B80"/>
-                </a:solidFill>
-              </a:rPr>
-              <a:t>：扣位后由平台代付出票　</a:t>
-            </a:r>
+              <a:rPr lang="en-US" sz="1200" b="1" dirty="0">
+                <a:solidFill>
+                  <a:srgbClr val="FF7A1A"/>
+                </a:solidFill>
+              </a:rPr>
+              <a:t>直付的代价</a:t>
+            </a:r>
+            <a:endParaRPr lang="en-US" sz="1200" dirty="0"/>
+          </a:p>
+        </p:txBody>
+      </p:sp>
+      <p:sp>
+        <p:nvSpPr>
+          <p:cNvPr id="15" name="th-a-cost0"/>
+          <p:cNvSpPr txBox="1"/>
+          <p:nvPr/>
+        </p:nvSpPr>
+        <p:spPr>
+          <a:xfrm>
+            <a:off x="640080" y="5193792"/>
+            <a:ext cx="4526280" cy="274320"/>
+          </a:xfrm>
+          <a:prstGeom prst="rect">
+            <a:avLst/>
+          </a:prstGeom>
+          <a:noFill/>
+          <a:ln/>
+        </p:spPr>
+        <p:txBody>
+          <a:bodyPr wrap="square" lIns="0" tIns="0" rIns="0" bIns="0" rtlCol="0" anchor="ctr"/>
+          <a:lstStyle/>
+          <a:p>
             <a:pPr indent="0" marL="0">
               <a:buNone/>
             </a:pPr>
             <a:r>
-              <a:rPr lang="en-US" sz="950" b="1" dirty="0">
-                <a:solidFill>
-                  <a:srgbClr val="FF7A1A"/>
-                </a:solidFill>
-              </a:rPr>
-              <a:t>直付</a:t>
+              <a:rPr lang="en-US" sz="1050" b="1" dirty="0">
+                <a:solidFill>
+                  <a:srgbClr val="15315E"/>
+                </a:solidFill>
+              </a:rPr>
+              <a:t>流程体验　</a:t>
             </a:r>
             <a:pPr indent="0" marL="0">
               <a:buNone/>
             </a:pPr>
             <a:r>
-              <a:rPr lang="en-US" sz="950" dirty="0">
-                <a:solidFill>
-                  <a:srgbClr val="5B6B80"/>
-                </a:solidFill>
-              </a:rPr>
-              <a:t>：需召回用户自行支付　—：表中未列</a:t>
-            </a:r>
-            <a:endParaRPr lang="en-US" sz="950" dirty="0"/>
-          </a:p>
+              <a:rPr lang="en-US" sz="1050" dirty="0">
+                <a:solidFill>
+                  <a:srgbClr val="3D4757"/>
+                </a:solidFill>
+              </a:rPr>
+              <a:t>多一次召回，捡漏、智能需重复付款</a:t>
+            </a:r>
+            <a:endParaRPr lang="en-US" sz="1050" dirty="0"/>
+          </a:p>
+        </p:txBody>
+      </p:sp>
+      <p:sp>
+        <p:nvSpPr>
+          <p:cNvPr id="16" name="th-a-cost1"/>
+          <p:cNvSpPr txBox="1"/>
+          <p:nvPr/>
+        </p:nvSpPr>
+        <p:spPr>
+          <a:xfrm>
+            <a:off x="640080" y="5477256"/>
+            <a:ext cx="4526280" cy="274320"/>
+          </a:xfrm>
+          <a:prstGeom prst="rect">
+            <a:avLst/>
+          </a:prstGeom>
+          <a:noFill/>
+          <a:ln/>
+        </p:spPr>
+        <p:txBody>
+          <a:bodyPr wrap="square" lIns="0" tIns="0" rIns="0" bIns="0" rtlCol="0" anchor="ctr"/>
+          <a:lstStyle/>
           <a:p>
             <a:pPr indent="0" marL="0">
               <a:buNone/>
             </a:pPr>
             <a:r>
-              <a:rPr lang="en-US" sz="950" dirty="0">
-                <a:solidFill>
-                  <a:srgbClr val="5B6B80"/>
-                </a:solidFill>
-              </a:rPr>
-              <a:t>*：非支付宝或支付宝黑名单订单</a:t>
-            </a:r>
-            <a:endParaRPr lang="en-US" sz="950" dirty="0"/>
-          </a:p>
-        </p:txBody>
-      </p:sp>
-      <p:sp>
-        <p:nvSpPr>
-          <p:cNvPr id="14" name="th-b-chip"/>
+              <a:rPr lang="en-US" sz="1050" b="1" dirty="0">
+                <a:solidFill>
+                  <a:srgbClr val="15315E"/>
+                </a:solidFill>
+              </a:rPr>
+              <a:t>扣位资源　</a:t>
+            </a:r>
+            <a:pPr indent="0" marL="0">
+              <a:buNone/>
+            </a:pPr>
+            <a:r>
+              <a:rPr lang="en-US" sz="1050" dirty="0">
+                <a:solidFill>
+                  <a:srgbClr val="3D4757"/>
+                </a:solidFill>
+              </a:rPr>
+              <a:t>智能扣位消耗捡漏次数；未支付锁单 10h</a:t>
+            </a:r>
+            <a:endParaRPr lang="en-US" sz="1050" dirty="0"/>
+          </a:p>
+        </p:txBody>
+      </p:sp>
+      <p:sp>
+        <p:nvSpPr>
+          <p:cNvPr id="17" name="th-a-cost2"/>
+          <p:cNvSpPr txBox="1"/>
+          <p:nvPr/>
+        </p:nvSpPr>
+        <p:spPr>
+          <a:xfrm>
+            <a:off x="640080" y="5760720"/>
+            <a:ext cx="4526280" cy="274320"/>
+          </a:xfrm>
+          <a:prstGeom prst="rect">
+            <a:avLst/>
+          </a:prstGeom>
+          <a:noFill/>
+          <a:ln/>
+        </p:spPr>
+        <p:txBody>
+          <a:bodyPr wrap="square" lIns="0" tIns="0" rIns="0" bIns="0" rtlCol="0" anchor="ctr"/>
+          <a:lstStyle/>
+          <a:p>
+            <a:pPr indent="0" marL="0">
+              <a:buNone/>
+            </a:pPr>
+            <a:r>
+              <a:rPr lang="en-US" sz="1050" b="1" dirty="0">
+                <a:solidFill>
+                  <a:srgbClr val="15315E"/>
+                </a:solidFill>
+              </a:rPr>
+              <a:t>外呼资源　</a:t>
+            </a:r>
+            <a:pPr indent="0" marL="0">
+              <a:buNone/>
+            </a:pPr>
+            <a:r>
+              <a:rPr lang="en-US" sz="1050" dirty="0">
+                <a:solidFill>
+                  <a:srgbClr val="3D4757"/>
+                </a:solidFill>
+              </a:rPr>
+              <a:t>捡漏、智能、中断外呼叠加，过度打扰</a:t>
+            </a:r>
+            <a:endParaRPr lang="en-US" sz="1050" dirty="0"/>
+          </a:p>
+        </p:txBody>
+      </p:sp>
+      <p:sp>
+        <p:nvSpPr>
+          <p:cNvPr id="18" name="th-b-chip"/>
           <p:cNvSpPr/>
           <p:nvPr/>
         </p:nvSpPr>
@@ -5648,7 +5004,7 @@
       </p:sp>
       <p:sp>
         <p:nvSpPr>
-          <p:cNvPr id="15" name="th-b-chip-t"/>
+          <p:cNvPr id="19" name="th-b-chip-t"/>
           <p:cNvSpPr txBox="1"/>
           <p:nvPr/>
         </p:nvSpPr>
@@ -5684,7 +5040,7 @@
       </p:sp>
       <p:sp>
         <p:nvSpPr>
-          <p:cNvPr id="16" name="th-b-h"/>
+          <p:cNvPr id="20" name="th-b-h"/>
           <p:cNvSpPr txBox="1"/>
           <p:nvPr/>
         </p:nvSpPr>
@@ -5720,7 +5076,7 @@
       </p:sp>
       <p:sp>
         <p:nvSpPr>
-          <p:cNvPr id="17" name="th-b-k-l"/>
+          <p:cNvPr id="21" name="th-b-k-l"/>
           <p:cNvSpPr txBox="1"/>
           <p:nvPr/>
         </p:nvSpPr>
@@ -5756,7 +5112,7 @@
       </p:sp>
       <p:sp>
         <p:nvSpPr>
-          <p:cNvPr id="18" name="th-b-k-v"/>
+          <p:cNvPr id="22" name="th-b-k-v"/>
           <p:cNvSpPr txBox="1"/>
           <p:nvPr/>
         </p:nvSpPr>
@@ -5792,7 +5148,7 @@
       </p:sp>
       <p:sp>
         <p:nvSpPr>
-          <p:cNvPr id="19" name="th-b-k-n"/>
+          <p:cNvPr id="23" name="th-b-k-n"/>
           <p:cNvSpPr txBox="1"/>
           <p:nvPr/>
         </p:nvSpPr>
@@ -5828,7 +5184,7 @@
       </p:sp>
       <p:sp>
         <p:nvSpPr>
-          <p:cNvPr id="20" name="th-b-bar0"/>
+          <p:cNvPr id="24" name="th-b-bar0"/>
           <p:cNvSpPr/>
           <p:nvPr/>
         </p:nvSpPr>
@@ -5853,7 +5209,7 @@
       </p:sp>
       <p:sp>
         <p:nvSpPr>
-          <p:cNvPr id="21" name="th-b-p0"/>
+          <p:cNvPr id="25" name="th-b-p0"/>
           <p:cNvSpPr txBox="1"/>
           <p:nvPr/>
         </p:nvSpPr>
@@ -5903,7 +5259,7 @@
       </p:sp>
       <p:sp>
         <p:nvSpPr>
-          <p:cNvPr id="22" name="th-b-bar1"/>
+          <p:cNvPr id="26" name="th-b-bar1"/>
           <p:cNvSpPr/>
           <p:nvPr/>
         </p:nvSpPr>
@@ -5928,7 +5284,7 @@
       </p:sp>
       <p:sp>
         <p:nvSpPr>
-          <p:cNvPr id="23" name="th-b-p1"/>
+          <p:cNvPr id="27" name="th-b-p1"/>
           <p:cNvSpPr txBox="1"/>
           <p:nvPr/>
         </p:nvSpPr>
@@ -5978,7 +5334,7 @@
       </p:sp>
       <p:sp>
         <p:nvSpPr>
-          <p:cNvPr id="24" name="th-c-chip"/>
+          <p:cNvPr id="28" name="th-c-chip"/>
           <p:cNvSpPr/>
           <p:nvPr/>
         </p:nvSpPr>
@@ -6005,7 +5361,7 @@
       </p:sp>
       <p:sp>
         <p:nvSpPr>
-          <p:cNvPr id="25" name="th-c-chip-t"/>
+          <p:cNvPr id="29" name="th-c-chip-t"/>
           <p:cNvSpPr txBox="1"/>
           <p:nvPr/>
         </p:nvSpPr>
@@ -6041,7 +5397,7 @@
       </p:sp>
       <p:sp>
         <p:nvSpPr>
-          <p:cNvPr id="26" name="th-c-h"/>
+          <p:cNvPr id="30" name="th-c-h"/>
           <p:cNvSpPr txBox="1"/>
           <p:nvPr/>
         </p:nvSpPr>
@@ -6077,7 +5433,7 @@
       </p:sp>
       <p:sp>
         <p:nvSpPr>
-          <p:cNvPr id="27" name="th-c-n0"/>
+          <p:cNvPr id="31" name="th-c-n0"/>
           <p:cNvSpPr/>
           <p:nvPr/>
         </p:nvSpPr>
@@ -6102,7 +5458,7 @@
       </p:sp>
       <p:sp>
         <p:nvSpPr>
-          <p:cNvPr id="28" name="th-c-n0-t"/>
+          <p:cNvPr id="32" name="th-c-n0-t"/>
           <p:cNvSpPr txBox="1"/>
           <p:nvPr/>
         </p:nvSpPr>
@@ -6138,7 +5494,7 @@
       </p:sp>
       <p:sp>
         <p:nvSpPr>
-          <p:cNvPr id="29" name="th-c-p0"/>
+          <p:cNvPr id="33" name="th-c-p0"/>
           <p:cNvSpPr txBox="1"/>
           <p:nvPr/>
         </p:nvSpPr>
@@ -6188,7 +5544,7 @@
       </p:sp>
       <p:sp>
         <p:nvSpPr>
-          <p:cNvPr id="30" name="th-c-n1"/>
+          <p:cNvPr id="34" name="th-c-n1"/>
           <p:cNvSpPr/>
           <p:nvPr/>
         </p:nvSpPr>
@@ -6213,7 +5569,7 @@
       </p:sp>
       <p:sp>
         <p:nvSpPr>
-          <p:cNvPr id="31" name="th-c-n1-t"/>
+          <p:cNvPr id="35" name="th-c-n1-t"/>
           <p:cNvSpPr txBox="1"/>
           <p:nvPr/>
         </p:nvSpPr>
@@ -6249,7 +5605,7 @@
       </p:sp>
       <p:sp>
         <p:nvSpPr>
-          <p:cNvPr id="32" name="th-c-p1"/>
+          <p:cNvPr id="36" name="th-c-p1"/>
           <p:cNvSpPr txBox="1"/>
           <p:nvPr/>
         </p:nvSpPr>
@@ -6299,7 +5655,7 @@
       </p:sp>
       <p:sp>
         <p:nvSpPr>
-          <p:cNvPr id="33" name="th-c-goal"/>
+          <p:cNvPr id="37" name="th-c-goal"/>
           <p:cNvSpPr/>
           <p:nvPr/>
         </p:nvSpPr>
@@ -6326,7 +5682,7 @@
       </p:sp>
       <p:sp>
         <p:nvSpPr>
-          <p:cNvPr id="34" name="th-c-goal-t"/>
+          <p:cNvPr id="38" name="th-c-goal-t"/>
           <p:cNvSpPr txBox="1"/>
           <p:nvPr/>
         </p:nvSpPr>
